--- a/experiments/phic_psi_poc-redo/phic_psi_presentation.pptx
+++ b/experiments/phic_psi_poc-redo/phic_psi_presentation.pptx
@@ -3021,7 +3021,47 @@
                   <a:schemeClr val="bg1"/>
                 </a:solidFill>
               </a:rPr>
-              <a:t>Can a regression network recover φc and ψ from gravitational-wave strain?</a:t>
+              <a:t xml:space="preserve">Can a regression network recover </a:t>
+            </a:r>
+            <a:r>
+              <a:rPr i="1" lang="en-US" sz="4000" b="1" dirty="0">
+                <a:solidFill>
+                  <a:schemeClr val="bg1"/>
+                </a:solidFill>
+              </a:rPr>
+              <a:t>φ</a:t>
+            </a:r>
+            <a:r>
+              <a:rPr baseline="-25000" lang="en-US" sz="4000" b="1" dirty="0">
+                <a:solidFill>
+                  <a:schemeClr val="bg1"/>
+                </a:solidFill>
+              </a:rPr>
+              <a:t>c</a:t>
+            </a:r>
+            <a:r>
+              <a:rPr lang="en-US" sz="4000" b="1" dirty="0">
+                <a:solidFill>
+                  <a:schemeClr val="bg1"/>
+                </a:solidFill>
+              </a:rPr>
+              <a:t xml:space="preserve"> and </a:t>
+            </a:r>
+            <a:r>
+              <a:rPr i="1" lang="en-US" sz="4000" b="1" dirty="0">
+                <a:solidFill>
+                  <a:schemeClr val="bg1"/>
+                </a:solidFill>
+              </a:rPr>
+              <a:t>ψ</a:t>
+            </a:r>
+            <a:r>
+              <a:rPr lang="en-US" sz="4000" b="1" dirty="0">
+                <a:solidFill>
+                  <a:schemeClr val="bg1"/>
+                </a:solidFill>
+              </a:rPr>
+              <a:t xml:space="preserve"> from gravitational-wave strain?</a:t>
             </a:r>
             <a:endParaRPr lang="en-US" sz="4000" dirty="0"/>
           </a:p>
@@ -3059,7 +3099,47 @@
                   <a:schemeClr val="bg2"/>
                 </a:solidFill>
               </a:rPr>
-              <a:t>A systematically verified null result on the 2φc ± 2ψ degeneracy</a:t>
+              <a:t>A systematically verified null result on the 2</a:t>
+            </a:r>
+            <a:r>
+              <a:rPr i="1" lang="en-US" sz="2000" dirty="0">
+                <a:solidFill>
+                  <a:schemeClr val="bg2"/>
+                </a:solidFill>
+              </a:rPr>
+              <a:t>φ</a:t>
+            </a:r>
+            <a:r>
+              <a:rPr baseline="-25000" lang="en-US" sz="2000" dirty="0">
+                <a:solidFill>
+                  <a:schemeClr val="bg2"/>
+                </a:solidFill>
+              </a:rPr>
+              <a:t>c</a:t>
+            </a:r>
+            <a:r>
+              <a:rPr lang="en-US" sz="2000" dirty="0">
+                <a:solidFill>
+                  <a:schemeClr val="bg2"/>
+                </a:solidFill>
+              </a:rPr>
+              <a:t xml:space="preserve"> ± 2</a:t>
+            </a:r>
+            <a:r>
+              <a:rPr i="1" lang="en-US" sz="2000" dirty="0">
+                <a:solidFill>
+                  <a:schemeClr val="bg2"/>
+                </a:solidFill>
+              </a:rPr>
+              <a:t>ψ</a:t>
+            </a:r>
+            <a:r>
+              <a:rPr lang="en-US" sz="2000" dirty="0">
+                <a:solidFill>
+                  <a:schemeClr val="bg2"/>
+                </a:solidFill>
+              </a:rPr>
+              <a:t xml:space="preserve"> degeneracy</a:t>
             </a:r>
             <a:endParaRPr lang="en-US" sz="2000" dirty="0"/>
           </a:p>
@@ -3248,7 +3328,111 @@
                   <a:schemeClr val="bg2"/>
                 </a:solidFill>
               </a:rPr>
-              <a:t>Step 0: do poc_b's combo_A / combo_B outputs keep a healthy magnitude (std_ratio) after the penalty?</a:t>
+              <a:t xml:space="preserve">Step 0: do </a:t>
+            </a:r>
+            <a:r>
+              <a:rPr lang="en-US" sz="1800" dirty="0">
+                <a:solidFill>
+                  <a:schemeClr val="bg2"/>
+                </a:solidFill>
+              </a:rPr>
+              <a:t>POC</a:t>
+            </a:r>
+            <a:r>
+              <a:rPr baseline="-25000" lang="en-US" sz="1800" dirty="0">
+                <a:solidFill>
+                  <a:schemeClr val="bg2"/>
+                </a:solidFill>
+              </a:rPr>
+              <a:t>B</a:t>
+            </a:r>
+            <a:r>
+              <a:rPr lang="en-US" sz="1800" dirty="0">
+                <a:solidFill>
+                  <a:schemeClr val="bg2"/>
+                </a:solidFill>
+              </a:rPr>
+              <a:t>'s 2</a:t>
+            </a:r>
+            <a:r>
+              <a:rPr i="1" lang="en-US" sz="1800" dirty="0">
+                <a:solidFill>
+                  <a:schemeClr val="bg2"/>
+                </a:solidFill>
+              </a:rPr>
+              <a:t>φ</a:t>
+            </a:r>
+            <a:r>
+              <a:rPr baseline="-25000" lang="en-US" sz="1800" dirty="0">
+                <a:solidFill>
+                  <a:schemeClr val="bg2"/>
+                </a:solidFill>
+              </a:rPr>
+              <a:t>c</a:t>
+            </a:r>
+            <a:r>
+              <a:rPr lang="en-US" sz="1800" dirty="0">
+                <a:solidFill>
+                  <a:schemeClr val="bg2"/>
+                </a:solidFill>
+              </a:rPr>
+              <a:t xml:space="preserve"> + 2</a:t>
+            </a:r>
+            <a:r>
+              <a:rPr i="1" lang="en-US" sz="1800" dirty="0">
+                <a:solidFill>
+                  <a:schemeClr val="bg2"/>
+                </a:solidFill>
+              </a:rPr>
+              <a:t>ψ</a:t>
+            </a:r>
+            <a:r>
+              <a:rPr lang="en-US" sz="1800" dirty="0">
+                <a:solidFill>
+                  <a:schemeClr val="bg2"/>
+                </a:solidFill>
+              </a:rPr>
+              <a:t xml:space="preserve"> / 2</a:t>
+            </a:r>
+            <a:r>
+              <a:rPr i="1" lang="en-US" sz="1800" dirty="0">
+                <a:solidFill>
+                  <a:schemeClr val="bg2"/>
+                </a:solidFill>
+              </a:rPr>
+              <a:t>φ</a:t>
+            </a:r>
+            <a:r>
+              <a:rPr baseline="-25000" lang="en-US" sz="1800" dirty="0">
+                <a:solidFill>
+                  <a:schemeClr val="bg2"/>
+                </a:solidFill>
+              </a:rPr>
+              <a:t>c</a:t>
+            </a:r>
+            <a:r>
+              <a:rPr lang="en-US" sz="1800" dirty="0">
+                <a:solidFill>
+                  <a:schemeClr val="bg2"/>
+                </a:solidFill>
+              </a:rPr>
+              <a:t xml:space="preserve"> − 2</a:t>
+            </a:r>
+            <a:r>
+              <a:rPr i="1" lang="en-US" sz="1800" dirty="0">
+                <a:solidFill>
+                  <a:schemeClr val="bg2"/>
+                </a:solidFill>
+              </a:rPr>
+              <a:t>ψ</a:t>
+            </a:r>
+            <a:r>
+              <a:rPr lang="en-US" sz="1800" dirty="0">
+                <a:solidFill>
+                  <a:schemeClr val="bg2"/>
+                </a:solidFill>
+              </a:rPr>
+              <a:t xml:space="preserve"> outputs keep a healthy magnitude (std_ratio) after the penalty?</a:t>
             </a:r>
             <a:endParaRPr lang="en-US" sz="1800" dirty="0"/>
           </a:p>
@@ -3313,12 +3497,20 @@
               <a:buNone/>
             </a:pPr>
             <a:r>
+              <a:rPr i="1" lang="en-US" sz="1400" b="1" dirty="0">
+                <a:solidFill>
+                  <a:schemeClr val="accent1"/>
+                </a:solidFill>
+              </a:rPr>
+              <a:t>λ</a:t>
+            </a:r>
+            <a:r>
               <a:rPr lang="en-US" sz="1400" b="1" dirty="0">
                 <a:solidFill>
                   <a:schemeClr val="accent1"/>
                 </a:solidFill>
               </a:rPr>
-              <a:t>λ = 0.01</a:t>
+              <a:t xml:space="preserve"> = 0.01</a:t>
             </a:r>
             <a:endParaRPr lang="en-US" sz="1400" dirty="0"/>
           </a:p>
@@ -3458,12 +3650,20 @@
               <a:buNone/>
             </a:pPr>
             <a:r>
+              <a:rPr i="1" lang="en-US" sz="1400" b="1" dirty="0">
+                <a:solidFill>
+                  <a:schemeClr val="accent1"/>
+                </a:solidFill>
+              </a:rPr>
+              <a:t>λ</a:t>
+            </a:r>
+            <a:r>
               <a:rPr lang="en-US" sz="1400" b="1" dirty="0">
                 <a:solidFill>
                   <a:schemeClr val="accent1"/>
                 </a:solidFill>
               </a:rPr>
-              <a:t>λ = 0.05</a:t>
+              <a:t xml:space="preserve"> = 0.05</a:t>
             </a:r>
             <a:endParaRPr lang="en-US" sz="1400" dirty="0"/>
           </a:p>
@@ -3603,12 +3803,20 @@
               <a:buNone/>
             </a:pPr>
             <a:r>
+              <a:rPr i="1" lang="en-US" sz="1400" b="1" dirty="0">
+                <a:solidFill>
+                  <a:schemeClr val="accent1"/>
+                </a:solidFill>
+              </a:rPr>
+              <a:t>λ</a:t>
+            </a:r>
+            <a:r>
               <a:rPr lang="en-US" sz="1400" b="1" dirty="0">
                 <a:solidFill>
                   <a:schemeClr val="accent1"/>
                 </a:solidFill>
               </a:rPr>
-              <a:t>λ = 0.10</a:t>
+              <a:t xml:space="preserve"> = 0.10</a:t>
             </a:r>
             <a:endParaRPr lang="en-US" sz="1400" dirty="0"/>
           </a:p>
@@ -4125,16 +4333,93 @@
               </a:rPr>
               <a:t>Finding: </a:t>
             </a:r>
-            <a:pPr indent="0" marL="0">
-              <a:buNone/>
-            </a:pPr>
             <a:r>
               <a:rPr lang="en-US" sz="1400" dirty="0">
                 <a:solidFill>
                   <a:schemeClr val="tx1"/>
                 </a:solidFill>
               </a:rPr>
-              <a:t>poc_a and poc_b mode-collapse; tcn and cnn_attention are noisy.</a:t>
+              <a:t>POC</a:t>
+            </a:r>
+            <a:r>
+              <a:rPr baseline="-25000" lang="en-US" sz="1400" dirty="0">
+                <a:solidFill>
+                  <a:schemeClr val="tx1"/>
+                </a:solidFill>
+              </a:rPr>
+              <a:t>A</a:t>
+            </a:r>
+            <a:r>
+              <a:rPr lang="en-US" sz="1400" dirty="0">
+                <a:solidFill>
+                  <a:schemeClr val="tx1"/>
+                </a:solidFill>
+              </a:rPr>
+              <a:t xml:space="preserve"> and </a:t>
+            </a:r>
+            <a:r>
+              <a:rPr lang="en-US" sz="1400" dirty="0">
+                <a:solidFill>
+                  <a:schemeClr val="tx1"/>
+                </a:solidFill>
+              </a:rPr>
+              <a:t>POC</a:t>
+            </a:r>
+            <a:r>
+              <a:rPr baseline="-25000" lang="en-US" sz="1400" dirty="0">
+                <a:solidFill>
+                  <a:schemeClr val="tx1"/>
+                </a:solidFill>
+              </a:rPr>
+              <a:t>B</a:t>
+            </a:r>
+            <a:r>
+              <a:rPr lang="en-US" sz="1400" dirty="0">
+                <a:solidFill>
+                  <a:schemeClr val="tx1"/>
+                </a:solidFill>
+              </a:rPr>
+              <a:t xml:space="preserve"> mode-collapse; </a:t>
+            </a:r>
+            <a:r>
+              <a:rPr lang="en-US" sz="1400" dirty="0">
+                <a:solidFill>
+                  <a:schemeClr val="tx1"/>
+                </a:solidFill>
+              </a:rPr>
+              <a:t>TCN</a:t>
+            </a:r>
+            <a:r>
+              <a:rPr lang="en-US" sz="1400" dirty="0">
+                <a:solidFill>
+                  <a:schemeClr val="tx1"/>
+                </a:solidFill>
+              </a:rPr>
+              <a:t xml:space="preserve"> and </a:t>
+            </a:r>
+            <a:r>
+              <a:rPr lang="en-US" sz="1400" dirty="0">
+                <a:solidFill>
+                  <a:schemeClr val="tx1"/>
+                </a:solidFill>
+              </a:rPr>
+              <a:t>CNN</a:t>
+            </a:r>
+            <a:r>
+              <a:rPr baseline="-25000" lang="en-US" sz="1400" dirty="0">
+                <a:solidFill>
+                  <a:schemeClr val="tx1"/>
+                </a:solidFill>
+              </a:rPr>
+              <a:t>attention</a:t>
+            </a:r>
+            <a:r>
+              <a:rPr lang="en-US" sz="1400" dirty="0">
+                <a:solidFill>
+                  <a:schemeClr val="tx1"/>
+                </a:solidFill>
+              </a:rPr>
+              <a:t xml:space="preserve"> are noisy.</a:t>
             </a:r>
             <a:endParaRPr lang="en-US" sz="1400" dirty="0"/>
           </a:p>
@@ -4342,9 +4627,6 @@
               </a:rPr>
               <a:t>Finding: </a:t>
             </a:r>
-            <a:pPr indent="0" marL="0">
-              <a:buNone/>
-            </a:pPr>
             <a:r>
               <a:rPr lang="en-US" sz="1400" dirty="0">
                 <a:solidFill>
@@ -4559,16 +4841,53 @@
               </a:rPr>
               <a:t>Finding: </a:t>
             </a:r>
-            <a:pPr indent="0" marL="0">
-              <a:buNone/>
-            </a:pPr>
             <a:r>
               <a:rPr lang="en-US" sz="1400" dirty="0">
                 <a:solidFill>
                   <a:schemeClr val="tx1"/>
                 </a:solidFill>
               </a:rPr>
-              <a:t>No φc/ψ test is significant; most are on the wrong side of chance.</a:t>
+              <a:t xml:space="preserve">No </a:t>
+            </a:r>
+            <a:r>
+              <a:rPr i="1" lang="en-US" sz="1400" dirty="0">
+                <a:solidFill>
+                  <a:schemeClr val="tx1"/>
+                </a:solidFill>
+              </a:rPr>
+              <a:t>φ</a:t>
+            </a:r>
+            <a:r>
+              <a:rPr baseline="-25000" lang="en-US" sz="1400" dirty="0">
+                <a:solidFill>
+                  <a:schemeClr val="tx1"/>
+                </a:solidFill>
+              </a:rPr>
+              <a:t>c</a:t>
+            </a:r>
+            <a:r>
+              <a:rPr lang="en-US" sz="1400" dirty="0">
+                <a:solidFill>
+                  <a:schemeClr val="tx1"/>
+                </a:solidFill>
+              </a:rPr>
+              <a:t>/</a:t>
+            </a:r>
+            <a:r>
+              <a:rPr i="1" lang="en-US" sz="1400" dirty="0">
+                <a:solidFill>
+                  <a:schemeClr val="tx1"/>
+                </a:solidFill>
+              </a:rPr>
+              <a:t>ψ</a:t>
+            </a:r>
+            <a:r>
+              <a:rPr lang="en-US" sz="1400" dirty="0">
+                <a:solidFill>
+                  <a:schemeClr val="tx1"/>
+                </a:solidFill>
+              </a:rPr>
+              <a:t xml:space="preserve"> test is significant; most are on the wrong side of chance.</a:t>
             </a:r>
             <a:endParaRPr lang="en-US" sz="1400" dirty="0"/>
           </a:p>
@@ -4776,9 +5095,6 @@
               </a:rPr>
               <a:t>Finding: </a:t>
             </a:r>
-            <a:pPr indent="0" marL="0">
-              <a:buNone/>
-            </a:pPr>
             <a:r>
               <a:rPr lang="en-US" sz="1400" dirty="0">
                 <a:solidFill>
@@ -5033,12 +5349,44 @@
               <a:buNone/>
             </a:pPr>
             <a:r>
+              <a:rPr i="1" lang="en-US" sz="1400" dirty="0">
+                <a:solidFill>
+                  <a:schemeClr val="tx1"/>
+                </a:solidFill>
+              </a:rPr>
+              <a:t>φ</a:t>
+            </a:r>
+            <a:r>
+              <a:rPr baseline="-25000" lang="en-US" sz="1400" dirty="0">
+                <a:solidFill>
+                  <a:schemeClr val="tx1"/>
+                </a:solidFill>
+              </a:rPr>
+              <a:t>c</a:t>
+            </a:r>
+            <a:r>
               <a:rPr lang="en-US" sz="1400" dirty="0">
                 <a:solidFill>
                   <a:schemeClr val="tx1"/>
                 </a:solidFill>
               </a:rPr>
-              <a:t>φc and ψ bootstrap tests significant (4 models × 2 heads)</a:t>
+              <a:t xml:space="preserve"> and </a:t>
+            </a:r>
+            <a:r>
+              <a:rPr i="1" lang="en-US" sz="1400" dirty="0">
+                <a:solidFill>
+                  <a:schemeClr val="tx1"/>
+                </a:solidFill>
+              </a:rPr>
+              <a:t>ψ</a:t>
+            </a:r>
+            <a:r>
+              <a:rPr lang="en-US" sz="1400" dirty="0">
+                <a:solidFill>
+                  <a:schemeClr val="tx1"/>
+                </a:solidFill>
+              </a:rPr>
+              <a:t xml:space="preserve"> bootstrap tests significant (4 models × 2 heads)</a:t>
             </a:r>
             <a:endParaRPr lang="en-US" sz="1400" dirty="0"/>
           </a:p>
@@ -5474,7 +5822,117 @@
                 <a:ea typeface="Cambria" pitchFamily="34" charset="-122"/>
                 <a:cs typeface="Cambria" pitchFamily="34" charset="-120"/>
               </a:rPr>
-              <a:t>On this architecture set, φc and ψ are not recoverable from strain by a regression network, individually or through 2φc ± 2ψ.</a:t>
+              <a:t xml:space="preserve">On this architecture set, </a:t>
+            </a:r>
+            <a:r>
+              <a:rPr i="1" lang="en-US" sz="2000" b="1" dirty="0">
+                <a:solidFill>
+                  <a:schemeClr val="bg1"/>
+                </a:solidFill>
+                <a:latin typeface="Cambria" pitchFamily="34" charset="0"/>
+                <a:ea typeface="Cambria" pitchFamily="34" charset="-122"/>
+                <a:cs typeface="Cambria" pitchFamily="34" charset="-120"/>
+              </a:rPr>
+              <a:t>φ</a:t>
+            </a:r>
+            <a:r>
+              <a:rPr baseline="-25000" lang="en-US" sz="2000" b="1" dirty="0">
+                <a:solidFill>
+                  <a:schemeClr val="bg1"/>
+                </a:solidFill>
+                <a:latin typeface="Cambria" pitchFamily="34" charset="0"/>
+                <a:ea typeface="Cambria" pitchFamily="34" charset="-122"/>
+                <a:cs typeface="Cambria" pitchFamily="34" charset="-120"/>
+              </a:rPr>
+              <a:t>c</a:t>
+            </a:r>
+            <a:r>
+              <a:rPr lang="en-US" sz="2000" b="1" dirty="0">
+                <a:solidFill>
+                  <a:schemeClr val="bg1"/>
+                </a:solidFill>
+                <a:latin typeface="Cambria" pitchFamily="34" charset="0"/>
+                <a:ea typeface="Cambria" pitchFamily="34" charset="-122"/>
+                <a:cs typeface="Cambria" pitchFamily="34" charset="-120"/>
+              </a:rPr>
+              <a:t xml:space="preserve"> and </a:t>
+            </a:r>
+            <a:r>
+              <a:rPr i="1" lang="en-US" sz="2000" b="1" dirty="0">
+                <a:solidFill>
+                  <a:schemeClr val="bg1"/>
+                </a:solidFill>
+                <a:latin typeface="Cambria" pitchFamily="34" charset="0"/>
+                <a:ea typeface="Cambria" pitchFamily="34" charset="-122"/>
+                <a:cs typeface="Cambria" pitchFamily="34" charset="-120"/>
+              </a:rPr>
+              <a:t>ψ</a:t>
+            </a:r>
+            <a:r>
+              <a:rPr lang="en-US" sz="2000" b="1" dirty="0">
+                <a:solidFill>
+                  <a:schemeClr val="bg1"/>
+                </a:solidFill>
+                <a:latin typeface="Cambria" pitchFamily="34" charset="0"/>
+                <a:ea typeface="Cambria" pitchFamily="34" charset="-122"/>
+                <a:cs typeface="Cambria" pitchFamily="34" charset="-120"/>
+              </a:rPr>
+              <a:t xml:space="preserve"> are not recoverable from strain by a regression network, individually or through 2</a:t>
+            </a:r>
+            <a:r>
+              <a:rPr i="1" lang="en-US" sz="2000" b="1" dirty="0">
+                <a:solidFill>
+                  <a:schemeClr val="bg1"/>
+                </a:solidFill>
+                <a:latin typeface="Cambria" pitchFamily="34" charset="0"/>
+                <a:ea typeface="Cambria" pitchFamily="34" charset="-122"/>
+                <a:cs typeface="Cambria" pitchFamily="34" charset="-120"/>
+              </a:rPr>
+              <a:t>φ</a:t>
+            </a:r>
+            <a:r>
+              <a:rPr baseline="-25000" lang="en-US" sz="2000" b="1" dirty="0">
+                <a:solidFill>
+                  <a:schemeClr val="bg1"/>
+                </a:solidFill>
+                <a:latin typeface="Cambria" pitchFamily="34" charset="0"/>
+                <a:ea typeface="Cambria" pitchFamily="34" charset="-122"/>
+                <a:cs typeface="Cambria" pitchFamily="34" charset="-120"/>
+              </a:rPr>
+              <a:t>c</a:t>
+            </a:r>
+            <a:r>
+              <a:rPr lang="en-US" sz="2000" b="1" dirty="0">
+                <a:solidFill>
+                  <a:schemeClr val="bg1"/>
+                </a:solidFill>
+                <a:latin typeface="Cambria" pitchFamily="34" charset="0"/>
+                <a:ea typeface="Cambria" pitchFamily="34" charset="-122"/>
+                <a:cs typeface="Cambria" pitchFamily="34" charset="-120"/>
+              </a:rPr>
+              <a:t xml:space="preserve"> ± 2</a:t>
+            </a:r>
+            <a:r>
+              <a:rPr i="1" lang="en-US" sz="2000" b="1" dirty="0">
+                <a:solidFill>
+                  <a:schemeClr val="bg1"/>
+                </a:solidFill>
+                <a:latin typeface="Cambria" pitchFamily="34" charset="0"/>
+                <a:ea typeface="Cambria" pitchFamily="34" charset="-122"/>
+                <a:cs typeface="Cambria" pitchFamily="34" charset="-120"/>
+              </a:rPr>
+              <a:t>ψ</a:t>
+            </a:r>
+            <a:r>
+              <a:rPr lang="en-US" sz="2000" b="1" dirty="0">
+                <a:solidFill>
+                  <a:schemeClr val="bg1"/>
+                </a:solidFill>
+                <a:latin typeface="Cambria" pitchFamily="34" charset="0"/>
+                <a:ea typeface="Cambria" pitchFamily="34" charset="-122"/>
+                <a:cs typeface="Cambria" pitchFamily="34" charset="-120"/>
+              </a:rPr>
+              <a:t>.</a:t>
             </a:r>
             <a:endParaRPr lang="en-US" sz="2000" dirty="0"/>
           </a:p>
@@ -5745,7 +6203,23 @@
                   <a:schemeClr val="tx1"/>
                 </a:solidFill>
               </a:rPr>
-              <a:t>better than the shuffled null (z = +23.2σ); clears the 0.10 rad floor</a:t>
+              <a:t>better than the shuffled null (</a:t>
+            </a:r>
+            <a:r>
+              <a:rPr i="1" lang="en-US" sz="1400" dirty="0">
+                <a:solidFill>
+                  <a:schemeClr val="tx1"/>
+                </a:solidFill>
+              </a:rPr>
+              <a:t>z</a:t>
+            </a:r>
+            <a:r>
+              <a:rPr lang="en-US" sz="1400" dirty="0">
+                <a:solidFill>
+                  <a:schemeClr val="tx1"/>
+                </a:solidFill>
+              </a:rPr>
+              <a:t xml:space="preserve"> = +23.2σ); clears the 0.10 rad floor</a:t>
             </a:r>
             <a:endParaRPr lang="en-US" sz="1400" dirty="0"/>
           </a:p>
@@ -6202,7 +6676,47 @@
                   <a:schemeClr val="tx1"/>
                 </a:solidFill>
               </a:rPr>
-              <a:t>Its severity tracks each model's φc/ψ collapse, pointing to shared training dynamics rather than recoverable physics</a:t>
+              <a:t xml:space="preserve">Its severity tracks each model's </a:t>
+            </a:r>
+            <a:r>
+              <a:rPr i="1" lang="en-US" sz="1400" dirty="0">
+                <a:solidFill>
+                  <a:schemeClr val="tx1"/>
+                </a:solidFill>
+              </a:rPr>
+              <a:t>φ</a:t>
+            </a:r>
+            <a:r>
+              <a:rPr baseline="-25000" lang="en-US" sz="1400" dirty="0">
+                <a:solidFill>
+                  <a:schemeClr val="tx1"/>
+                </a:solidFill>
+              </a:rPr>
+              <a:t>c</a:t>
+            </a:r>
+            <a:r>
+              <a:rPr lang="en-US" sz="1400" dirty="0">
+                <a:solidFill>
+                  <a:schemeClr val="tx1"/>
+                </a:solidFill>
+              </a:rPr>
+              <a:t>/</a:t>
+            </a:r>
+            <a:r>
+              <a:rPr i="1" lang="en-US" sz="1400" dirty="0">
+                <a:solidFill>
+                  <a:schemeClr val="tx1"/>
+                </a:solidFill>
+              </a:rPr>
+              <a:t>ψ</a:t>
+            </a:r>
+            <a:r>
+              <a:rPr lang="en-US" sz="1400" dirty="0">
+                <a:solidFill>
+                  <a:schemeClr val="tx1"/>
+                </a:solidFill>
+              </a:rPr>
+              <a:t xml:space="preserve"> collapse, pointing to shared training dynamics rather than recoverable physics</a:t>
             </a:r>
             <a:endParaRPr lang="en-US" sz="1400" dirty="0"/>
           </a:p>
@@ -6272,7 +6786,39 @@
                   <a:schemeClr val="accent5"/>
                 </a:solidFill>
               </a:rPr>
-              <a:t>CNN_ATTENTION MEMORIZES φc AND ψ</a:t>
+              <a:t xml:space="preserve">CNN_ATTENTION MEMORIZES </a:t>
+            </a:r>
+            <a:r>
+              <a:rPr i="1" lang="en-US" sz="1400" b="1" dirty="0">
+                <a:solidFill>
+                  <a:schemeClr val="accent5"/>
+                </a:solidFill>
+              </a:rPr>
+              <a:t>φ</a:t>
+            </a:r>
+            <a:r>
+              <a:rPr baseline="-25000" lang="en-US" sz="1400" b="1" dirty="0">
+                <a:solidFill>
+                  <a:schemeClr val="accent5"/>
+                </a:solidFill>
+              </a:rPr>
+              <a:t>c</a:t>
+            </a:r>
+            <a:r>
+              <a:rPr lang="en-US" sz="1400" b="1" dirty="0">
+                <a:solidFill>
+                  <a:schemeClr val="accent5"/>
+                </a:solidFill>
+              </a:rPr>
+              <a:t xml:space="preserve"> AND </a:t>
+            </a:r>
+            <a:r>
+              <a:rPr i="1" lang="en-US" sz="1400" b="1" dirty="0">
+                <a:solidFill>
+                  <a:schemeClr val="accent5"/>
+                </a:solidFill>
+              </a:rPr>
+              <a:t>ψ</a:t>
             </a:r>
             <a:endParaRPr lang="en-US" sz="1400" dirty="0"/>
           </a:p>
@@ -6989,9 +7535,6 @@
               </a:rPr>
               <a:t>Narrow pool: </a:t>
             </a:r>
-            <a:pPr indent="0" marL="0">
-              <a:buNone/>
-            </a:pPr>
             <a:r>
               <a:rPr lang="en-US" sz="1400" dirty="0">
                 <a:solidFill>
@@ -7018,9 +7561,6 @@
               </a:rPr>
               <a:t>Single seed (42): </a:t>
             </a:r>
-            <a:pPr indent="0" marL="0">
-              <a:buNone/>
-            </a:pPr>
             <a:r>
               <a:rPr lang="en-US" sz="1400" dirty="0">
                 <a:solidFill>
@@ -7047,16 +7587,29 @@
               </a:rPr>
               <a:t>Reconstructed branch: </a:t>
             </a:r>
-            <a:pPr indent="0" marL="0">
-              <a:buNone/>
-            </a:pPr>
             <a:r>
               <a:rPr lang="en-US" sz="1400" dirty="0">
                 <a:solidFill>
                   <a:schemeClr val="tx1"/>
                 </a:solidFill>
               </a:rPr>
-              <a:t>poc_b bootstrap numbers are ground-truth-assisted (disclosed)</a:t>
+              <a:t>POC</a:t>
+            </a:r>
+            <a:r>
+              <a:rPr baseline="-25000" lang="en-US" sz="1400" dirty="0">
+                <a:solidFill>
+                  <a:schemeClr val="tx1"/>
+                </a:solidFill>
+              </a:rPr>
+              <a:t>B</a:t>
+            </a:r>
+            <a:r>
+              <a:rPr lang="en-US" sz="1400" dirty="0">
+                <a:solidFill>
+                  <a:schemeClr val="tx1"/>
+                </a:solidFill>
+              </a:rPr>
+              <a:t xml:space="preserve"> bootstrap numbers are ground-truth-assisted (disclosed)</a:t>
             </a:r>
             <a:endParaRPr lang="en-US" sz="1400" dirty="0"/>
           </a:p>
@@ -7076,9 +7629,6 @@
               </a:rPr>
               <a:t>Probe parked: </a:t>
             </a:r>
-            <a:pPr indent="0" marL="0">
-              <a:buNone/>
-            </a:pPr>
             <a:r>
               <a:rPr lang="en-US" sz="1400" dirty="0">
                 <a:solidFill>
@@ -7105,16 +7655,53 @@
               </a:rPr>
               <a:t>Unrun: </a:t>
             </a:r>
-            <a:pPr indent="0" marL="0">
-              <a:buNone/>
-            </a:pPr>
             <a:r>
               <a:rPr lang="en-US" sz="1400" dirty="0">
                 <a:solidFill>
                   <a:schemeClr val="tx1"/>
                 </a:solidFill>
               </a:rPr>
-              <a:t>synthetic ablation, high-SNR / Fisher bound, joint (φc, ψ) scatter</a:t>
+              <a:t>synthetic ablation, high-SNR / Fisher bound, joint (</a:t>
+            </a:r>
+            <a:r>
+              <a:rPr i="1" lang="en-US" sz="1400" dirty="0">
+                <a:solidFill>
+                  <a:schemeClr val="tx1"/>
+                </a:solidFill>
+              </a:rPr>
+              <a:t>φ</a:t>
+            </a:r>
+            <a:r>
+              <a:rPr baseline="-25000" lang="en-US" sz="1400" dirty="0">
+                <a:solidFill>
+                  <a:schemeClr val="tx1"/>
+                </a:solidFill>
+              </a:rPr>
+              <a:t>c</a:t>
+            </a:r>
+            <a:r>
+              <a:rPr lang="en-US" sz="1400" dirty="0">
+                <a:solidFill>
+                  <a:schemeClr val="tx1"/>
+                </a:solidFill>
+              </a:rPr>
+              <a:t xml:space="preserve">, </a:t>
+            </a:r>
+            <a:r>
+              <a:rPr i="1" lang="en-US" sz="1400" dirty="0">
+                <a:solidFill>
+                  <a:schemeClr val="tx1"/>
+                </a:solidFill>
+              </a:rPr>
+              <a:t>ψ</a:t>
+            </a:r>
+            <a:r>
+              <a:rPr lang="en-US" sz="1400" dirty="0">
+                <a:solidFill>
+                  <a:schemeClr val="tx1"/>
+                </a:solidFill>
+              </a:rPr>
+              <a:t>) scatter</a:t>
             </a:r>
             <a:endParaRPr lang="en-US" sz="1400" dirty="0"/>
           </a:p>
@@ -7134,9 +7721,6 @@
               </a:rPr>
               <a:t>No adversarial review </a:t>
             </a:r>
-            <a:pPr indent="0" marL="0">
-              <a:buNone/>
-            </a:pPr>
             <a:r>
               <a:rPr lang="en-US" sz="1400" dirty="0">
                 <a:solidFill>
@@ -7418,12 +8002,84 @@
               <a:buNone/>
             </a:pPr>
             <a:r>
+              <a:rPr i="1" lang="en-US" sz="1400" dirty="0">
+                <a:solidFill>
+                  <a:schemeClr val="bg2"/>
+                </a:solidFill>
+              </a:rPr>
+              <a:t>φ</a:t>
+            </a:r>
+            <a:r>
+              <a:rPr baseline="-25000" lang="en-US" sz="1400" dirty="0">
+                <a:solidFill>
+                  <a:schemeClr val="bg2"/>
+                </a:solidFill>
+              </a:rPr>
+              <a:t>c</a:t>
+            </a:r>
+            <a:r>
               <a:rPr lang="en-US" sz="1400" dirty="0">
                 <a:solidFill>
                   <a:schemeClr val="bg2"/>
                 </a:solidFill>
               </a:rPr>
-              <a:t>φc and ψ are not recoverable from strain on this architecture set, individually or through 2φc ± 2ψ.</a:t>
+              <a:t xml:space="preserve"> and </a:t>
+            </a:r>
+            <a:r>
+              <a:rPr i="1" lang="en-US" sz="1400" dirty="0">
+                <a:solidFill>
+                  <a:schemeClr val="bg2"/>
+                </a:solidFill>
+              </a:rPr>
+              <a:t>ψ</a:t>
+            </a:r>
+            <a:r>
+              <a:rPr lang="en-US" sz="1400" dirty="0">
+                <a:solidFill>
+                  <a:schemeClr val="bg2"/>
+                </a:solidFill>
+              </a:rPr>
+              <a:t xml:space="preserve"> are not recoverable from strain on this architecture set, individually or through 2</a:t>
+            </a:r>
+            <a:r>
+              <a:rPr i="1" lang="en-US" sz="1400" dirty="0">
+                <a:solidFill>
+                  <a:schemeClr val="bg2"/>
+                </a:solidFill>
+              </a:rPr>
+              <a:t>φ</a:t>
+            </a:r>
+            <a:r>
+              <a:rPr baseline="-25000" lang="en-US" sz="1400" dirty="0">
+                <a:solidFill>
+                  <a:schemeClr val="bg2"/>
+                </a:solidFill>
+              </a:rPr>
+              <a:t>c</a:t>
+            </a:r>
+            <a:r>
+              <a:rPr lang="en-US" sz="1400" dirty="0">
+                <a:solidFill>
+                  <a:schemeClr val="bg2"/>
+                </a:solidFill>
+              </a:rPr>
+              <a:t xml:space="preserve"> ± 2</a:t>
+            </a:r>
+            <a:r>
+              <a:rPr i="1" lang="en-US" sz="1400" dirty="0">
+                <a:solidFill>
+                  <a:schemeClr val="bg2"/>
+                </a:solidFill>
+              </a:rPr>
+              <a:t>ψ</a:t>
+            </a:r>
+            <a:r>
+              <a:rPr lang="en-US" sz="1400" dirty="0">
+                <a:solidFill>
+                  <a:schemeClr val="bg2"/>
+                </a:solidFill>
+              </a:rPr>
+              <a:t>.</a:t>
             </a:r>
             <a:endParaRPr lang="en-US" sz="1400" dirty="0"/>
           </a:p>
@@ -7823,7 +8479,47 @@
                   <a:schemeClr val="bg1"/>
                 </a:solidFill>
               </a:rPr>
-              <a:t>Joint (φc, ψ) scatter to test for the degenerate ridge</a:t>
+              <a:t>Joint (</a:t>
+            </a:r>
+            <a:r>
+              <a:rPr i="1" lang="en-US" sz="1400" dirty="0">
+                <a:solidFill>
+                  <a:schemeClr val="bg1"/>
+                </a:solidFill>
+              </a:rPr>
+              <a:t>φ</a:t>
+            </a:r>
+            <a:r>
+              <a:rPr baseline="-25000" lang="en-US" sz="1400" dirty="0">
+                <a:solidFill>
+                  <a:schemeClr val="bg1"/>
+                </a:solidFill>
+              </a:rPr>
+              <a:t>c</a:t>
+            </a:r>
+            <a:r>
+              <a:rPr lang="en-US" sz="1400" dirty="0">
+                <a:solidFill>
+                  <a:schemeClr val="bg1"/>
+                </a:solidFill>
+              </a:rPr>
+              <a:t xml:space="preserve">, </a:t>
+            </a:r>
+            <a:r>
+              <a:rPr i="1" lang="en-US" sz="1400" dirty="0">
+                <a:solidFill>
+                  <a:schemeClr val="bg1"/>
+                </a:solidFill>
+              </a:rPr>
+              <a:t>ψ</a:t>
+            </a:r>
+            <a:r>
+              <a:rPr lang="en-US" sz="1400" dirty="0">
+                <a:solidFill>
+                  <a:schemeClr val="bg1"/>
+                </a:solidFill>
+              </a:rPr>
+              <a:t>) scatter to test for the degenerate ridge</a:t>
             </a:r>
             <a:endParaRPr lang="en-US" sz="1400" dirty="0"/>
           </a:p>
@@ -8021,7 +8717,47 @@
                   <a:schemeClr val="tx1"/>
                 </a:solidFill>
               </a:rPr>
-              <a:t>Can a network recover φc and ψ?</a:t>
+              <a:t xml:space="preserve">Can a network recover </a:t>
+            </a:r>
+            <a:r>
+              <a:rPr i="1" lang="en-US" sz="3600" b="1" dirty="0">
+                <a:solidFill>
+                  <a:schemeClr val="tx1"/>
+                </a:solidFill>
+              </a:rPr>
+              <a:t>φ</a:t>
+            </a:r>
+            <a:r>
+              <a:rPr baseline="-25000" lang="en-US" sz="3600" b="1" dirty="0">
+                <a:solidFill>
+                  <a:schemeClr val="tx1"/>
+                </a:solidFill>
+              </a:rPr>
+              <a:t>c</a:t>
+            </a:r>
+            <a:r>
+              <a:rPr lang="en-US" sz="3600" b="1" dirty="0">
+                <a:solidFill>
+                  <a:schemeClr val="tx1"/>
+                </a:solidFill>
+              </a:rPr>
+              <a:t xml:space="preserve"> and </a:t>
+            </a:r>
+            <a:r>
+              <a:rPr i="1" lang="en-US" sz="3600" b="1" dirty="0">
+                <a:solidFill>
+                  <a:schemeClr val="tx1"/>
+                </a:solidFill>
+              </a:rPr>
+              <a:t>ψ</a:t>
+            </a:r>
+            <a:r>
+              <a:rPr lang="en-US" sz="3600" b="1" dirty="0">
+                <a:solidFill>
+                  <a:schemeClr val="tx1"/>
+                </a:solidFill>
+              </a:rPr>
+              <a:t>?</a:t>
             </a:r>
             <a:endParaRPr lang="en-US" sz="3600" dirty="0"/>
           </a:p>
@@ -8092,12 +8828,28 @@
               <a:buChar char="•"/>
             </a:pPr>
             <a:r>
+              <a:rPr i="1" lang="en-US" sz="1600" dirty="0">
+                <a:solidFill>
+                  <a:schemeClr val="tx1"/>
+                </a:solidFill>
+              </a:rPr>
+              <a:t>φ</a:t>
+            </a:r>
+            <a:r>
+              <a:rPr baseline="-25000" lang="en-US" sz="1600" dirty="0">
+                <a:solidFill>
+                  <a:schemeClr val="tx1"/>
+                </a:solidFill>
+              </a:rPr>
+              <a:t>c</a:t>
+            </a:r>
+            <a:r>
               <a:rPr lang="en-US" sz="1600" dirty="0">
                 <a:solidFill>
                   <a:schemeClr val="tx1"/>
                 </a:solidFill>
               </a:rPr>
-              <a:t>φc is the coalescence phase</a:t>
+              <a:t xml:space="preserve"> is the coalescence phase</a:t>
             </a:r>
             <a:endParaRPr lang="en-US" sz="1600" dirty="0"/>
           </a:p>
@@ -8110,12 +8862,20 @@
               <a:buChar char="•"/>
             </a:pPr>
             <a:r>
+              <a:rPr i="1" lang="en-US" sz="1600" dirty="0">
+                <a:solidFill>
+                  <a:schemeClr val="tx1"/>
+                </a:solidFill>
+              </a:rPr>
+              <a:t>ψ</a:t>
+            </a:r>
+            <a:r>
               <a:rPr lang="en-US" sz="1600" dirty="0">
                 <a:solidFill>
                   <a:schemeClr val="tx1"/>
                 </a:solidFill>
               </a:rPr>
-              <a:t>ψ is the polarization angle</a:t>
+              <a:t xml:space="preserve"> is the polarization angle</a:t>
             </a:r>
             <a:endParaRPr lang="en-US" sz="1600" dirty="0"/>
           </a:p>
@@ -8151,7 +8911,47 @@
                   <a:schemeClr val="tx1"/>
                 </a:solidFill>
               </a:rPr>
-              <a:t>Face-on, only the combination 2φc ± 2ψ is constrained; the individual angles cannot be told apart</a:t>
+              <a:t>Face-on, only the combination 2</a:t>
+            </a:r>
+            <a:r>
+              <a:rPr i="1" lang="en-US" sz="1600" dirty="0">
+                <a:solidFill>
+                  <a:schemeClr val="tx1"/>
+                </a:solidFill>
+              </a:rPr>
+              <a:t>φ</a:t>
+            </a:r>
+            <a:r>
+              <a:rPr baseline="-25000" lang="en-US" sz="1600" dirty="0">
+                <a:solidFill>
+                  <a:schemeClr val="tx1"/>
+                </a:solidFill>
+              </a:rPr>
+              <a:t>c</a:t>
+            </a:r>
+            <a:r>
+              <a:rPr lang="en-US" sz="1600" dirty="0">
+                <a:solidFill>
+                  <a:schemeClr val="tx1"/>
+                </a:solidFill>
+              </a:rPr>
+              <a:t xml:space="preserve"> ± 2</a:t>
+            </a:r>
+            <a:r>
+              <a:rPr i="1" lang="en-US" sz="1600" dirty="0">
+                <a:solidFill>
+                  <a:schemeClr val="tx1"/>
+                </a:solidFill>
+              </a:rPr>
+              <a:t>ψ</a:t>
+            </a:r>
+            <a:r>
+              <a:rPr lang="en-US" sz="1600" dirty="0">
+                <a:solidFill>
+                  <a:schemeClr val="tx1"/>
+                </a:solidFill>
+              </a:rPr>
+              <a:t xml:space="preserve"> is constrained; the individual angles cannot be told apart</a:t>
             </a:r>
             <a:endParaRPr lang="en-US" sz="1600" dirty="0"/>
           </a:p>
@@ -8347,7 +9147,47 @@
                   <a:schemeClr val="bg1"/>
                 </a:solidFill>
               </a:rPr>
-              <a:t>Can it recover φc and ψ at all, individually or through the better-conditioned sum and difference combinations?</a:t>
+              <a:t xml:space="preserve">Can it recover </a:t>
+            </a:r>
+            <a:r>
+              <a:rPr i="1" lang="en-US" sz="1800" dirty="0">
+                <a:solidFill>
+                  <a:schemeClr val="bg1"/>
+                </a:solidFill>
+              </a:rPr>
+              <a:t>φ</a:t>
+            </a:r>
+            <a:r>
+              <a:rPr baseline="-25000" lang="en-US" sz="1800" dirty="0">
+                <a:solidFill>
+                  <a:schemeClr val="bg1"/>
+                </a:solidFill>
+              </a:rPr>
+              <a:t>c</a:t>
+            </a:r>
+            <a:r>
+              <a:rPr lang="en-US" sz="1800" dirty="0">
+                <a:solidFill>
+                  <a:schemeClr val="bg1"/>
+                </a:solidFill>
+              </a:rPr>
+              <a:t xml:space="preserve"> and </a:t>
+            </a:r>
+            <a:r>
+              <a:rPr i="1" lang="en-US" sz="1800" dirty="0">
+                <a:solidFill>
+                  <a:schemeClr val="bg1"/>
+                </a:solidFill>
+              </a:rPr>
+              <a:t>ψ</a:t>
+            </a:r>
+            <a:r>
+              <a:rPr lang="en-US" sz="1800" dirty="0">
+                <a:solidFill>
+                  <a:schemeClr val="bg1"/>
+                </a:solidFill>
+              </a:rPr>
+              <a:t xml:space="preserve"> at all, individually or through the better-conditioned sum and difference combinations?</a:t>
             </a:r>
             <a:endParaRPr lang="en-US" sz="1800" dirty="0"/>
           </a:p>
@@ -8386,7 +9226,51 @@
                 <a:ea typeface="Cambria" pitchFamily="34" charset="-122"/>
                 <a:cs typeface="Cambria" pitchFamily="34" charset="-120"/>
               </a:rPr>
-              <a:t>2φc ± 2ψ</a:t>
+              <a:t>2</a:t>
+            </a:r>
+            <a:r>
+              <a:rPr i="1" lang="en-US" sz="3800" b="1" dirty="0">
+                <a:solidFill>
+                  <a:schemeClr val="accent1"/>
+                </a:solidFill>
+                <a:latin typeface="Cambria" pitchFamily="34" charset="0"/>
+                <a:ea typeface="Cambria" pitchFamily="34" charset="-122"/>
+                <a:cs typeface="Cambria" pitchFamily="34" charset="-120"/>
+              </a:rPr>
+              <a:t>φ</a:t>
+            </a:r>
+            <a:r>
+              <a:rPr baseline="-25000" lang="en-US" sz="3800" b="1" dirty="0">
+                <a:solidFill>
+                  <a:schemeClr val="accent1"/>
+                </a:solidFill>
+                <a:latin typeface="Cambria" pitchFamily="34" charset="0"/>
+                <a:ea typeface="Cambria" pitchFamily="34" charset="-122"/>
+                <a:cs typeface="Cambria" pitchFamily="34" charset="-120"/>
+              </a:rPr>
+              <a:t>c</a:t>
+            </a:r>
+            <a:r>
+              <a:rPr lang="en-US" sz="3800" b="1" dirty="0">
+                <a:solidFill>
+                  <a:schemeClr val="accent1"/>
+                </a:solidFill>
+                <a:latin typeface="Cambria" pitchFamily="34" charset="0"/>
+                <a:ea typeface="Cambria" pitchFamily="34" charset="-122"/>
+                <a:cs typeface="Cambria" pitchFamily="34" charset="-120"/>
+              </a:rPr>
+              <a:t xml:space="preserve"> ± 2</a:t>
+            </a:r>
+            <a:r>
+              <a:rPr i="1" lang="en-US" sz="3800" b="1" dirty="0">
+                <a:solidFill>
+                  <a:schemeClr val="accent1"/>
+                </a:solidFill>
+                <a:latin typeface="Cambria" pitchFamily="34" charset="0"/>
+                <a:ea typeface="Cambria" pitchFamily="34" charset="-122"/>
+                <a:cs typeface="Cambria" pitchFamily="34" charset="-120"/>
+              </a:rPr>
+              <a:t>ψ</a:t>
             </a:r>
             <a:endParaRPr lang="en-US" sz="3800" dirty="0"/>
           </a:p>
@@ -8636,7 +9520,87 @@
                   <a:schemeClr val="tx1"/>
                 </a:solidFill>
               </a:rPr>
-              <a:t>Can a regression network recover φc and ψ from two-detector strain, individually or through the better-conditioned combinations 2φc ± 2ψ?</a:t>
+              <a:t xml:space="preserve">Can a regression network recover </a:t>
+            </a:r>
+            <a:r>
+              <a:rPr i="1" lang="en-US" sz="1600" dirty="0">
+                <a:solidFill>
+                  <a:schemeClr val="tx1"/>
+                </a:solidFill>
+              </a:rPr>
+              <a:t>φ</a:t>
+            </a:r>
+            <a:r>
+              <a:rPr baseline="-25000" lang="en-US" sz="1600" dirty="0">
+                <a:solidFill>
+                  <a:schemeClr val="tx1"/>
+                </a:solidFill>
+              </a:rPr>
+              <a:t>c</a:t>
+            </a:r>
+            <a:r>
+              <a:rPr lang="en-US" sz="1600" dirty="0">
+                <a:solidFill>
+                  <a:schemeClr val="tx1"/>
+                </a:solidFill>
+              </a:rPr>
+              <a:t xml:space="preserve"> and </a:t>
+            </a:r>
+            <a:r>
+              <a:rPr i="1" lang="en-US" sz="1600" dirty="0">
+                <a:solidFill>
+                  <a:schemeClr val="tx1"/>
+                </a:solidFill>
+              </a:rPr>
+              <a:t>ψ</a:t>
+            </a:r>
+            <a:r>
+              <a:rPr lang="en-US" sz="1600" dirty="0">
+                <a:solidFill>
+                  <a:schemeClr val="tx1"/>
+                </a:solidFill>
+              </a:rPr>
+              <a:t xml:space="preserve"> from two-detector strain, individually or through the better-conditioned combinations 2</a:t>
+            </a:r>
+            <a:r>
+              <a:rPr i="1" lang="en-US" sz="1600" dirty="0">
+                <a:solidFill>
+                  <a:schemeClr val="tx1"/>
+                </a:solidFill>
+              </a:rPr>
+              <a:t>φ</a:t>
+            </a:r>
+            <a:r>
+              <a:rPr baseline="-25000" lang="en-US" sz="1600" dirty="0">
+                <a:solidFill>
+                  <a:schemeClr val="tx1"/>
+                </a:solidFill>
+              </a:rPr>
+              <a:t>c</a:t>
+            </a:r>
+            <a:r>
+              <a:rPr lang="en-US" sz="1600" dirty="0">
+                <a:solidFill>
+                  <a:schemeClr val="tx1"/>
+                </a:solidFill>
+              </a:rPr>
+              <a:t xml:space="preserve"> ± 2</a:t>
+            </a:r>
+            <a:r>
+              <a:rPr i="1" lang="en-US" sz="1600" dirty="0">
+                <a:solidFill>
+                  <a:schemeClr val="tx1"/>
+                </a:solidFill>
+              </a:rPr>
+              <a:t>ψ</a:t>
+            </a:r>
+            <a:r>
+              <a:rPr lang="en-US" sz="1600" dirty="0">
+                <a:solidFill>
+                  <a:schemeClr val="tx1"/>
+                </a:solidFill>
+              </a:rPr>
+              <a:t>?</a:t>
             </a:r>
             <a:endParaRPr lang="en-US" sz="1600" dirty="0"/>
           </a:p>
@@ -8848,7 +9812,31 @@
                   <a:schemeClr val="tx1"/>
                 </a:solidFill>
               </a:rPr>
-              <a:t>No. Every configuration sits at the random-guess baseline on both angles, and none of 8 bootstrap tests is significant, while the controls are recovered (R² up to 0.96).</a:t>
+              <a:t>No. Every configuration sits at the random-guess baseline on both angles, and none of 8 bootstrap tests is significant, while the controls are recovered (</a:t>
+            </a:r>
+            <a:r>
+              <a:rPr i="1" lang="en-US" sz="1600" dirty="0">
+                <a:solidFill>
+                  <a:schemeClr val="tx1"/>
+                </a:solidFill>
+              </a:rPr>
+              <a:t>R</a:t>
+            </a:r>
+            <a:r>
+              <a:rPr baseline="30000" lang="en-US" sz="1600" dirty="0">
+                <a:solidFill>
+                  <a:schemeClr val="tx1"/>
+                </a:solidFill>
+              </a:rPr>
+              <a:t>2</a:t>
+            </a:r>
+            <a:r>
+              <a:rPr lang="en-US" sz="1600" dirty="0">
+                <a:solidFill>
+                  <a:schemeClr val="tx1"/>
+                </a:solidFill>
+              </a:rPr>
+              <a:t xml:space="preserve"> up to 0.96).</a:t>
             </a:r>
             <a:endParaRPr lang="en-US" sz="1600" dirty="0"/>
           </a:p>
@@ -8920,16 +9908,93 @@
               </a:rPr>
               <a:t>Also found: </a:t>
             </a:r>
-            <a:pPr indent="0" marL="0">
-              <a:buNone/>
-            </a:pPr>
             <a:r>
               <a:rPr lang="en-US" sz="1800" dirty="0">
                 <a:solidFill>
                   <a:schemeClr val="bg1"/>
                 </a:solidFill>
               </a:rPr>
-              <a:t>partial sky localization in cnn_attention (+12.6°, z = +23σ), an inclination head that is not a clean noise floor, and memorization of φc and ψ in the training split.</a:t>
+              <a:t xml:space="preserve">partial sky localization in </a:t>
+            </a:r>
+            <a:r>
+              <a:rPr lang="en-US" sz="1800" dirty="0">
+                <a:solidFill>
+                  <a:schemeClr val="bg1"/>
+                </a:solidFill>
+              </a:rPr>
+              <a:t>CNN</a:t>
+            </a:r>
+            <a:r>
+              <a:rPr baseline="-25000" lang="en-US" sz="1800" dirty="0">
+                <a:solidFill>
+                  <a:schemeClr val="bg1"/>
+                </a:solidFill>
+              </a:rPr>
+              <a:t>attention</a:t>
+            </a:r>
+            <a:r>
+              <a:rPr lang="en-US" sz="1800" dirty="0">
+                <a:solidFill>
+                  <a:schemeClr val="bg1"/>
+                </a:solidFill>
+              </a:rPr>
+              <a:t xml:space="preserve"> (+12.6°, </a:t>
+            </a:r>
+            <a:r>
+              <a:rPr i="1" lang="en-US" sz="1800" dirty="0">
+                <a:solidFill>
+                  <a:schemeClr val="bg1"/>
+                </a:solidFill>
+              </a:rPr>
+              <a:t>z</a:t>
+            </a:r>
+            <a:r>
+              <a:rPr lang="en-US" sz="1800" dirty="0">
+                <a:solidFill>
+                  <a:schemeClr val="bg1"/>
+                </a:solidFill>
+              </a:rPr>
+              <a:t xml:space="preserve"> = +23σ), an inclination head that is not a clean noise floor, and memorization of </a:t>
+            </a:r>
+            <a:r>
+              <a:rPr i="1" lang="en-US" sz="1800" dirty="0">
+                <a:solidFill>
+                  <a:schemeClr val="bg1"/>
+                </a:solidFill>
+              </a:rPr>
+              <a:t>φ</a:t>
+            </a:r>
+            <a:r>
+              <a:rPr baseline="-25000" lang="en-US" sz="1800" dirty="0">
+                <a:solidFill>
+                  <a:schemeClr val="bg1"/>
+                </a:solidFill>
+              </a:rPr>
+              <a:t>c</a:t>
+            </a:r>
+            <a:r>
+              <a:rPr lang="en-US" sz="1800" dirty="0">
+                <a:solidFill>
+                  <a:schemeClr val="bg1"/>
+                </a:solidFill>
+              </a:rPr>
+              <a:t xml:space="preserve"> and </a:t>
+            </a:r>
+            <a:r>
+              <a:rPr i="1" lang="en-US" sz="1800" dirty="0">
+                <a:solidFill>
+                  <a:schemeClr val="bg1"/>
+                </a:solidFill>
+              </a:rPr>
+              <a:t>ψ</a:t>
+            </a:r>
+            <a:r>
+              <a:rPr lang="en-US" sz="1800" dirty="0">
+                <a:solidFill>
+                  <a:schemeClr val="bg1"/>
+                </a:solidFill>
+              </a:rPr>
+              <a:t xml:space="preserve"> in the training split.</a:t>
             </a:r>
             <a:endParaRPr lang="en-US" sz="1800" dirty="0"/>
           </a:p>
@@ -9133,7 +10198,63 @@
                   <a:schemeClr val="accent5"/>
                 </a:solidFill>
               </a:rPr>
-              <a:t>Correlation ratio between the combination 2φc + 2ψ and its complement, swept over inclination ι.</a:t>
+              <a:t>Correlation ratio between the combination 2</a:t>
+            </a:r>
+            <a:r>
+              <a:rPr i="1" lang="en-US" sz="1400" dirty="0">
+                <a:solidFill>
+                  <a:schemeClr val="accent5"/>
+                </a:solidFill>
+              </a:rPr>
+              <a:t>φ</a:t>
+            </a:r>
+            <a:r>
+              <a:rPr baseline="-25000" lang="en-US" sz="1400" dirty="0">
+                <a:solidFill>
+                  <a:schemeClr val="accent5"/>
+                </a:solidFill>
+              </a:rPr>
+              <a:t>c</a:t>
+            </a:r>
+            <a:r>
+              <a:rPr lang="en-US" sz="1400" dirty="0">
+                <a:solidFill>
+                  <a:schemeClr val="accent5"/>
+                </a:solidFill>
+              </a:rPr>
+              <a:t xml:space="preserve"> + 2</a:t>
+            </a:r>
+            <a:r>
+              <a:rPr i="1" lang="en-US" sz="1400" dirty="0">
+                <a:solidFill>
+                  <a:schemeClr val="accent5"/>
+                </a:solidFill>
+              </a:rPr>
+              <a:t>ψ</a:t>
+            </a:r>
+            <a:r>
+              <a:rPr lang="en-US" sz="1400" dirty="0">
+                <a:solidFill>
+                  <a:schemeClr val="accent5"/>
+                </a:solidFill>
+              </a:rPr>
+              <a:t xml:space="preserve"> and its complement, swept over inclination </a:t>
+            </a:r>
+            <a:r>
+              <a:rPr i="1" lang="en-US" sz="1400" dirty="0">
+                <a:solidFill>
+                  <a:schemeClr val="accent5"/>
+                </a:solidFill>
+              </a:rPr>
+              <a:t>ι</a:t>
+            </a:r>
+            <a:r>
+              <a:rPr lang="en-US" sz="1400" dirty="0">
+                <a:solidFill>
+                  <a:schemeClr val="accent5"/>
+                </a:solidFill>
+              </a:rPr>
+              <a:t>.</a:t>
             </a:r>
             <a:endParaRPr lang="en-US" sz="1400" dirty="0"/>
           </a:p>
@@ -9355,16 +10476,141 @@
               </a:rPr>
               <a:t>Self-check passed: </a:t>
             </a:r>
-            <a:pPr indent="0" marL="0">
-              <a:buNone/>
-            </a:pPr>
             <a:r>
               <a:rPr lang="en-US" sz="1600" dirty="0">
                 <a:solidFill>
                   <a:schemeClr val="tx1"/>
                 </a:solidFill>
               </a:rPr>
-              <a:t>(R, δ) stays constant along 2φc + 2ψ = const at face-on; largest standard deviations 1.16×10⁻¹⁴ and 5.87×10⁻¹⁶.</a:t>
+              <a:t>(</a:t>
+            </a:r>
+            <a:r>
+              <a:rPr i="1" lang="en-US" sz="1600" dirty="0">
+                <a:solidFill>
+                  <a:schemeClr val="tx1"/>
+                </a:solidFill>
+              </a:rPr>
+              <a:t>R</a:t>
+            </a:r>
+            <a:r>
+              <a:rPr lang="en-US" sz="1600" dirty="0">
+                <a:solidFill>
+                  <a:schemeClr val="tx1"/>
+                </a:solidFill>
+              </a:rPr>
+              <a:t>,</a:t>
+            </a:r>
+            <a:r>
+              <a:rPr lang="en-US" sz="1600" dirty="0">
+                <a:solidFill>
+                  <a:schemeClr val="tx1"/>
+                </a:solidFill>
+              </a:rPr>
+              <a:t xml:space="preserve"> </a:t>
+            </a:r>
+            <a:r>
+              <a:rPr i="1" lang="en-US" sz="1600" dirty="0">
+                <a:solidFill>
+                  <a:schemeClr val="tx1"/>
+                </a:solidFill>
+              </a:rPr>
+              <a:t>δ</a:t>
+            </a:r>
+            <a:r>
+              <a:rPr lang="en-US" sz="1600" dirty="0">
+                <a:solidFill>
+                  <a:schemeClr val="tx1"/>
+                </a:solidFill>
+              </a:rPr>
+              <a:t>) stays constant along 2</a:t>
+            </a:r>
+            <a:r>
+              <a:rPr i="1" lang="en-US" sz="1600" dirty="0">
+                <a:solidFill>
+                  <a:schemeClr val="tx1"/>
+                </a:solidFill>
+              </a:rPr>
+              <a:t>φ</a:t>
+            </a:r>
+            <a:r>
+              <a:rPr baseline="-25000" lang="en-US" sz="1600" dirty="0">
+                <a:solidFill>
+                  <a:schemeClr val="tx1"/>
+                </a:solidFill>
+              </a:rPr>
+              <a:t>c</a:t>
+            </a:r>
+            <a:r>
+              <a:rPr lang="en-US" sz="1600" dirty="0">
+                <a:solidFill>
+                  <a:schemeClr val="tx1"/>
+                </a:solidFill>
+              </a:rPr>
+              <a:t xml:space="preserve"> + 2</a:t>
+            </a:r>
+            <a:r>
+              <a:rPr i="1" lang="en-US" sz="1600" dirty="0">
+                <a:solidFill>
+                  <a:schemeClr val="tx1"/>
+                </a:solidFill>
+              </a:rPr>
+              <a:t>ψ</a:t>
+            </a:r>
+            <a:r>
+              <a:rPr lang="en-US" sz="1600" dirty="0">
+                <a:solidFill>
+                  <a:schemeClr val="tx1"/>
+                </a:solidFill>
+              </a:rPr>
+              <a:t xml:space="preserve"> = const at face-on; largest standard deviations 1.16×</a:t>
+            </a:r>
+            <a:r>
+              <a:rPr lang="en-US" sz="1600" dirty="0">
+                <a:solidFill>
+                  <a:schemeClr val="tx1"/>
+                </a:solidFill>
+              </a:rPr>
+              <a:t>10</a:t>
+            </a:r>
+            <a:r>
+              <a:rPr baseline="30000" lang="en-US" sz="1600" dirty="0">
+                <a:solidFill>
+                  <a:schemeClr val="tx1"/>
+                </a:solidFill>
+              </a:rPr>
+              <a:t>−14</a:t>
+            </a:r>
+            <a:r>
+              <a:rPr lang="en-US" sz="1600" dirty="0">
+                <a:solidFill>
+                  <a:schemeClr val="tx1"/>
+                </a:solidFill>
+              </a:rPr>
+              <a:t xml:space="preserve"> and 5.87×</a:t>
+            </a:r>
+            <a:r>
+              <a:rPr lang="en-US" sz="1600" dirty="0">
+                <a:solidFill>
+                  <a:schemeClr val="tx1"/>
+                </a:solidFill>
+              </a:rPr>
+              <a:t>10</a:t>
+            </a:r>
+            <a:r>
+              <a:rPr baseline="30000" lang="en-US" sz="1600" dirty="0">
+                <a:solidFill>
+                  <a:schemeClr val="tx1"/>
+                </a:solidFill>
+              </a:rPr>
+              <a:t>−16</a:t>
+            </a:r>
+            <a:r>
+              <a:rPr lang="en-US" sz="1600" dirty="0">
+                <a:solidFill>
+                  <a:schemeClr val="tx1"/>
+                </a:solidFill>
+              </a:rPr>
+              <a:t>.</a:t>
             </a:r>
             <a:endParaRPr lang="en-US" sz="1600" dirty="0"/>
           </a:p>
@@ -9944,7 +11190,47 @@
                   <a:schemeClr val="tx1"/>
                 </a:solidFill>
               </a:rPr>
-              <a:t>angular MAE of a constant prediction, for φc and ψ respectively</a:t>
+              <a:t xml:space="preserve">angular MAE of a constant prediction, for </a:t>
+            </a:r>
+            <a:r>
+              <a:rPr i="1" lang="en-US" sz="1400" dirty="0">
+                <a:solidFill>
+                  <a:schemeClr val="tx1"/>
+                </a:solidFill>
+              </a:rPr>
+              <a:t>φ</a:t>
+            </a:r>
+            <a:r>
+              <a:rPr baseline="-25000" lang="en-US" sz="1400" dirty="0">
+                <a:solidFill>
+                  <a:schemeClr val="tx1"/>
+                </a:solidFill>
+              </a:rPr>
+              <a:t>c</a:t>
+            </a:r>
+            <a:r>
+              <a:rPr lang="en-US" sz="1400" dirty="0">
+                <a:solidFill>
+                  <a:schemeClr val="tx1"/>
+                </a:solidFill>
+              </a:rPr>
+              <a:t xml:space="preserve"> and </a:t>
+            </a:r>
+            <a:r>
+              <a:rPr i="1" lang="en-US" sz="1400" dirty="0">
+                <a:solidFill>
+                  <a:schemeClr val="tx1"/>
+                </a:solidFill>
+              </a:rPr>
+              <a:t>ψ</a:t>
+            </a:r>
+            <a:r>
+              <a:rPr lang="en-US" sz="1400" dirty="0">
+                <a:solidFill>
+                  <a:schemeClr val="tx1"/>
+                </a:solidFill>
+              </a:rPr>
+              <a:t xml:space="preserve"> respectively</a:t>
             </a:r>
             <a:endParaRPr lang="en-US" sz="1400" dirty="0"/>
           </a:p>
@@ -10086,7 +11372,47 @@
                   <a:schemeClr val="bg1"/>
                 </a:solidFill>
               </a:rPr>
-              <a:t>Chirp mass, merger time and SNR must be recovered by the same shared features. If they are, a failure on φc and ψ is a statement about those angles, not about the pipeline.</a:t>
+              <a:t xml:space="preserve">Chirp mass, merger time and SNR must be recovered by the same shared features. If they are, a failure on </a:t>
+            </a:r>
+            <a:r>
+              <a:rPr i="1" lang="en-US" sz="1600" dirty="0">
+                <a:solidFill>
+                  <a:schemeClr val="bg1"/>
+                </a:solidFill>
+              </a:rPr>
+              <a:t>φ</a:t>
+            </a:r>
+            <a:r>
+              <a:rPr baseline="-25000" lang="en-US" sz="1600" dirty="0">
+                <a:solidFill>
+                  <a:schemeClr val="bg1"/>
+                </a:solidFill>
+              </a:rPr>
+              <a:t>c</a:t>
+            </a:r>
+            <a:r>
+              <a:rPr lang="en-US" sz="1600" dirty="0">
+                <a:solidFill>
+                  <a:schemeClr val="bg1"/>
+                </a:solidFill>
+              </a:rPr>
+              <a:t xml:space="preserve"> and </a:t>
+            </a:r>
+            <a:r>
+              <a:rPr i="1" lang="en-US" sz="1600" dirty="0">
+                <a:solidFill>
+                  <a:schemeClr val="bg1"/>
+                </a:solidFill>
+              </a:rPr>
+              <a:t>ψ</a:t>
+            </a:r>
+            <a:r>
+              <a:rPr lang="en-US" sz="1600" dirty="0">
+                <a:solidFill>
+                  <a:schemeClr val="bg1"/>
+                </a:solidFill>
+              </a:rPr>
+              <a:t xml:space="preserve"> is a statement about those angles, not about the pipeline.</a:t>
             </a:r>
             <a:endParaRPr lang="en-US" sz="1600" dirty="0"/>
           </a:p>
@@ -10375,7 +11701,47 @@
                   <a:schemeClr val="tx1"/>
                 </a:solidFill>
               </a:rPr>
-              <a:t>TCN, plain CNN, conv-transformer, InceptionTime, ResNet. All sat at chance on φc and ψ, so the screen could not discriminate.</a:t>
+              <a:t xml:space="preserve">TCN, plain CNN, conv-transformer, InceptionTime, ResNet. All sat at chance on </a:t>
+            </a:r>
+            <a:r>
+              <a:rPr i="1" lang="en-US" sz="1400" dirty="0">
+                <a:solidFill>
+                  <a:schemeClr val="tx1"/>
+                </a:solidFill>
+              </a:rPr>
+              <a:t>φ</a:t>
+            </a:r>
+            <a:r>
+              <a:rPr baseline="-25000" lang="en-US" sz="1400" dirty="0">
+                <a:solidFill>
+                  <a:schemeClr val="tx1"/>
+                </a:solidFill>
+              </a:rPr>
+              <a:t>c</a:t>
+            </a:r>
+            <a:r>
+              <a:rPr lang="en-US" sz="1400" dirty="0">
+                <a:solidFill>
+                  <a:schemeClr val="tx1"/>
+                </a:solidFill>
+              </a:rPr>
+              <a:t xml:space="preserve"> and </a:t>
+            </a:r>
+            <a:r>
+              <a:rPr i="1" lang="en-US" sz="1400" dirty="0">
+                <a:solidFill>
+                  <a:schemeClr val="tx1"/>
+                </a:solidFill>
+              </a:rPr>
+              <a:t>ψ</a:t>
+            </a:r>
+            <a:r>
+              <a:rPr lang="en-US" sz="1400" dirty="0">
+                <a:solidFill>
+                  <a:schemeClr val="tx1"/>
+                </a:solidFill>
+              </a:rPr>
+              <a:t>, so the screen could not discriminate.</a:t>
             </a:r>
             <a:endParaRPr lang="en-US" sz="1400" dirty="0"/>
           </a:p>
@@ -10509,7 +11875,29 @@
                 <a:ea typeface="Cambria" pitchFamily="34" charset="-122"/>
                 <a:cs typeface="Cambria" pitchFamily="34" charset="-120"/>
               </a:rPr>
-              <a:t>Positive-control R²</a:t>
+              <a:t xml:space="preserve">Positive-control </a:t>
+            </a:r>
+            <a:r>
+              <a:rPr i="1" lang="en-US" sz="1800" b="1" dirty="0">
+                <a:solidFill>
+                  <a:schemeClr val="tx1"/>
+                </a:solidFill>
+                <a:latin typeface="Cambria" pitchFamily="34" charset="0"/>
+                <a:ea typeface="Cambria" pitchFamily="34" charset="-122"/>
+                <a:cs typeface="Cambria" pitchFamily="34" charset="-120"/>
+              </a:rPr>
+              <a:t>R</a:t>
+            </a:r>
+            <a:r>
+              <a:rPr baseline="30000" lang="en-US" sz="1800" b="1" dirty="0">
+                <a:solidFill>
+                  <a:schemeClr val="tx1"/>
+                </a:solidFill>
+                <a:latin typeface="Cambria" pitchFamily="34" charset="0"/>
+                <a:ea typeface="Cambria" pitchFamily="34" charset="-122"/>
+                <a:cs typeface="Cambria" pitchFamily="34" charset="-120"/>
+              </a:rPr>
+              <a:t>2</a:t>
             </a:r>
             <a:endParaRPr lang="en-US" sz="1800" dirty="0"/>
           </a:p>
@@ -10715,7 +12103,87 @@
                   <a:schemeClr val="bg1"/>
                 </a:solidFill>
               </a:rPr>
-              <a:t>poc_a, poc_b, tcn, cnn_attention. The three dropped trunks were never run through the full battery.</a:t>
+              <a:t>POC</a:t>
+            </a:r>
+            <a:r>
+              <a:rPr baseline="-25000" lang="en-US" sz="1400" dirty="0">
+                <a:solidFill>
+                  <a:schemeClr val="bg1"/>
+                </a:solidFill>
+              </a:rPr>
+              <a:t>A</a:t>
+            </a:r>
+            <a:r>
+              <a:rPr lang="en-US" sz="1400" dirty="0">
+                <a:solidFill>
+                  <a:schemeClr val="bg1"/>
+                </a:solidFill>
+              </a:rPr>
+              <a:t xml:space="preserve">, </a:t>
+            </a:r>
+            <a:r>
+              <a:rPr lang="en-US" sz="1400" dirty="0">
+                <a:solidFill>
+                  <a:schemeClr val="bg1"/>
+                </a:solidFill>
+              </a:rPr>
+              <a:t>POC</a:t>
+            </a:r>
+            <a:r>
+              <a:rPr baseline="-25000" lang="en-US" sz="1400" dirty="0">
+                <a:solidFill>
+                  <a:schemeClr val="bg1"/>
+                </a:solidFill>
+              </a:rPr>
+              <a:t>B</a:t>
+            </a:r>
+            <a:r>
+              <a:rPr lang="en-US" sz="1400" dirty="0">
+                <a:solidFill>
+                  <a:schemeClr val="bg1"/>
+                </a:solidFill>
+              </a:rPr>
+              <a:t xml:space="preserve">, </a:t>
+            </a:r>
+            <a:r>
+              <a:rPr lang="en-US" sz="1400" dirty="0">
+                <a:solidFill>
+                  <a:schemeClr val="bg1"/>
+                </a:solidFill>
+              </a:rPr>
+              <a:t>TCN</a:t>
+            </a:r>
+            <a:r>
+              <a:rPr lang="en-US" sz="1400" dirty="0">
+                <a:solidFill>
+                  <a:schemeClr val="bg1"/>
+                </a:solidFill>
+              </a:rPr>
+              <a:t xml:space="preserve">, </a:t>
+            </a:r>
+            <a:r>
+              <a:rPr lang="en-US" sz="1400" dirty="0">
+                <a:solidFill>
+                  <a:schemeClr val="bg1"/>
+                </a:solidFill>
+              </a:rPr>
+              <a:t>CNN</a:t>
+            </a:r>
+            <a:r>
+              <a:rPr baseline="-25000" lang="en-US" sz="1400" dirty="0">
+                <a:solidFill>
+                  <a:schemeClr val="bg1"/>
+                </a:solidFill>
+              </a:rPr>
+              <a:t>attention</a:t>
+            </a:r>
+            <a:r>
+              <a:rPr lang="en-US" sz="1400" dirty="0">
+                <a:solidFill>
+                  <a:schemeClr val="bg1"/>
+                </a:solidFill>
+              </a:rPr>
+              <a:t>. The three dropped trunks were never run through the full battery.</a:t>
             </a:r>
             <a:endParaRPr lang="en-US" sz="1400" dirty="0"/>
           </a:p>
@@ -10825,7 +12293,23 @@
                   <a:schemeClr val="tx1"/>
                 </a:solidFill>
               </a:rPr>
-              <a:t>poc_a: independent-angle baseline</a:t>
+              <a:t>POC</a:t>
+            </a:r>
+            <a:r>
+              <a:rPr baseline="-25000" lang="en-US" sz="1600" dirty="0">
+                <a:solidFill>
+                  <a:schemeClr val="tx1"/>
+                </a:solidFill>
+              </a:rPr>
+              <a:t>A</a:t>
+            </a:r>
+            <a:r>
+              <a:rPr lang="en-US" sz="1600" dirty="0">
+                <a:solidFill>
+                  <a:schemeClr val="tx1"/>
+                </a:solidFill>
+              </a:rPr>
+              <a:t>: independent-angle baseline</a:t>
             </a:r>
             <a:endParaRPr lang="en-US" sz="1600" dirty="0"/>
           </a:p>
@@ -10843,7 +12327,103 @@
                   <a:schemeClr val="tx1"/>
                 </a:solidFill>
               </a:rPr>
-              <a:t>poc_b: explicit combination-space head (2φc + 2ψ, 2φc − 2ψ)</a:t>
+              <a:t>POC</a:t>
+            </a:r>
+            <a:r>
+              <a:rPr baseline="-25000" lang="en-US" sz="1600" dirty="0">
+                <a:solidFill>
+                  <a:schemeClr val="tx1"/>
+                </a:solidFill>
+              </a:rPr>
+              <a:t>B</a:t>
+            </a:r>
+            <a:r>
+              <a:rPr lang="en-US" sz="1600" dirty="0">
+                <a:solidFill>
+                  <a:schemeClr val="tx1"/>
+                </a:solidFill>
+              </a:rPr>
+              <a:t>: explicit combination-space head (2</a:t>
+            </a:r>
+            <a:r>
+              <a:rPr i="1" lang="en-US" sz="1600" dirty="0">
+                <a:solidFill>
+                  <a:schemeClr val="tx1"/>
+                </a:solidFill>
+              </a:rPr>
+              <a:t>φ</a:t>
+            </a:r>
+            <a:r>
+              <a:rPr baseline="-25000" lang="en-US" sz="1600" dirty="0">
+                <a:solidFill>
+                  <a:schemeClr val="tx1"/>
+                </a:solidFill>
+              </a:rPr>
+              <a:t>c</a:t>
+            </a:r>
+            <a:r>
+              <a:rPr lang="en-US" sz="1600" dirty="0">
+                <a:solidFill>
+                  <a:schemeClr val="tx1"/>
+                </a:solidFill>
+              </a:rPr>
+              <a:t xml:space="preserve"> + 2</a:t>
+            </a:r>
+            <a:r>
+              <a:rPr i="1" lang="en-US" sz="1600" dirty="0">
+                <a:solidFill>
+                  <a:schemeClr val="tx1"/>
+                </a:solidFill>
+              </a:rPr>
+              <a:t>ψ</a:t>
+            </a:r>
+            <a:r>
+              <a:rPr lang="en-US" sz="1600" dirty="0">
+                <a:solidFill>
+                  <a:schemeClr val="tx1"/>
+                </a:solidFill>
+              </a:rPr>
+              <a:t>, 2</a:t>
+            </a:r>
+            <a:r>
+              <a:rPr i="1" lang="en-US" sz="1600" dirty="0">
+                <a:solidFill>
+                  <a:schemeClr val="tx1"/>
+                </a:solidFill>
+              </a:rPr>
+              <a:t>φ</a:t>
+            </a:r>
+            <a:r>
+              <a:rPr baseline="-25000" lang="en-US" sz="1600" dirty="0">
+                <a:solidFill>
+                  <a:schemeClr val="tx1"/>
+                </a:solidFill>
+              </a:rPr>
+              <a:t>c</a:t>
+            </a:r>
+            <a:r>
+              <a:rPr lang="en-US" sz="1600" dirty="0">
+                <a:solidFill>
+                  <a:schemeClr val="tx1"/>
+                </a:solidFill>
+              </a:rPr>
+              <a:t xml:space="preserve"> − 2</a:t>
+            </a:r>
+            <a:r>
+              <a:rPr i="1" lang="en-US" sz="1600" dirty="0">
+                <a:solidFill>
+                  <a:schemeClr val="tx1"/>
+                </a:solidFill>
+              </a:rPr>
+              <a:t>ψ</a:t>
+            </a:r>
+            <a:r>
+              <a:rPr lang="en-US" sz="1600" dirty="0">
+                <a:solidFill>
+                  <a:schemeClr val="tx1"/>
+                </a:solidFill>
+              </a:rPr>
+              <a:t>)</a:t>
             </a:r>
             <a:endParaRPr lang="en-US" sz="1600" dirty="0"/>
           </a:p>
@@ -10948,12 +12528,20 @@
               <a:buChar char="•"/>
             </a:pPr>
             <a:r>
+              <a:rPr i="1" lang="en-US" sz="1600" dirty="0">
+                <a:solidFill>
+                  <a:schemeClr val="tx1"/>
+                </a:solidFill>
+              </a:rPr>
+              <a:t>λ</a:t>
+            </a:r>
+            <a:r>
               <a:rPr lang="en-US" sz="1600" dirty="0">
                 <a:solidFill>
                   <a:schemeClr val="tx1"/>
                 </a:solidFill>
               </a:rPr>
-              <a:t>λ = 0.01, 0.05 and 0.10 on the TCN models</a:t>
+              <a:t xml:space="preserve"> = 0.01, 0.05 and 0.10 on the TCN models</a:t>
             </a:r>
             <a:endParaRPr lang="en-US" sz="1600" dirty="0"/>
           </a:p>
@@ -11123,7 +12711,7 @@
       </p:sp>
       <p:pic>
         <p:nvPicPr>
-          <p:cNvPr id="4" name="Image 0" descr="Health-check heatmap: positive-control heads green, phi_c and psi heads dead or collapsed in all four models">    </p:cNvPr>
+          <p:cNvPr id="4" name="Image 0" descr="Health-check heatmap: positive-control heads green, φc and ψ heads dead or collapsed in all four models">    </p:cNvPr>
           <p:cNvPicPr>
             <a:picLocks noChangeAspect="1"/>
           </p:cNvPicPr>
@@ -11137,8 +12725,8 @@
         </p:blipFill>
         <p:spPr>
           <a:xfrm>
-            <a:off x="548640" y="1325880"/>
-            <a:ext cx="11064240" cy="2176272"/>
+            <a:off x="1340335" y="1325880"/>
+            <a:ext cx="9480850" cy="2286000"/>
           </a:xfrm>
           <a:prstGeom prst="rect">
             <a:avLst/>
@@ -11248,7 +12836,31 @@
                   <a:schemeClr val="tx1"/>
                 </a:solidFill>
               </a:rPr>
-              <a:t>Chirp mass R² 0.92–0.96, merger time 0.90–0.92, SNR 0.75–0.79: the shared features carry real information.</a:t>
+              <a:t xml:space="preserve">Chirp mass </a:t>
+            </a:r>
+            <a:r>
+              <a:rPr i="1" lang="en-US" sz="1400" dirty="0">
+                <a:solidFill>
+                  <a:schemeClr val="tx1"/>
+                </a:solidFill>
+              </a:rPr>
+              <a:t>R</a:t>
+            </a:r>
+            <a:r>
+              <a:rPr baseline="30000" lang="en-US" sz="1400" dirty="0">
+                <a:solidFill>
+                  <a:schemeClr val="tx1"/>
+                </a:solidFill>
+              </a:rPr>
+              <a:t>2</a:t>
+            </a:r>
+            <a:r>
+              <a:rPr lang="en-US" sz="1400" dirty="0">
+                <a:solidFill>
+                  <a:schemeClr val="tx1"/>
+                </a:solidFill>
+              </a:rPr>
+              <a:t xml:space="preserve"> 0.92–0.96, merger time 0.90–0.92, SNR 0.75–0.79: the shared features carry real information.</a:t>
             </a:r>
             <a:endParaRPr lang="en-US" sz="1400" dirty="0"/>
           </a:p>
@@ -11313,7 +12925,7 @@
               <a:buNone/>
             </a:pPr>
             <a:r>
-              <a:rPr lang="en-US" sz="2000" b="1" dirty="0">
+              <a:rPr i="1" lang="en-US" sz="2000" b="1" dirty="0">
                 <a:solidFill>
                   <a:schemeClr val="accent4"/>
                 </a:solidFill>
@@ -11321,7 +12933,51 @@
                 <a:ea typeface="Cambria" pitchFamily="34" charset="-122"/>
                 <a:cs typeface="Cambria" pitchFamily="34" charset="-120"/>
               </a:rPr>
-              <a:t>φc and ψ do not</a:t>
+              <a:t>φ</a:t>
+            </a:r>
+            <a:r>
+              <a:rPr baseline="-25000" lang="en-US" sz="2000" b="1" dirty="0">
+                <a:solidFill>
+                  <a:schemeClr val="accent4"/>
+                </a:solidFill>
+                <a:latin typeface="Cambria" pitchFamily="34" charset="0"/>
+                <a:ea typeface="Cambria" pitchFamily="34" charset="-122"/>
+                <a:cs typeface="Cambria" pitchFamily="34" charset="-120"/>
+              </a:rPr>
+              <a:t>c</a:t>
+            </a:r>
+            <a:r>
+              <a:rPr lang="en-US" sz="2000" b="1" dirty="0">
+                <a:solidFill>
+                  <a:schemeClr val="accent4"/>
+                </a:solidFill>
+                <a:latin typeface="Cambria" pitchFamily="34" charset="0"/>
+                <a:ea typeface="Cambria" pitchFamily="34" charset="-122"/>
+                <a:cs typeface="Cambria" pitchFamily="34" charset="-120"/>
+              </a:rPr>
+              <a:t xml:space="preserve"> and </a:t>
+            </a:r>
+            <a:r>
+              <a:rPr i="1" lang="en-US" sz="2000" b="1" dirty="0">
+                <a:solidFill>
+                  <a:schemeClr val="accent4"/>
+                </a:solidFill>
+                <a:latin typeface="Cambria" pitchFamily="34" charset="0"/>
+                <a:ea typeface="Cambria" pitchFamily="34" charset="-122"/>
+                <a:cs typeface="Cambria" pitchFamily="34" charset="-120"/>
+              </a:rPr>
+              <a:t>ψ</a:t>
+            </a:r>
+            <a:r>
+              <a:rPr lang="en-US" sz="2000" b="1" dirty="0">
+                <a:solidFill>
+                  <a:schemeClr val="accent4"/>
+                </a:solidFill>
+                <a:latin typeface="Cambria" pitchFamily="34" charset="0"/>
+                <a:ea typeface="Cambria" pitchFamily="34" charset="-122"/>
+                <a:cs typeface="Cambria" pitchFamily="34" charset="-120"/>
+              </a:rPr>
+              <a:t xml:space="preserve"> do not</a:t>
             </a:r>
             <a:endParaRPr lang="en-US" sz="2000" dirty="0"/>
           </a:p>
@@ -11357,7 +13013,31 @@
                   <a:schemeClr val="tx1"/>
                 </a:solidFill>
               </a:rPr>
-              <a:t>Every configuration converges to the random-guess baseline (MAE ≈ 1.55–1.59 rad for φc).</a:t>
+              <a:t xml:space="preserve">Every configuration converges to the random-guess baseline (MAE ≈ 1.55–1.59 rad for </a:t>
+            </a:r>
+            <a:r>
+              <a:rPr i="1" lang="en-US" sz="1400" dirty="0">
+                <a:solidFill>
+                  <a:schemeClr val="tx1"/>
+                </a:solidFill>
+              </a:rPr>
+              <a:t>φ</a:t>
+            </a:r>
+            <a:r>
+              <a:rPr baseline="-25000" lang="en-US" sz="1400" dirty="0">
+                <a:solidFill>
+                  <a:schemeClr val="tx1"/>
+                </a:solidFill>
+              </a:rPr>
+              <a:t>c</a:t>
+            </a:r>
+            <a:r>
+              <a:rPr lang="en-US" sz="1400" dirty="0">
+                <a:solidFill>
+                  <a:schemeClr val="tx1"/>
+                </a:solidFill>
+              </a:rPr>
+              <a:t>).</a:t>
             </a:r>
             <a:endParaRPr lang="en-US" sz="1400" dirty="0"/>
           </a:p>
@@ -11466,7 +13146,143 @@
                   <a:schemeClr val="tx1"/>
                 </a:solidFill>
               </a:rPr>
-              <a:t>poc_a (ψ) and poc_b (φc, ψ) collapse to one angle; tcn and cnn_attention are noisy and uninformative instead.</a:t>
+              <a:t>POC</a:t>
+            </a:r>
+            <a:r>
+              <a:rPr baseline="-25000" lang="en-US" sz="1400" dirty="0">
+                <a:solidFill>
+                  <a:schemeClr val="tx1"/>
+                </a:solidFill>
+              </a:rPr>
+              <a:t>A</a:t>
+            </a:r>
+            <a:r>
+              <a:rPr lang="en-US" sz="1400" dirty="0">
+                <a:solidFill>
+                  <a:schemeClr val="tx1"/>
+                </a:solidFill>
+              </a:rPr>
+              <a:t xml:space="preserve"> (</a:t>
+            </a:r>
+            <a:r>
+              <a:rPr i="1" lang="en-US" sz="1400" dirty="0">
+                <a:solidFill>
+                  <a:schemeClr val="tx1"/>
+                </a:solidFill>
+              </a:rPr>
+              <a:t>ψ</a:t>
+            </a:r>
+            <a:r>
+              <a:rPr lang="en-US" sz="1400" dirty="0">
+                <a:solidFill>
+                  <a:schemeClr val="tx1"/>
+                </a:solidFill>
+              </a:rPr>
+              <a:t xml:space="preserve">) and </a:t>
+            </a:r>
+            <a:r>
+              <a:rPr lang="en-US" sz="1400" dirty="0">
+                <a:solidFill>
+                  <a:schemeClr val="tx1"/>
+                </a:solidFill>
+              </a:rPr>
+              <a:t>POC</a:t>
+            </a:r>
+            <a:r>
+              <a:rPr baseline="-25000" lang="en-US" sz="1400" dirty="0">
+                <a:solidFill>
+                  <a:schemeClr val="tx1"/>
+                </a:solidFill>
+              </a:rPr>
+              <a:t>B</a:t>
+            </a:r>
+            <a:r>
+              <a:rPr lang="en-US" sz="1400" dirty="0">
+                <a:solidFill>
+                  <a:schemeClr val="tx1"/>
+                </a:solidFill>
+              </a:rPr>
+              <a:t xml:space="preserve"> (</a:t>
+            </a:r>
+            <a:r>
+              <a:rPr i="1" lang="en-US" sz="1400" dirty="0">
+                <a:solidFill>
+                  <a:schemeClr val="tx1"/>
+                </a:solidFill>
+              </a:rPr>
+              <a:t>φ</a:t>
+            </a:r>
+            <a:r>
+              <a:rPr baseline="-25000" lang="en-US" sz="1400" dirty="0">
+                <a:solidFill>
+                  <a:schemeClr val="tx1"/>
+                </a:solidFill>
+              </a:rPr>
+              <a:t>c</a:t>
+            </a:r>
+            <a:r>
+              <a:rPr lang="en-US" sz="1400" dirty="0">
+                <a:solidFill>
+                  <a:schemeClr val="tx1"/>
+                </a:solidFill>
+              </a:rPr>
+              <a:t xml:space="preserve">, </a:t>
+            </a:r>
+            <a:r>
+              <a:rPr i="1" lang="en-US" sz="1400" dirty="0">
+                <a:solidFill>
+                  <a:schemeClr val="tx1"/>
+                </a:solidFill>
+              </a:rPr>
+              <a:t>ψ</a:t>
+            </a:r>
+            <a:r>
+              <a:rPr lang="en-US" sz="1400" dirty="0">
+                <a:solidFill>
+                  <a:schemeClr val="tx1"/>
+                </a:solidFill>
+              </a:rPr>
+              <a:t xml:space="preserve">) collapse to one angle; </a:t>
+            </a:r>
+            <a:r>
+              <a:rPr lang="en-US" sz="1400" dirty="0">
+                <a:solidFill>
+                  <a:schemeClr val="tx1"/>
+                </a:solidFill>
+              </a:rPr>
+              <a:t>TCN</a:t>
+            </a:r>
+            <a:r>
+              <a:rPr lang="en-US" sz="1400" dirty="0">
+                <a:solidFill>
+                  <a:schemeClr val="tx1"/>
+                </a:solidFill>
+              </a:rPr>
+              <a:t xml:space="preserve"> and </a:t>
+            </a:r>
+            <a:r>
+              <a:rPr lang="en-US" sz="1400" dirty="0">
+                <a:solidFill>
+                  <a:schemeClr val="tx1"/>
+                </a:solidFill>
+              </a:rPr>
+              <a:t>CNN</a:t>
+            </a:r>
+            <a:r>
+              <a:rPr baseline="-25000" lang="en-US" sz="1400" dirty="0">
+                <a:solidFill>
+                  <a:schemeClr val="tx1"/>
+                </a:solidFill>
+              </a:rPr>
+              <a:t>attention</a:t>
+            </a:r>
+            <a:r>
+              <a:rPr lang="en-US" sz="1400" dirty="0">
+                <a:solidFill>
+                  <a:schemeClr val="tx1"/>
+                </a:solidFill>
+              </a:rPr>
+              <a:t xml:space="preserve"> are noisy and uninformative instead.</a:t>
             </a:r>
             <a:endParaRPr lang="en-US" sz="1400" dirty="0"/>
           </a:p>
@@ -11502,7 +13318,7 @@
                   <a:schemeClr val="accent5"/>
                 </a:solidFill>
               </a:rPr>
-              <a:t>Source: analysis_output/health_check_20261019_125442.png; paper_summary.md</a:t>
+              <a:t>Source: heatmap_throwaway_output/heatmap_throwaway_20261019_125442.png; paper_summary.md</a:t>
             </a:r>
             <a:endParaRPr lang="en-US" sz="1000" dirty="0"/>
           </a:p>
@@ -11610,7 +13426,15 @@
                   <a:schemeClr val="tx1"/>
                 </a:solidFill>
               </a:rPr>
-              <a:t>Mode collapse on ψ</a:t>
+              <a:t xml:space="preserve">Mode collapse on </a:t>
+            </a:r>
+            <a:r>
+              <a:rPr i="1" lang="en-US" sz="3600" b="1" dirty="0">
+                <a:solidFill>
+                  <a:schemeClr val="tx1"/>
+                </a:solidFill>
+              </a:rPr>
+              <a:t>ψ</a:t>
             </a:r>
             <a:endParaRPr lang="en-US" sz="3600" dirty="0"/>
           </a:p>
@@ -11670,7 +13494,23 @@
                   <a:schemeClr val="accent5"/>
                 </a:solidFill>
               </a:rPr>
-              <a:t>Grey: true ψ (flat over 0 to π). Colour: model predictions on the 5,000 validation events.</a:t>
+              <a:t xml:space="preserve">Grey: true </a:t>
+            </a:r>
+            <a:r>
+              <a:rPr i="1" lang="en-US" sz="1400" dirty="0">
+                <a:solidFill>
+                  <a:schemeClr val="accent5"/>
+                </a:solidFill>
+              </a:rPr>
+              <a:t>ψ</a:t>
+            </a:r>
+            <a:r>
+              <a:rPr lang="en-US" sz="1400" dirty="0">
+                <a:solidFill>
+                  <a:schemeClr val="accent5"/>
+                </a:solidFill>
+              </a:rPr>
+              <a:t xml:space="preserve"> (flat over 0 to π). Colour: model predictions on the 5,000 validation events.</a:t>
             </a:r>
             <a:endParaRPr lang="en-US" sz="1400" dirty="0"/>
           </a:p>
@@ -11745,7 +13585,47 @@
                   <a:schemeClr val="tx1"/>
                 </a:solidFill>
               </a:rPr>
-              <a:t>of poc_b's 5,000 ψ predictions fall in one histogram bin</a:t>
+              <a:t xml:space="preserve">of </a:t>
+            </a:r>
+            <a:r>
+              <a:rPr lang="en-US" sz="1400" dirty="0">
+                <a:solidFill>
+                  <a:schemeClr val="tx1"/>
+                </a:solidFill>
+              </a:rPr>
+              <a:t>POC</a:t>
+            </a:r>
+            <a:r>
+              <a:rPr baseline="-25000" lang="en-US" sz="1400" dirty="0">
+                <a:solidFill>
+                  <a:schemeClr val="tx1"/>
+                </a:solidFill>
+              </a:rPr>
+              <a:t>B</a:t>
+            </a:r>
+            <a:r>
+              <a:rPr lang="en-US" sz="1400" dirty="0">
+                <a:solidFill>
+                  <a:schemeClr val="tx1"/>
+                </a:solidFill>
+              </a:rPr>
+              <a:t xml:space="preserve">'s 5,000 </a:t>
+            </a:r>
+            <a:r>
+              <a:rPr i="1" lang="en-US" sz="1400" dirty="0">
+                <a:solidFill>
+                  <a:schemeClr val="tx1"/>
+                </a:solidFill>
+              </a:rPr>
+              <a:t>ψ</a:t>
+            </a:r>
+            <a:r>
+              <a:rPr lang="en-US" sz="1400" dirty="0">
+                <a:solidFill>
+                  <a:schemeClr val="tx1"/>
+                </a:solidFill>
+              </a:rPr>
+              <a:t xml:space="preserve"> predictions fall in one histogram bin</a:t>
             </a:r>
             <a:endParaRPr lang="en-US" sz="1400" dirty="0"/>
           </a:p>
@@ -11821,16 +13701,53 @@
               </a:rPr>
               <a:t>Collapsed: </a:t>
             </a:r>
-            <a:pPr indent="0" marL="0">
-              <a:buNone/>
-            </a:pPr>
             <a:r>
               <a:rPr lang="en-US" sz="1400" dirty="0">
                 <a:solidFill>
                   <a:schemeClr val="tx1"/>
                 </a:solidFill>
               </a:rPr>
-              <a:t>poc_a, poc_b output a near-constant angle whatever the input</a:t>
+              <a:t>POC</a:t>
+            </a:r>
+            <a:r>
+              <a:rPr baseline="-25000" lang="en-US" sz="1400" dirty="0">
+                <a:solidFill>
+                  <a:schemeClr val="tx1"/>
+                </a:solidFill>
+              </a:rPr>
+              <a:t>A</a:t>
+            </a:r>
+            <a:r>
+              <a:rPr lang="en-US" sz="1400" dirty="0">
+                <a:solidFill>
+                  <a:schemeClr val="tx1"/>
+                </a:solidFill>
+              </a:rPr>
+              <a:t xml:space="preserve">, </a:t>
+            </a:r>
+            <a:r>
+              <a:rPr lang="en-US" sz="1400" dirty="0">
+                <a:solidFill>
+                  <a:schemeClr val="tx1"/>
+                </a:solidFill>
+              </a:rPr>
+              <a:t>POC</a:t>
+            </a:r>
+            <a:r>
+              <a:rPr baseline="-25000" lang="en-US" sz="1400" dirty="0">
+                <a:solidFill>
+                  <a:schemeClr val="tx1"/>
+                </a:solidFill>
+              </a:rPr>
+              <a:t>B</a:t>
+            </a:r>
+            <a:r>
+              <a:rPr lang="en-US" sz="1400" dirty="0">
+                <a:solidFill>
+                  <a:schemeClr val="tx1"/>
+                </a:solidFill>
+              </a:rPr>
+              <a:t xml:space="preserve"> output a near-constant angle whatever the input</a:t>
             </a:r>
             <a:endParaRPr lang="en-US" sz="1400" dirty="0"/>
           </a:p>
@@ -11850,16 +13767,45 @@
               </a:rPr>
               <a:t>Not collapsed: </a:t>
             </a:r>
-            <a:pPr indent="0" marL="0">
-              <a:buNone/>
-            </a:pPr>
             <a:r>
               <a:rPr lang="en-US" sz="1400" dirty="0">
                 <a:solidFill>
                   <a:schemeClr val="tx1"/>
                 </a:solidFill>
               </a:rPr>
-              <a:t>tcn, cnn_attention are noisy and uninformative, a different failure with the same conclusion</a:t>
+              <a:t>TCN</a:t>
+            </a:r>
+            <a:r>
+              <a:rPr lang="en-US" sz="1400" dirty="0">
+                <a:solidFill>
+                  <a:schemeClr val="tx1"/>
+                </a:solidFill>
+              </a:rPr>
+              <a:t xml:space="preserve">, </a:t>
+            </a:r>
+            <a:r>
+              <a:rPr lang="en-US" sz="1400" dirty="0">
+                <a:solidFill>
+                  <a:schemeClr val="tx1"/>
+                </a:solidFill>
+              </a:rPr>
+              <a:t>CNN</a:t>
+            </a:r>
+            <a:r>
+              <a:rPr baseline="-25000" lang="en-US" sz="1400" dirty="0">
+                <a:solidFill>
+                  <a:schemeClr val="tx1"/>
+                </a:solidFill>
+              </a:rPr>
+              <a:t>attention</a:t>
+            </a:r>
+            <a:r>
+              <a:rPr lang="en-US" sz="1400" dirty="0">
+                <a:solidFill>
+                  <a:schemeClr val="tx1"/>
+                </a:solidFill>
+              </a:rPr>
+              <a:t xml:space="preserve"> are noisy and uninformative, a different failure with the same conclusion</a:t>
             </a:r>
             <a:endParaRPr lang="en-US" sz="1400" dirty="0"/>
           </a:p>
@@ -11929,7 +13875,47 @@
                   <a:schemeClr val="bg1"/>
                 </a:solidFill>
               </a:rPr>
-              <a:t>Collapse is a model failing to find any φc/ψ signal, not a plotting artifact: the loss wiring and gradient chain were checked and are healthy.</a:t>
+              <a:t xml:space="preserve">Collapse is a model failing to find any </a:t>
+            </a:r>
+            <a:r>
+              <a:rPr i="1" lang="en-US" sz="1400" dirty="0">
+                <a:solidFill>
+                  <a:schemeClr val="bg1"/>
+                </a:solidFill>
+              </a:rPr>
+              <a:t>φ</a:t>
+            </a:r>
+            <a:r>
+              <a:rPr baseline="-25000" lang="en-US" sz="1400" dirty="0">
+                <a:solidFill>
+                  <a:schemeClr val="bg1"/>
+                </a:solidFill>
+              </a:rPr>
+              <a:t>c</a:t>
+            </a:r>
+            <a:r>
+              <a:rPr lang="en-US" sz="1400" dirty="0">
+                <a:solidFill>
+                  <a:schemeClr val="bg1"/>
+                </a:solidFill>
+              </a:rPr>
+              <a:t>/</a:t>
+            </a:r>
+            <a:r>
+              <a:rPr i="1" lang="en-US" sz="1400" dirty="0">
+                <a:solidFill>
+                  <a:schemeClr val="bg1"/>
+                </a:solidFill>
+              </a:rPr>
+              <a:t>ψ</a:t>
+            </a:r>
+            <a:r>
+              <a:rPr lang="en-US" sz="1400" dirty="0">
+                <a:solidFill>
+                  <a:schemeClr val="bg1"/>
+                </a:solidFill>
+              </a:rPr>
+              <a:t xml:space="preserve"> signal, not a plotting artifact: the loss wiring and gradient chain were checked and are healthy.</a:t>
             </a:r>
             <a:endParaRPr lang="en-US" sz="1400" dirty="0"/>
           </a:p>
@@ -12135,20 +14121,30 @@
               </a:rPr>
               <a:t>Three models sit at the null on both splits. </a:t>
             </a:r>
-            <a:pPr indent="0" marL="0">
-              <a:buNone/>
-            </a:pPr>
             <a:r>
               <a:rPr lang="en-US" sz="1600" b="1" dirty="0">
                 <a:solidFill>
                   <a:schemeClr val="tx1"/>
                 </a:solidFill>
               </a:rPr>
-              <a:t>cnn_attention memorizes: </a:t>
-            </a:r>
-            <a:pPr indent="0" marL="0">
-              <a:buNone/>
-            </a:pPr>
+              <a:t>CNN</a:t>
+            </a:r>
+            <a:r>
+              <a:rPr baseline="-25000" lang="en-US" sz="1600" b="1" dirty="0">
+                <a:solidFill>
+                  <a:schemeClr val="tx1"/>
+                </a:solidFill>
+              </a:rPr>
+              <a:t>attention</a:t>
+            </a:r>
+            <a:r>
+              <a:rPr lang="en-US" sz="1600" b="1" dirty="0">
+                <a:solidFill>
+                  <a:schemeClr val="tx1"/>
+                </a:solidFill>
+              </a:rPr>
+              <a:t xml:space="preserve"> memorizes: </a:t>
+            </a:r>
             <a:r>
               <a:rPr lang="en-US" sz="1600" dirty="0">
                 <a:solidFill>

--- a/experiments/phic_psi_poc-redo/phic_psi_presentation.pptx
+++ b/experiments/phic_psi_poc-redo/phic_psi_presentation.pptx
@@ -4,6 +4,9 @@
   <p:sldMasterIdLst>
     <p:sldMasterId id="2147483648" r:id="rId1"/>
   </p:sldMasterIdLst>
+  <p:notesMasterIdLst>
+    <p:notesMasterId r:id="rId18"/>
+  </p:notesMasterIdLst>
   <p:sldIdLst>
     <p:sldId id="256" r:id="rId2"/>
     <p:sldId id="257" r:id="rId3"/>
@@ -22,9 +25,6 @@
     <p:sldId id="270" r:id="rId16"/>
     <p:sldId id="271" r:id="rId17"/>
   </p:sldIdLst>
-  <p:notesMasterIdLst>
-    <p:notesMasterId r:id="rId18"/>
-  </p:notesMasterIdLst>
   <p:sldSz cx="12192000" cy="6858000"/>
   <p:notesSz cx="6858000" cy="12192000"/>
   <p:defaultTextStyle>
@@ -122,7 +122,7 @@
   <p:extLst>
     <p:ext uri="{521415D9-36F7-43E2-AB2F-B90AF26B5E84}">
       <p14:sectionLst xmlns:p14="http://schemas.microsoft.com/office/powerpoint/2010/main">
-        <p14:section name="Context" id="{349ca52f-01bb-c6fb-32b8-b64d000a6bec}">
+        <p14:section name="Context" id="{349CA52F-01BB-C6FB-32B8-B64D000A6BEC}">
           <p14:sldIdLst>
             <p14:sldId id="256"/>
             <p14:sldId id="257"/>
@@ -130,14 +130,14 @@
             <p14:sldId id="259"/>
           </p14:sldIdLst>
         </p14:section>
-        <p14:section name="Method" id="{583303d7-2a3c-71f1-67ef-bfa847f96ded}">
+        <p14:section name="Method" id="{583303D7-2A3C-71F1-67EF-BFA847F96DED}">
           <p14:sldIdLst>
             <p14:sldId id="260"/>
-            <p14:sldId id="261"/>
           </p14:sldIdLst>
         </p14:section>
-        <p14:section name="Results" id="{85b9fff3-ad1f-603f-94d3-ee720af15e16}">
+        <p14:section name="Results" id="{85B9FFF3-AD1F-603F-94D3-EE720AF15E16}">
           <p14:sldIdLst>
+            <p14:sldId id="261"/>
             <p14:sldId id="262"/>
             <p14:sldId id="263"/>
             <p14:sldId id="264"/>
@@ -146,13 +146,13 @@
             <p14:sldId id="267"/>
           </p14:sldIdLst>
         </p14:section>
-        <p14:section name="Side findings" id="{f3ede28a-edda-105d-8b83-4883c7eb3fc5}">
+        <p14:section name="Side findings" id="{F3EDE28A-EDDA-105D-8B83-4883C7EB3FC5}">
           <p14:sldIdLst>
             <p14:sldId id="268"/>
             <p14:sldId id="269"/>
           </p14:sldIdLst>
         </p14:section>
-        <p14:section name="Evidence and outlook" id="{9e09527a-f229-6d82-a47e-fa3109e70b91}">
+        <p14:section name="Evidence and outlook" id="{9E09527A-F229-6D82-A47E-FA3109E70B91}">
           <p14:sldIdLst>
             <p14:sldId id="270"/>
             <p14:sldId id="271"/>
@@ -168,9 +168,11 @@
 </file>
 
 <file path=ppt/charts/chart1.xml><?xml version="1.0" encoding="utf-8"?>
-<c:chartSpace xmlns:c="http://schemas.openxmlformats.org/drawingml/2006/chart" xmlns:a="http://schemas.openxmlformats.org/drawingml/2006/main" xmlns:r="http://schemas.openxmlformats.org/officeDocument/2006/relationships">
+<c:chartSpace xmlns:c="http://schemas.openxmlformats.org/drawingml/2006/chart" xmlns:a="http://schemas.openxmlformats.org/drawingml/2006/main" xmlns:r="http://schemas.openxmlformats.org/officeDocument/2006/relationships" xmlns:c16r2="http://schemas.microsoft.com/office/drawing/2015/06/chart">
   <c:date1904 val="0"/>
+  <c:lang val="en-US"/>
   <c:roundedCorners val="1"/>
+  <c:style val="2"/>
   <c:chart>
     <c:title>
       <c:tx>
@@ -198,7 +200,6 @@
           </a:p>
         </c:rich>
       </c:tx>
-      <c:layout/>
       <c:overlay val="0"/>
     </c:title>
     <c:autoTitleDeleted val="0"/>
@@ -229,62 +230,35 @@
             <a:effectLst/>
           </c:spPr>
           <c:invertIfNegative val="0"/>
-          <c:dLbls>
-            <c:numFmt formatCode="0.0" sourceLinked="0"/>
-            <c:txPr>
-              <a:bodyPr/>
-              <a:lstStyle/>
-              <a:p>
-                <a:pPr>
-                  <a:defRPr b="0" i="0" strike="noStrike" sz="1400" u="none">
-                    <a:solidFill>
-                      <a:srgbClr val="0F1B33"/>
-                    </a:solidFill>
-                    <a:latin typeface="+mn-lt"/>
-                  </a:defRPr>
-                </a:pPr>
-              </a:p>
-            </c:txPr>
-            <c:showLegendKey val="0"/>
-            <c:showVal val="1"/>
-            <c:showCatName val="0"/>
-            <c:showSerName val="0"/>
-            <c:showPercent val="0"/>
-            <c:showBubbleSize val="0"/>
-            <c:showLeaderLines val="0"/>
-          </c:dLbls>
           <c:dPt>
             <c:idx val="0"/>
             <c:invertIfNegative val="0"/>
             <c:bubble3D val="0"/>
-            <c:spPr>
-              <a:solidFill>
-                <a:srgbClr val="2EA7A0"/>
-              </a:solidFill>
-              <a:effectLst/>
-            </c:spPr>
+            <c:extLst>
+              <c:ext xmlns:c16="http://schemas.microsoft.com/office/drawing/2014/chart" uri="{C3380CC4-5D6E-409C-BE32-E72D297353CC}">
+                <c16:uniqueId val="{00000001-A442-48C4-BEDF-2A941B2F19C3}"/>
+              </c:ext>
+            </c:extLst>
           </c:dPt>
           <c:dPt>
             <c:idx val="1"/>
             <c:invertIfNegative val="0"/>
             <c:bubble3D val="0"/>
-            <c:spPr>
-              <a:solidFill>
-                <a:srgbClr val="2EA7A0"/>
-              </a:solidFill>
-              <a:effectLst/>
-            </c:spPr>
+            <c:extLst>
+              <c:ext xmlns:c16="http://schemas.microsoft.com/office/drawing/2014/chart" uri="{C3380CC4-5D6E-409C-BE32-E72D297353CC}">
+                <c16:uniqueId val="{00000003-A442-48C4-BEDF-2A941B2F19C3}"/>
+              </c:ext>
+            </c:extLst>
           </c:dPt>
           <c:dPt>
             <c:idx val="2"/>
             <c:invertIfNegative val="0"/>
             <c:bubble3D val="0"/>
-            <c:spPr>
-              <a:solidFill>
-                <a:srgbClr val="2EA7A0"/>
-              </a:solidFill>
-              <a:effectLst/>
-            </c:spPr>
+            <c:extLst>
+              <c:ext xmlns:c16="http://schemas.microsoft.com/office/drawing/2014/chart" uri="{C3380CC4-5D6E-409C-BE32-E72D297353CC}">
+                <c16:uniqueId val="{00000005-A442-48C4-BEDF-2A941B2F19C3}"/>
+              </c:ext>
+            </c:extLst>
           </c:dPt>
           <c:dPt>
             <c:idx val="3"/>
@@ -296,28 +270,68 @@
               </a:solidFill>
               <a:effectLst/>
             </c:spPr>
+            <c:extLst>
+              <c:ext xmlns:c16="http://schemas.microsoft.com/office/drawing/2014/chart" uri="{C3380CC4-5D6E-409C-BE32-E72D297353CC}">
+                <c16:uniqueId val="{00000007-A442-48C4-BEDF-2A941B2F19C3}"/>
+              </c:ext>
+            </c:extLst>
           </c:dPt>
+          <c:dLbls>
+            <c:numFmt formatCode="0.0" sourceLinked="0"/>
+            <c:spPr>
+              <a:noFill/>
+              <a:ln>
+                <a:noFill/>
+              </a:ln>
+              <a:effectLst/>
+            </c:spPr>
+            <c:txPr>
+              <a:bodyPr/>
+              <a:lstStyle/>
+              <a:p>
+                <a:pPr>
+                  <a:defRPr sz="1400" b="0" i="0" u="none" strike="noStrike">
+                    <a:solidFill>
+                      <a:srgbClr val="0F1B33"/>
+                    </a:solidFill>
+                    <a:latin typeface="+mn-lt"/>
+                  </a:defRPr>
+                </a:pPr>
+                <a:endParaRPr lang="en-001"/>
+              </a:p>
+            </c:txPr>
+            <c:showLegendKey val="0"/>
+            <c:showVal val="1"/>
+            <c:showCatName val="0"/>
+            <c:showSerName val="0"/>
+            <c:showPercent val="0"/>
+            <c:showBubbleSize val="0"/>
+            <c:showLeaderLines val="0"/>
+            <c:extLst>
+              <c:ext xmlns:c15="http://schemas.microsoft.com/office/drawing/2012/chart" uri="{CE6537A1-D6FC-4f65-9D91-7224C49458BB}">
+                <c15:showLeaderLines val="0"/>
+              </c:ext>
+            </c:extLst>
+          </c:dLbls>
           <c:cat>
-            <c:multiLvlStrRef>
+            <c:strRef>
               <c:f>Sheet1!$A$2:$A$5</c:f>
-              <c:multiLvlStrCache>
+              <c:strCache>
                 <c:ptCount val="4"/>
-                <c:lvl>
-                  <c:pt idx="0">
-                    <c:v>Low SNR</c:v>
-                  </c:pt>
-                  <c:pt idx="1">
-                    <c:v>Mid SNR</c:v>
-                  </c:pt>
-                  <c:pt idx="2">
-                    <c:v>High SNR</c:v>
-                  </c:pt>
-                  <c:pt idx="3">
-                    <c:v>Always guess mean direction</c:v>
-                  </c:pt>
-                </c:lvl>
-              </c:multiLvlStrCache>
-            </c:multiLvlStrRef>
+                <c:pt idx="0">
+                  <c:v>Low SNR</c:v>
+                </c:pt>
+                <c:pt idx="1">
+                  <c:v>Mid SNR</c:v>
+                </c:pt>
+                <c:pt idx="2">
+                  <c:v>High SNR</c:v>
+                </c:pt>
+                <c:pt idx="3">
+                  <c:v>Always guess mean direction</c:v>
+                </c:pt>
+              </c:strCache>
+            </c:strRef>
           </c:cat>
           <c:val>
             <c:numRef>
@@ -326,7 +340,7 @@
                 <c:formatCode>General</c:formatCode>
                 <c:ptCount val="4"/>
                 <c:pt idx="0">
-                  <c:v>80.15</c:v>
+                  <c:v>80.150000000000006</c:v>
                 </c:pt>
                 <c:pt idx="1">
                   <c:v>77.95</c:v>
@@ -340,36 +354,23 @@
               </c:numCache>
             </c:numRef>
           </c:val>
+          <c:extLst>
+            <c:ext xmlns:c16="http://schemas.microsoft.com/office/drawing/2014/chart" uri="{C3380CC4-5D6E-409C-BE32-E72D297353CC}">
+              <c16:uniqueId val="{00000008-A442-48C4-BEDF-2A941B2F19C3}"/>
+            </c:ext>
+          </c:extLst>
         </c:ser>
         <c:dLbls>
-          <c:numFmt formatCode="0.0" sourceLinked="0"/>
-          <c:txPr>
-            <a:bodyPr/>
-            <a:lstStyle/>
-            <a:p>
-              <a:pPr>
-                <a:defRPr b="0" i="0" strike="noStrike" sz="1400" u="none">
-                  <a:solidFill>
-                    <a:srgbClr val="0F1B33"/>
-                  </a:solidFill>
-                  <a:latin typeface="+mn-lt"/>
-                </a:defRPr>
-              </a:pPr>
-            </a:p>
-          </c:txPr>
           <c:showLegendKey val="0"/>
           <c:showVal val="1"/>
           <c:showCatName val="0"/>
           <c:showSerName val="0"/>
           <c:showPercent val="0"/>
           <c:showBubbleSize val="0"/>
-          <c:showLeaderLines val="0"/>
         </c:dLbls>
         <c:gapWidth val="150"/>
-        <c:overlap val="0"/>
         <c:axId val="2094734554"/>
         <c:axId val="2094734552"/>
-        <c:axId val="2094734556"/>
       </c:barChart>
       <c:catAx>
         <c:axId val="2094734554"/>
@@ -410,6 +411,7 @@
         <c:crosses val="autoZero"/>
         <c:auto val="1"/>
         <c:lblAlgn val="ctr"/>
+        <c:lblOffset val="100"/>
         <c:noMultiLvlLbl val="1"/>
       </c:catAx>
       <c:valAx>
@@ -458,7 +460,6 @@
               </a:p>
             </c:rich>
           </c:tx>
-          <c:layout/>
           <c:overlay val="0"/>
         </c:title>
         <c:numFmt formatCode="General" sourceLinked="0"/>
@@ -504,6 +505,7 @@
     </c:plotArea>
     <c:plotVisOnly val="1"/>
     <c:dispBlanksAs val="span"/>
+    <c:showDLblsOverMax val="1"/>
   </c:chart>
   <c:spPr>
     <a:noFill/>
@@ -540,234 +542,10 @@
           <a:chExt cx="0" cy="0"/>
         </a:xfrm>
       </p:grpSpPr>
-      <p:sp>
-        <p:nvSpPr>
-          <p:cNvPr id="2" name="Header Placeholder 1"/>
-          <p:cNvSpPr>
-            <a:spLocks noGrp="1"/>
-          </p:cNvSpPr>
-          <p:nvPr>
-            <p:ph type="hdr" sz="quarter"/>
-          </p:nvPr>
-        </p:nvSpPr>
-        <p:spPr>
-          <a:xfrm>
-            <a:off x="0" y="0"/>
-            <a:ext cx="2971800" cy="458788"/>
-          </a:xfrm>
-          <a:prstGeom prst="rect">
-            <a:avLst/>
-          </a:prstGeom>
-        </p:spPr>
-        <p:txBody>
-          <a:bodyPr vert="horz" lIns="91440" tIns="45720" rIns="91440" bIns="45720" rtlCol="0"/>
-          <a:lstStyle>
-            <a:lvl1pPr algn="l">
-              <a:defRPr sz="1200"/>
-            </a:lvl1pPr>
-          </a:lstStyle>
-          <a:p>
-            <a:endParaRPr lang="en-US"/>
-          </a:p>
-        </p:txBody>
-      </p:sp>
-      <p:sp>
-        <p:nvSpPr>
-          <p:cNvPr id="3" name="Date Placeholder 2"/>
-          <p:cNvSpPr>
-            <a:spLocks noGrp="1"/>
-          </p:cNvSpPr>
-          <p:nvPr>
-            <p:ph type="dt" idx="1"/>
-          </p:nvPr>
-        </p:nvSpPr>
-        <p:spPr>
-          <a:xfrm>
-            <a:off x="3884613" y="0"/>
-            <a:ext cx="2971800" cy="458788"/>
-          </a:xfrm>
-          <a:prstGeom prst="rect">
-            <a:avLst/>
-          </a:prstGeom>
-        </p:spPr>
-        <p:txBody>
-          <a:bodyPr vert="horz" lIns="91440" tIns="45720" rIns="91440" bIns="45720" rtlCol="0"/>
-          <a:lstStyle>
-            <a:lvl1pPr algn="r">
-              <a:defRPr sz="1200"/>
-            </a:lvl1pPr>
-          </a:lstStyle>
-          <a:p>
-            <a:fld id="{5282F153-3F37-0F45-9E97-73ACFA13230C}" type="datetimeFigureOut">
-              <a:rPr lang="en-US"/>
-              <a:t>7/23/19</a:t>
-            </a:fld>
-            <a:endParaRPr lang="en-US"/>
-          </a:p>
-        </p:txBody>
-      </p:sp>
-      <p:sp>
-        <p:nvSpPr>
-          <p:cNvPr id="4" name="Slide Image Placeholder 3"/>
-          <p:cNvSpPr>
-            <a:spLocks noGrp="1" noRot="1" noChangeAspect="1"/>
-          </p:cNvSpPr>
-          <p:nvPr>
-            <p:ph type="sldImg" idx="2"/>
-          </p:nvPr>
-        </p:nvSpPr>
-        <p:spPr>
-          <a:xfrm>
-            <a:off x="685800" y="1143000"/>
-            <a:ext cx="5486400" cy="3086100"/>
-          </a:xfrm>
-          <a:prstGeom prst="rect">
-            <a:avLst/>
-          </a:prstGeom>
-          <a:noFill/>
-          <a:ln w="12700">
-            <a:solidFill>
-              <a:prstClr val="black"/>
-            </a:solidFill>
-          </a:ln>
-        </p:spPr>
-        <p:txBody>
-          <a:bodyPr vert="horz" lIns="91440" tIns="45720" rIns="91440" bIns="45720" rtlCol="0" anchor="ctr"/>
-          <a:lstStyle/>
-          <a:p>
-            <a:endParaRPr lang="en-US"/>
-          </a:p>
-        </p:txBody>
-      </p:sp>
-      <p:sp>
-        <p:nvSpPr>
-          <p:cNvPr id="5" name="Notes Placeholder 4"/>
-          <p:cNvSpPr>
-            <a:spLocks noGrp="1"/>
-          </p:cNvSpPr>
-          <p:nvPr>
-            <p:ph type="body" sz="quarter" idx="3"/>
-          </p:nvPr>
-        </p:nvSpPr>
-        <p:spPr>
-          <a:xfrm>
-            <a:off x="685800" y="4400550"/>
-            <a:ext cx="5486400" cy="3600450"/>
-          </a:xfrm>
-          <a:prstGeom prst="rect">
-            <a:avLst/>
-          </a:prstGeom>
-        </p:spPr>
-        <p:txBody>
-          <a:bodyPr vert="horz" lIns="91440" tIns="45720" rIns="91440" bIns="45720" rtlCol="0"/>
-          <a:lstStyle/>
-          <a:p>
-            <a:pPr lvl="0"/>
-            <a:r>
-              <a:rPr lang="en-US"/>
-              <a:t>Click to edit Master text styles</a:t>
-            </a:r>
-          </a:p>
-          <a:p>
-            <a:pPr lvl="1"/>
-            <a:r>
-              <a:rPr lang="en-US"/>
-              <a:t>Second level</a:t>
-            </a:r>
-          </a:p>
-          <a:p>
-            <a:pPr lvl="2"/>
-            <a:r>
-              <a:rPr lang="en-US"/>
-              <a:t>Third level</a:t>
-            </a:r>
-          </a:p>
-          <a:p>
-            <a:pPr lvl="3"/>
-            <a:r>
-              <a:rPr lang="en-US"/>
-              <a:t>Fourth level</a:t>
-            </a:r>
-          </a:p>
-          <a:p>
-            <a:pPr lvl="4"/>
-            <a:r>
-              <a:rPr lang="en-US"/>
-              <a:t>Fifth level</a:t>
-            </a:r>
-          </a:p>
-        </p:txBody>
-      </p:sp>
-      <p:sp>
-        <p:nvSpPr>
-          <p:cNvPr id="6" name="Footer Placeholder 5"/>
-          <p:cNvSpPr>
-            <a:spLocks noGrp="1"/>
-          </p:cNvSpPr>
-          <p:nvPr>
-            <p:ph type="ftr" sz="quarter" idx="4"/>
-          </p:nvPr>
-        </p:nvSpPr>
-        <p:spPr>
-          <a:xfrm>
-            <a:off x="0" y="8685213"/>
-            <a:ext cx="2971800" cy="458787"/>
-          </a:xfrm>
-          <a:prstGeom prst="rect">
-            <a:avLst/>
-          </a:prstGeom>
-        </p:spPr>
-        <p:txBody>
-          <a:bodyPr vert="horz" lIns="91440" tIns="45720" rIns="91440" bIns="45720" rtlCol="0" anchor="b"/>
-          <a:lstStyle>
-            <a:lvl1pPr algn="l">
-              <a:defRPr sz="1200"/>
-            </a:lvl1pPr>
-          </a:lstStyle>
-          <a:p>
-            <a:endParaRPr lang="en-US"/>
-          </a:p>
-        </p:txBody>
-      </p:sp>
-      <p:sp>
-        <p:nvSpPr>
-          <p:cNvPr id="7" name="Slide Number Placeholder 6"/>
-          <p:cNvSpPr>
-            <a:spLocks noGrp="1"/>
-          </p:cNvSpPr>
-          <p:nvPr>
-            <p:ph type="sldNum" sz="quarter" idx="5"/>
-          </p:nvPr>
-        </p:nvSpPr>
-        <p:spPr>
-          <a:xfrm>
-            <a:off x="3884613" y="8685213"/>
-            <a:ext cx="2971800" cy="458787"/>
-          </a:xfrm>
-          <a:prstGeom prst="rect">
-            <a:avLst/>
-          </a:prstGeom>
-        </p:spPr>
-        <p:txBody>
-          <a:bodyPr vert="horz" lIns="91440" tIns="45720" rIns="91440" bIns="45720" rtlCol="0" anchor="b"/>
-          <a:lstStyle>
-            <a:lvl1pPr algn="r">
-              <a:defRPr sz="1200"/>
-            </a:lvl1pPr>
-          </a:lstStyle>
-          <a:p>
-            <a:fld id="{CE5E9CC1-C706-0F49-92D6-E571CC5EEA8F}" type="slidenum">
-              <a:rPr lang="en-US"/>
-              <a:t>‹#›</a:t>
-            </a:fld>
-            <a:endParaRPr lang="en-US"/>
-          </a:p>
-        </p:txBody>
-      </p:sp>
     </p:spTree>
     <p:extLst>
       <p:ext uri="{BB962C8B-B14F-4D97-AF65-F5344CB8AC3E}">
-        <p14:creationId xmlns:p14="http://schemas.microsoft.com/office/powerpoint/2010/main" val="1024086991"/>
+        <p14:creationId xmlns:p14="http://schemas.microsoft.com/office/powerpoint/2010/main" val="983838498"/>
       </p:ext>
     </p:extLst>
   </p:cSld>
@@ -915,7 +693,6 @@
               <a:rPr lang="en-US" dirty="0"/>
               <a:t>Frame: a self-contained study of whether a point-estimating regression network can recover the coalescence phase and polarization angle from two-detector strain. The answer is a systematically verified null. Source: closing_summary.md, paper_summary.md.</a:t>
             </a:r>
-            <a:endParaRPr lang="en-US" dirty="0"/>
           </a:p>
         </p:txBody>
       </p:sp>
@@ -1003,7 +780,6 @@
               <a:rPr lang="en-US" dirty="0"/>
               <a:t>Before running the retune at higher penalty strengths we pre-registered a metric-health gate (Step 0 std_ratio), checking that the raw head outputs have healthy magnitude. It never cleared at any of the three lambda values: 12 readings fail, or in one case pass numerically but fail on inspection. The one nominal pass (phi_c of the combination model at lambda=0.10) shows two flat bands at a single angle on the scatter plot: a literal two-point collapse. The gate measures the magnitude of raw outputs, not their angular diversity. Verdict of record: UNINTERPRETABLE, not null, not counter-evidence. Steps 1-3 of the preregistration never ran because they were gated on Step 0. Source: preregistration_lam_retune.md, NOTES.md 2026-09-15/16.</a:t>
             </a:r>
-            <a:endParaRPr lang="en-US" dirty="0"/>
           </a:p>
         </p:txBody>
       </p:sp>
@@ -1091,7 +867,6 @@
               <a:rPr lang="en-US" dirty="0"/>
               <a:t>Because the gated route stayed uninterpretable, the null rests on four checks that do not depend on the gate, run uniformly on all four models without excluding any on interpretability grounds. We argue this is a legitimate substitute, but it was assembled after the pre-registered route failed, so it carries less confirmatory weight than a pre-registered test. Source: closing_summary.md, paper_summary.md.</a:t>
             </a:r>
-            <a:endParaRPr lang="en-US" dirty="0"/>
           </a:p>
         </p:txBody>
       </p:sp>
@@ -1179,7 +954,6 @@
               <a:rPr lang="en-US" dirty="0"/>
               <a:t>Bottom line, evidence-weighted: under the 2phi_c +/- 2psi degeneracy structure, on this architecture set, phi_c/psi information is not recoverable from strain by a regression network. 0 of 8 phi_c/psi bootstrap tests (4 models x 2 heads) are significant, with 10,000 shuffles; no band clears the 0.10 rad floor. Caveat labelled honestly: the substitute battery was assembled after the gated path failed. The gated path's own language (UNINTERPRETABLE) is left on the record unedited; it is superseded in practical confidence, not contradicted. Source: bootstrap_output, closing_summary.md.</a:t>
             </a:r>
-            <a:endParaRPr lang="en-US" dirty="0"/>
           </a:p>
         </p:txBody>
       </p:sp>
@@ -1267,7 +1041,6 @@
               <a:rPr lang="en-US" dirty="0"/>
               <a:t>cnn_attention shows genuine partial sky-localization skill: 12.58 degrees better than the shuffled null (z = +23.23 sigma), error falling monotonically across SNR terciles (80.15, 77.95, 74.47 degrees), while a predictor that always guesses the population-mean direction scores about 89.4 degrees. The other three models are small-but-real and sub-floor (about 2.9-3.4 degrees). The leading explanation is cross-detector H1/L1 amplitude-ratio information via the antenna pattern; that is INFERRED, consistent with the evidence, and has not been tested directly. Source: bootstrap_sky_separation.py, snr_stratification_sky_position.py.</a:t>
             </a:r>
-            <a:endParaRPr lang="en-US" dirty="0"/>
           </a:p>
         </p:txBody>
       </p:sp>
@@ -1355,7 +1128,6 @@
               <a:rPr lang="en-US" dirty="0"/>
               <a:t>Two findings from looking further than the main question required. (1) The inclination head, which had been used as a noise-floor calibration, is not clean noise: the bootstrap finds it significant but sub-floor in all four models (p &lt;= 0.022, effect about 0.02-0.04 rad), and the paper summary reads its predictions as clustering at a few preferred angles, a partial mode collapse whose severity tracks each model's phi_c/psi collapse, pointing to shared training dynamics rather than recoverable physics. Note the closing summary (2026-09-18) framed it as 'a small real sub-floor signal'; the later paper summary (2026-09-30) is the interpretation used here. (2) cnn_attention memorizes phi_c/psi in the training split without generalizing. Source: bootstrap_ang_mae.py, plot_certified_memorization.py.</a:t>
             </a:r>
-            <a:endParaRPr lang="en-US" dirty="0"/>
           </a:p>
         </p:txBody>
       </p:sp>
@@ -1443,7 +1215,6 @@
               <a:rPr lang="en-US" dirty="0"/>
               <a:t>This is the part we most want scrutinized. The null is established across configurations, not across seeds (all runs use seed 42; the dataset is unseeded). Two trunk families only; down-selection used positive-control R2 with no numeric threshold. poc_b's individual-head bootstrap numbers rest on ground-truth-assisted branch reconstruction (formulae_reference.md A.8), which does not change the verdict and is disclosed. The perturbation-trace probe failed its own positive control (mchirp reads AMBIGUOUS for all 4 models at the early stage) so 'final' was never run: parked, not closed. Unrun: synthetic-data ablation, high-SNR (25-30) validation set or Fisher-matrix bound, dataset regeneration from a version-controlled generator, joint (phi_c, psi) scatter. No independent adversarial review of the manuscript yet. Source: paper_summary.md, closing_summary.md.</a:t>
             </a:r>
-            <a:endParaRPr lang="en-US" dirty="0"/>
           </a:p>
         </p:txBody>
       </p:sp>
@@ -1531,7 +1302,6 @@
               <a:rPr lang="en-US" dirty="0"/>
               <a:t>Positioning: this does not reopen a settled question. Neural posterior estimation (VItamin, DINGO, DINGO-IS) represents degenerate targets correctly by construction. What the study documents is a practical hazard for point-estimate and hybrid pipelines still built on regression heads, and the diagnostic discipline needed to notice the failure. Open items are those not yet run or not yet mechanistically confirmed. Source: paper_summary.md, closing_summary.md.</a:t>
             </a:r>
-            <a:endParaRPr lang="en-US" dirty="0"/>
           </a:p>
         </p:txBody>
       </p:sp>
@@ -1619,7 +1389,6 @@
               <a:rPr lang="en-US" dirty="0"/>
               <a:t>Why these two angles: for the dominant quadrupole mode both phi_c and psi enter the strain doubled. Face-on, only 2phi_c +/- 2psi is constrained. A Bayesian sampler or neural posterior estimator can express that degeneracy as a ridge; a point-estimating regression head cannot. Source: paper_summary.md, The question.</a:t>
             </a:r>
-            <a:endParaRPr lang="en-US" dirty="0"/>
           </a:p>
         </p:txBody>
       </p:sp>
@@ -1707,7 +1476,6 @@
               <a:rPr lang="en-US" dirty="0"/>
               <a:t>Executive summary up front. Question: can a regression network recover phi_c and psi from two-detector strain, individually or through the better-conditioned 2phi_c +/- 2psi combinations? Approach: 25,000 training and 5,000 validation simulated events, four models from two trunks, two head parameterizations, a radial penalty at three strengths, with chirp mass, merger time and SNR as positive controls. Answer: a null; every configuration converges to the random-guess baseline while the controls are recovered. Also found: partial sky localization, a non-clean inclination head, and memorization in cnn_attention. Source: paper_summary.md, closing_summary.md.</a:t>
             </a:r>
-            <a:endParaRPr lang="en-US" dirty="0"/>
           </a:p>
         </p:txBody>
       </p:sp>
@@ -1795,7 +1563,6 @@
               <a:rPr lang="en-US" dirty="0"/>
               <a:t>Step 1.1 prerequisite check. The analytic study first confirmed the degeneracy structure: (R, delta) stays constant along 2phi_c + 2psi = const at face-on, to machine precision. The preference for the well-constrained combination falls from about 1.62-1.65x face-on to 1.04-1.07x edge-on, i.e. the degeneracy lifts only partially. Source: sweep_1_1_ratio_vs_iota.png/.csv, paper_summary.md.</a:t>
             </a:r>
-            <a:endParaRPr lang="en-US" dirty="0"/>
           </a:p>
         </p:txBody>
       </p:sp>
@@ -1883,7 +1650,6 @@
               <a:rPr lang="en-US" dirty="0"/>
               <a:t>Population: 25,000 train and 5,000 validation simulated events, IMRPhenomD dominant mode only, 2 s windows at 2048 Hz for H1 and L1. Periodic targets are regressed on the unit circle with a circular loss, so a random guess scores exactly 1; a constant prediction has angular MAE of pi/2 for phi_c and pi/4 for psi. Chirp mass, merger time and SNR serve as positive controls. Note the dataset is unseeded (documented limitation in NOTES.md). Source: paper_summary.md, What we did.</a:t>
             </a:r>
-            <a:endParaRPr lang="en-US" dirty="0"/>
           </a:p>
         </p:txBody>
       </p:sp>
@@ -1971,7 +1737,6 @@
               <a:rPr lang="en-US" dirty="0"/>
               <a:t>Round 1 screened five trunk architectures in seven configurations. All seven sat at the random-guessing level on phi_c and psi, so the screen could not discriminate on the target question. We down-selected on the positive controls instead, keeping the TCN and the attention model. There was no numeric threshold for that down-selection, and the three dropped trunks were never run through the full battery. Two head parameterizations (independent-angle baseline vs combination-space) and a radial penalty lambda at three strengths on the TCN models. Source: paper_summary.md, closing_summary.md addendum.</a:t>
             </a:r>
-            <a:endParaRPr lang="en-US" dirty="0"/>
           </a:p>
         </p:txBody>
       </p:sp>
@@ -2059,7 +1824,6 @@
               <a:rPr lang="en-US" dirty="0"/>
               <a:t>Health check across the four models and seven heads. Green: good. Yellow: marginal. XX: dead. COLLAPSE: mode collapse. The positive controls (mchirp R2 0.92-0.96, merger time 0.90-0.92, SNR 0.75-0.79) read healthy in every model; the same shared features give MAE around 1.55-1.59 rad (about pi/2, i.e. chance) on phi_c, and poc_a/poc_b collapse outright on psi/phi_c. Source: analysis_output/health_check_20261019_125442.png.</a:t>
             </a:r>
-            <a:endParaRPr lang="en-US" dirty="0"/>
           </a:p>
         </p:txBody>
       </p:sp>
@@ -2147,7 +1911,6 @@
               <a:rPr lang="en-US" dirty="0"/>
               <a:t>Predicted vs true psi for the four models, validation set. poc_a and poc_b are genuinely mode-collapsed: near-delta-function output regardless of input; poc_b has 99.9% of 5,000 validation predictions in one histogram bin. tcn and cnn_attention are not collapsed but spread over a narrow band and uninformative: a different failure with the same conclusion. Source: analysis_output/histogram_polarization_angle_20261019_125442.png, closing_summary.md.</a:t>
             </a:r>
-            <a:endParaRPr lang="en-US" dirty="0"/>
           </a:p>
         </p:txBody>
       </p:sp>
@@ -2235,7 +1998,6 @@
               <a:rPr lang="en-US" dirty="0"/>
               <a:t>Train vs validation circular loss for phi_c and psi (rows) across the four models (columns). Three models sit at the null (loss about 1.0) on both splits. cnn_attention drives its training loss down to about 0.55 while validation stays flat at about 1.0: memorization, invisible in every earlier number because the Round-1 summary only tracked validation loss. This is why its sky_position result needed an SNR-stratification check before being trusted. Source: diagnostic_output/redo_models_train_val_loss.png.</a:t>
             </a:r>
-            <a:endParaRPr lang="en-US" dirty="0"/>
           </a:p>
         </p:txBody>
       </p:sp>
@@ -2313,6 +2075,7 @@
         <a:solidFill>
           <a:schemeClr val="tx1"/>
         </a:solidFill>
+        <a:effectLst/>
       </p:bgPr>
     </p:bg>
     <p:spTree>
@@ -2332,9 +2095,11 @@
       <p:sp>
         <p:nvSpPr>
           <p:cNvPr id="2" name="Text 0"/>
-          <p:cNvSpPr/>
+          <p:cNvSpPr>
+            <a:spLocks noGrp="1"/>
+          </p:cNvSpPr>
           <p:nvPr>
-            <p:ph idx="100" type="title" hasCustomPrompt="1"/>
+            <p:ph type="title" idx="100" hasCustomPrompt="1"/>
           </p:nvPr>
         </p:nvSpPr>
         <p:spPr>
@@ -2351,7 +2116,7 @@
         <p:txBody>
           <a:bodyPr wrap="square" rtlCol="0"/>
           <a:lstStyle>
-            <a:lvl1pPr algn="l" indent="0" marL="0">
+            <a:lvl1pPr marL="0" indent="0" algn="l">
               <a:buNone/>
               <a:defRPr lang="en-US" sz="4000" b="1" dirty="0">
                 <a:solidFill>
@@ -2361,7 +2126,7 @@
             </a:lvl1pPr>
           </a:lstStyle>
           <a:p>
-            <a:pPr algn="l" indent="0" marL="0">
+            <a:pPr marL="0" indent="0" algn="l">
               <a:buNone/>
             </a:pPr>
             <a:endParaRPr lang="en-US" sz="4000" dirty="0"/>
@@ -2371,9 +2136,11 @@
       <p:sp>
         <p:nvSpPr>
           <p:cNvPr id="3" name="Text 0"/>
-          <p:cNvSpPr/>
+          <p:cNvSpPr>
+            <a:spLocks noGrp="1"/>
+          </p:cNvSpPr>
           <p:nvPr>
-            <p:ph idx="101" type="body" hasCustomPrompt="1"/>
+            <p:ph type="body" idx="101" hasCustomPrompt="1"/>
           </p:nvPr>
         </p:nvSpPr>
         <p:spPr>
@@ -2390,7 +2157,7 @@
         <p:txBody>
           <a:bodyPr wrap="square" rtlCol="0"/>
           <a:lstStyle>
-            <a:lvl1pPr algn="l" indent="0" marL="0">
+            <a:lvl1pPr marL="0" indent="0" algn="l">
               <a:buNone/>
               <a:defRPr lang="en-US" sz="2000" dirty="0">
                 <a:solidFill>
@@ -2400,7 +2167,7 @@
             </a:lvl1pPr>
           </a:lstStyle>
           <a:p>
-            <a:pPr algn="l" indent="0" marL="0">
+            <a:pPr marL="0" indent="0" algn="l">
               <a:buNone/>
             </a:pPr>
             <a:endParaRPr lang="en-US" sz="2000" dirty="0"/>
@@ -2423,6 +2190,7 @@
         <a:solidFill>
           <a:schemeClr val="bg1"/>
         </a:solidFill>
+        <a:effectLst/>
       </p:bgPr>
     </p:bg>
     <p:spTree>
@@ -2442,9 +2210,11 @@
       <p:sp>
         <p:nvSpPr>
           <p:cNvPr id="2" name="Text 0"/>
-          <p:cNvSpPr/>
+          <p:cNvSpPr>
+            <a:spLocks noGrp="1"/>
+          </p:cNvSpPr>
           <p:nvPr>
-            <p:ph idx="100" type="title" hasCustomPrompt="1"/>
+            <p:ph type="title" idx="100" hasCustomPrompt="1"/>
           </p:nvPr>
         </p:nvSpPr>
         <p:spPr>
@@ -2461,7 +2231,7 @@
         <p:txBody>
           <a:bodyPr wrap="square" rtlCol="0"/>
           <a:lstStyle>
-            <a:lvl1pPr algn="l" indent="0" marL="0">
+            <a:lvl1pPr marL="0" indent="0" algn="l">
               <a:buNone/>
               <a:defRPr lang="en-US" sz="3600" b="1" dirty="0">
                 <a:solidFill>
@@ -2471,7 +2241,7 @@
             </a:lvl1pPr>
           </a:lstStyle>
           <a:p>
-            <a:pPr algn="l" indent="0" marL="0">
+            <a:pPr marL="0" indent="0" algn="l">
               <a:buNone/>
             </a:pPr>
             <a:endParaRPr lang="en-US" sz="3600" dirty="0"/>
@@ -2498,7 +2268,7 @@
           </a:prstGeom>
           <a:extLst>
             <a:ext uri="{C572A759-6A51-4108-AA02-DFA0A04FC94B}">
-              <ma14:wrappingTextBoxFlag xmlns:ma14="http://schemas.microsoft.com/office/mac/drawingml/2011/main" val="0"/>
+              <ma14:wrappingTextBoxFlag xmlns:ma14="http://schemas.microsoft.com/office/mac/drawingml/2011/main" xmlns="" val="0"/>
             </a:ext>
           </a:extLst>
         </p:spPr>
@@ -2516,8 +2286,8 @@
           <a:p>
             <a:pPr algn="r"/>
             <a:fld id="{F7021451-1387-4CA6-816F-3879F97B5CBC}" type="slidenum">
-              <a:rPr b="0" lang="en-US"/>
-              <a:t>1003</a:t>
+              <a:rPr lang="en-US" b="0"/>
+              <a:t>‹#›</a:t>
             </a:fld>
             <a:endParaRPr lang="en-US"/>
           </a:p>
@@ -2539,6 +2309,7 @@
         <a:solidFill>
           <a:schemeClr val="tx1"/>
         </a:solidFill>
+        <a:effectLst/>
       </p:bgPr>
     </p:bg>
     <p:spTree>
@@ -2558,9 +2329,11 @@
       <p:sp>
         <p:nvSpPr>
           <p:cNvPr id="2" name="Text 0"/>
-          <p:cNvSpPr/>
+          <p:cNvSpPr>
+            <a:spLocks noGrp="1"/>
+          </p:cNvSpPr>
           <p:nvPr>
-            <p:ph idx="100" type="title" hasCustomPrompt="1"/>
+            <p:ph type="title" idx="100" hasCustomPrompt="1"/>
           </p:nvPr>
         </p:nvSpPr>
         <p:spPr>
@@ -2577,7 +2350,7 @@
         <p:txBody>
           <a:bodyPr wrap="square" rtlCol="0"/>
           <a:lstStyle>
-            <a:lvl1pPr algn="l" indent="0" marL="0">
+            <a:lvl1pPr marL="0" indent="0" algn="l">
               <a:buNone/>
               <a:defRPr lang="en-US" sz="3600" b="1" dirty="0">
                 <a:solidFill>
@@ -2587,7 +2360,7 @@
             </a:lvl1pPr>
           </a:lstStyle>
           <a:p>
-            <a:pPr algn="l" indent="0" marL="0">
+            <a:pPr marL="0" indent="0" algn="l">
               <a:buNone/>
             </a:pPr>
             <a:endParaRPr lang="en-US" sz="3600" dirty="0"/>
@@ -2614,7 +2387,7 @@
           </a:prstGeom>
           <a:extLst>
             <a:ext uri="{C572A759-6A51-4108-AA02-DFA0A04FC94B}">
-              <ma14:wrappingTextBoxFlag xmlns:ma14="http://schemas.microsoft.com/office/mac/drawingml/2011/main" val="0"/>
+              <ma14:wrappingTextBoxFlag xmlns:ma14="http://schemas.microsoft.com/office/mac/drawingml/2011/main" xmlns="" val="0"/>
             </a:ext>
           </a:extLst>
         </p:spPr>
@@ -2632,8 +2405,8 @@
           <a:p>
             <a:pPr algn="r"/>
             <a:fld id="{F7021451-1387-4CA6-816F-3879F97B5CBC}" type="slidenum">
-              <a:rPr b="0" lang="en-US"/>
-              <a:t>1004</a:t>
+              <a:rPr lang="en-US" b="0"/>
+              <a:t>‹#›</a:t>
             </a:fld>
             <a:endParaRPr lang="en-US"/>
           </a:p>
@@ -2650,6 +2423,11 @@
 <file path=ppt/slideMasters/slideMaster1.xml><?xml version="1.0" encoding="utf-8"?>
 <p:sldMaster xmlns:a="http://schemas.openxmlformats.org/drawingml/2006/main" xmlns:r="http://schemas.openxmlformats.org/officeDocument/2006/relationships" xmlns:p="http://schemas.openxmlformats.org/presentationml/2006/main">
   <p:cSld>
+    <p:bg>
+      <p:bgRef idx="1001">
+        <a:schemeClr val="bg1"/>
+      </p:bgRef>
+    </p:bg>
     <p:spTree>
       <p:nvGrpSpPr>
         <p:cNvPr id="1" name=""/>
@@ -2684,7 +2462,7 @@
           </a:prstGeom>
           <a:extLst>
             <a:ext uri="{C572A759-6A51-4108-AA02-DFA0A04FC94B}">
-              <ma14:wrappingTextBoxFlag xmlns:ma14="http://schemas.microsoft.com/office/mac/drawingml/2011/main" val="0"/>
+              <ma14:wrappingTextBoxFlag xmlns:ma14="http://schemas.microsoft.com/office/mac/drawingml/2011/main" xmlns="" val="0"/>
             </a:ext>
           </a:extLst>
         </p:spPr>
@@ -2702,8 +2480,8 @@
           <a:p>
             <a:pPr algn="r"/>
             <a:fld id="{F7021451-1387-4CA6-816F-3879F97B5CBC}" type="slidenum">
-              <a:rPr b="0" lang="en-US"/>
-              <a:t>null</a:t>
+              <a:rPr lang="en-US" b="0"/>
+              <a:t>‹#›</a:t>
             </a:fld>
             <a:endParaRPr lang="en-US"/>
           </a:p>
@@ -2992,9 +2770,11 @@
       <p:sp>
         <p:nvSpPr>
           <p:cNvPr id="3" name="Text 0"/>
-          <p:cNvSpPr/>
+          <p:cNvSpPr>
+            <a:spLocks noGrp="1"/>
+          </p:cNvSpPr>
           <p:nvPr>
-            <p:ph idx="100" type="title" hasCustomPrompt="1"/>
+            <p:ph type="title" idx="100" hasCustomPrompt="1"/>
           </p:nvPr>
         </p:nvSpPr>
         <p:spPr>
@@ -3012,7 +2792,7 @@
           <a:bodyPr wrap="square" lIns="0" tIns="0" rIns="0" bIns="0" rtlCol="0" anchor="t"/>
           <a:lstStyle/>
           <a:p>
-            <a:pPr algn="l" indent="0" marL="0">
+            <a:pPr marL="0" indent="0" algn="l">
               <a:buNone/>
             </a:pPr>
             <a:r>
@@ -3021,10 +2801,10 @@
                   <a:schemeClr val="bg1"/>
                 </a:solidFill>
               </a:rPr>
-              <a:t xml:space="preserve">Can a regression network recover </a:t>
-            </a:r>
-            <a:r>
-              <a:rPr i="1" lang="en-US" sz="4000" b="1" dirty="0">
+              <a:t>Can a regression network recover </a:t>
+            </a:r>
+            <a:r>
+              <a:rPr lang="en-US" sz="4000" b="1" i="1" dirty="0">
                 <a:solidFill>
                   <a:schemeClr val="bg1"/>
                 </a:solidFill>
@@ -3032,7 +2812,7 @@
               <a:t>φ</a:t>
             </a:r>
             <a:r>
-              <a:rPr baseline="-25000" lang="en-US" sz="4000" b="1" dirty="0">
+              <a:rPr lang="en-US" sz="4000" b="1" baseline="-25000" dirty="0">
                 <a:solidFill>
                   <a:schemeClr val="bg1"/>
                 </a:solidFill>
@@ -3045,10 +2825,10 @@
                   <a:schemeClr val="bg1"/>
                 </a:solidFill>
               </a:rPr>
-              <a:t xml:space="preserve"> and </a:t>
-            </a:r>
-            <a:r>
-              <a:rPr i="1" lang="en-US" sz="4000" b="1" dirty="0">
+              <a:t> and </a:t>
+            </a:r>
+            <a:r>
+              <a:rPr lang="en-US" sz="4000" b="1" i="1" dirty="0">
                 <a:solidFill>
                   <a:schemeClr val="bg1"/>
                 </a:solidFill>
@@ -3061,7 +2841,7 @@
                   <a:schemeClr val="bg1"/>
                 </a:solidFill>
               </a:rPr>
-              <a:t xml:space="preserve"> from gravitational-wave strain?</a:t>
+              <a:t> from gravitational-wave strain?</a:t>
             </a:r>
             <a:endParaRPr lang="en-US" sz="4000" dirty="0"/>
           </a:p>
@@ -3070,9 +2850,11 @@
       <p:sp>
         <p:nvSpPr>
           <p:cNvPr id="4" name="Text 0"/>
-          <p:cNvSpPr/>
+          <p:cNvSpPr>
+            <a:spLocks noGrp="1"/>
+          </p:cNvSpPr>
           <p:nvPr>
-            <p:ph idx="101" type="body" hasCustomPrompt="1"/>
+            <p:ph type="body" idx="101" hasCustomPrompt="1"/>
           </p:nvPr>
         </p:nvSpPr>
         <p:spPr>
@@ -3090,7 +2872,7 @@
           <a:bodyPr wrap="square" lIns="0" tIns="0" rIns="0" bIns="0" rtlCol="0" anchor="t"/>
           <a:lstStyle/>
           <a:p>
-            <a:pPr algn="l" indent="0" marL="0">
+            <a:pPr marL="0" indent="0" algn="l">
               <a:buNone/>
             </a:pPr>
             <a:r>
@@ -3102,7 +2884,7 @@
               <a:t>A systematically verified null result on the 2</a:t>
             </a:r>
             <a:r>
-              <a:rPr i="1" lang="en-US" sz="2000" dirty="0">
+              <a:rPr lang="en-US" sz="2000" i="1" dirty="0">
                 <a:solidFill>
                   <a:schemeClr val="bg2"/>
                 </a:solidFill>
@@ -3110,7 +2892,7 @@
               <a:t>φ</a:t>
             </a:r>
             <a:r>
-              <a:rPr baseline="-25000" lang="en-US" sz="2000" dirty="0">
+              <a:rPr lang="en-US" sz="2000" baseline="-25000" dirty="0">
                 <a:solidFill>
                   <a:schemeClr val="bg2"/>
                 </a:solidFill>
@@ -3123,10 +2905,10 @@
                   <a:schemeClr val="bg2"/>
                 </a:solidFill>
               </a:rPr>
-              <a:t xml:space="preserve"> ± 2</a:t>
-            </a:r>
-            <a:r>
-              <a:rPr i="1" lang="en-US" sz="2000" dirty="0">
+              <a:t> ± 2</a:t>
+            </a:r>
+            <a:r>
+              <a:rPr lang="en-US" sz="2000" i="1" dirty="0">
                 <a:solidFill>
                   <a:schemeClr val="bg2"/>
                 </a:solidFill>
@@ -3139,7 +2921,7 @@
                   <a:schemeClr val="bg2"/>
                 </a:solidFill>
               </a:rPr>
-              <a:t xml:space="preserve"> degeneracy</a:t>
+              <a:t> degeneracy</a:t>
             </a:r>
             <a:endParaRPr lang="en-US" sz="2000" dirty="0"/>
           </a:p>
@@ -3166,7 +2948,7 @@
           <a:bodyPr wrap="square" lIns="0" tIns="0" rIns="0" bIns="0" rtlCol="0" anchor="t"/>
           <a:lstStyle/>
           <a:p>
-            <a:pPr indent="0" marL="0">
+            <a:pPr marL="0" indent="0">
               <a:buNone/>
             </a:pPr>
             <a:r>
@@ -3263,9 +3045,11 @@
       <p:sp>
         <p:nvSpPr>
           <p:cNvPr id="3" name="Text 0"/>
-          <p:cNvSpPr/>
+          <p:cNvSpPr>
+            <a:spLocks noGrp="1"/>
+          </p:cNvSpPr>
           <p:nvPr>
-            <p:ph idx="100" type="title" hasCustomPrompt="1"/>
+            <p:ph type="title" idx="100" hasCustomPrompt="1"/>
           </p:nvPr>
         </p:nvSpPr>
         <p:spPr>
@@ -3283,7 +3067,7 @@
           <a:bodyPr wrap="square" lIns="0" tIns="0" rIns="0" bIns="0" rtlCol="0" anchor="t"/>
           <a:lstStyle/>
           <a:p>
-            <a:pPr algn="l" indent="0" marL="0">
+            <a:pPr marL="0" indent="0" algn="l">
               <a:buNone/>
             </a:pPr>
             <a:r>
@@ -3319,7 +3103,7 @@
           <a:bodyPr wrap="square" lIns="0" tIns="0" rIns="0" bIns="0" rtlCol="0" anchor="t"/>
           <a:lstStyle/>
           <a:p>
-            <a:pPr indent="0" marL="0">
+            <a:pPr marL="0" indent="0">
               <a:buNone/>
             </a:pPr>
             <a:r>
@@ -3328,7 +3112,15 @@
                   <a:schemeClr val="bg2"/>
                 </a:solidFill>
               </a:rPr>
-              <a:t xml:space="preserve">Step 0: do </a:t>
+              <a:t>Step 0: do POC</a:t>
+            </a:r>
+            <a:r>
+              <a:rPr lang="en-US" sz="1800" baseline="-25000" dirty="0">
+                <a:solidFill>
+                  <a:schemeClr val="bg2"/>
+                </a:solidFill>
+              </a:rPr>
+              <a:t>B</a:t>
             </a:r>
             <a:r>
               <a:rPr lang="en-US" sz="1800" dirty="0">
@@ -3336,15 +3128,23 @@
                   <a:schemeClr val="bg2"/>
                 </a:solidFill>
               </a:rPr>
-              <a:t>POC</a:t>
-            </a:r>
-            <a:r>
-              <a:rPr baseline="-25000" lang="en-US" sz="1800" dirty="0">
+              <a:t>'s 2</a:t>
+            </a:r>
+            <a:r>
+              <a:rPr lang="en-US" sz="1800" i="1" dirty="0">
                 <a:solidFill>
                   <a:schemeClr val="bg2"/>
                 </a:solidFill>
               </a:rPr>
-              <a:t>B</a:t>
+              <a:t>φ</a:t>
+            </a:r>
+            <a:r>
+              <a:rPr lang="en-US" sz="1800" baseline="-25000" dirty="0">
+                <a:solidFill>
+                  <a:schemeClr val="bg2"/>
+                </a:solidFill>
+              </a:rPr>
+              <a:t>c</a:t>
             </a:r>
             <a:r>
               <a:rPr lang="en-US" sz="1800" dirty="0">
@@ -3352,18 +3152,34 @@
                   <a:schemeClr val="bg2"/>
                 </a:solidFill>
               </a:rPr>
-              <a:t>'s 2</a:t>
-            </a:r>
-            <a:r>
-              <a:rPr i="1" lang="en-US" sz="1800" dirty="0">
+              <a:t> + 2</a:t>
+            </a:r>
+            <a:r>
+              <a:rPr lang="en-US" sz="1800" i="1" dirty="0">
                 <a:solidFill>
                   <a:schemeClr val="bg2"/>
                 </a:solidFill>
               </a:rPr>
+              <a:t>ψ</a:t>
+            </a:r>
+            <a:r>
+              <a:rPr lang="en-US" sz="1800" dirty="0">
+                <a:solidFill>
+                  <a:schemeClr val="bg2"/>
+                </a:solidFill>
+              </a:rPr>
+              <a:t> / 2</a:t>
+            </a:r>
+            <a:r>
+              <a:rPr lang="en-US" sz="1800" i="1" dirty="0">
+                <a:solidFill>
+                  <a:schemeClr val="bg2"/>
+                </a:solidFill>
+              </a:rPr>
               <a:t>φ</a:t>
             </a:r>
             <a:r>
-              <a:rPr baseline="-25000" lang="en-US" sz="1800" dirty="0">
+              <a:rPr lang="en-US" sz="1800" baseline="-25000" dirty="0">
                 <a:solidFill>
                   <a:schemeClr val="bg2"/>
                 </a:solidFill>
@@ -3376,10 +3192,10 @@
                   <a:schemeClr val="bg2"/>
                 </a:solidFill>
               </a:rPr>
-              <a:t xml:space="preserve"> + 2</a:t>
-            </a:r>
-            <a:r>
-              <a:rPr i="1" lang="en-US" sz="1800" dirty="0">
+              <a:t> − 2</a:t>
+            </a:r>
+            <a:r>
+              <a:rPr lang="en-US" sz="1800" i="1" dirty="0">
                 <a:solidFill>
                   <a:schemeClr val="bg2"/>
                 </a:solidFill>
@@ -3392,47 +3208,7 @@
                   <a:schemeClr val="bg2"/>
                 </a:solidFill>
               </a:rPr>
-              <a:t xml:space="preserve"> / 2</a:t>
-            </a:r>
-            <a:r>
-              <a:rPr i="1" lang="en-US" sz="1800" dirty="0">
-                <a:solidFill>
-                  <a:schemeClr val="bg2"/>
-                </a:solidFill>
-              </a:rPr>
-              <a:t>φ</a:t>
-            </a:r>
-            <a:r>
-              <a:rPr baseline="-25000" lang="en-US" sz="1800" dirty="0">
-                <a:solidFill>
-                  <a:schemeClr val="bg2"/>
-                </a:solidFill>
-              </a:rPr>
-              <a:t>c</a:t>
-            </a:r>
-            <a:r>
-              <a:rPr lang="en-US" sz="1800" dirty="0">
-                <a:solidFill>
-                  <a:schemeClr val="bg2"/>
-                </a:solidFill>
-              </a:rPr>
-              <a:t xml:space="preserve"> − 2</a:t>
-            </a:r>
-            <a:r>
-              <a:rPr i="1" lang="en-US" sz="1800" dirty="0">
-                <a:solidFill>
-                  <a:schemeClr val="bg2"/>
-                </a:solidFill>
-              </a:rPr>
-              <a:t>ψ</a:t>
-            </a:r>
-            <a:r>
-              <a:rPr lang="en-US" sz="1800" dirty="0">
-                <a:solidFill>
-                  <a:schemeClr val="bg2"/>
-                </a:solidFill>
-              </a:rPr>
-              <a:t xml:space="preserve"> outputs keep a healthy magnitude (std_ratio) after the penalty?</a:t>
+              <a:t> outputs keep a healthy magnitude (std_ratio) after the penalty?</a:t>
             </a:r>
             <a:endParaRPr lang="en-US" sz="1800" dirty="0"/>
           </a:p>
@@ -3464,7 +3240,7 @@
             <a:prstDash val="solid"/>
           </a:ln>
           <a:effectLst>
-            <a:outerShdw sx="100000" sy="100000" kx="0" ky="0" algn="bl" rotWithShape="0" blurRad="101600" dist="25400" dir="5400000">
+            <a:outerShdw blurRad="101600" dist="25400" dir="5400000" algn="bl" rotWithShape="0">
               <a:srgbClr val="0F1B33">
                 <a:alpha val="12000"/>
               </a:srgbClr>
@@ -3493,11 +3269,11 @@
           <a:bodyPr wrap="square" lIns="0" tIns="0" rIns="0" bIns="0" rtlCol="0" anchor="t"/>
           <a:lstStyle/>
           <a:p>
-            <a:pPr indent="0" marL="0">
+            <a:pPr marL="0" indent="0">
               <a:buNone/>
             </a:pPr>
             <a:r>
-              <a:rPr i="1" lang="en-US" sz="1400" b="1" dirty="0">
+              <a:rPr lang="en-US" sz="1400" b="1" i="1" dirty="0">
                 <a:solidFill>
                   <a:schemeClr val="accent1"/>
                 </a:solidFill>
@@ -3510,7 +3286,7 @@
                   <a:schemeClr val="accent1"/>
                 </a:solidFill>
               </a:rPr>
-              <a:t xml:space="preserve"> = 0.01</a:t>
+              <a:t> = 0.01</a:t>
             </a:r>
             <a:endParaRPr lang="en-US" sz="1400" dirty="0"/>
           </a:p>
@@ -3537,7 +3313,7 @@
           <a:bodyPr wrap="square" lIns="0" tIns="0" rIns="0" bIns="0" rtlCol="0" anchor="t"/>
           <a:lstStyle/>
           <a:p>
-            <a:pPr indent="0" marL="0">
+            <a:pPr marL="0" indent="0">
               <a:buNone/>
             </a:pPr>
             <a:r>
@@ -3576,7 +3352,7 @@
           <a:bodyPr wrap="square" lIns="0" tIns="0" rIns="0" bIns="0" rtlCol="0" anchor="t"/>
           <a:lstStyle/>
           <a:p>
-            <a:pPr indent="0" marL="0">
+            <a:pPr marL="0" indent="0">
               <a:buNone/>
             </a:pPr>
             <a:r>
@@ -3617,7 +3393,7 @@
             <a:prstDash val="solid"/>
           </a:ln>
           <a:effectLst>
-            <a:outerShdw sx="100000" sy="100000" kx="0" ky="0" algn="bl" rotWithShape="0" blurRad="101600" dist="25400" dir="5400000">
+            <a:outerShdw blurRad="101600" dist="25400" dir="5400000" algn="bl" rotWithShape="0">
               <a:srgbClr val="0F1B33">
                 <a:alpha val="12000"/>
               </a:srgbClr>
@@ -3646,11 +3422,11 @@
           <a:bodyPr wrap="square" lIns="0" tIns="0" rIns="0" bIns="0" rtlCol="0" anchor="t"/>
           <a:lstStyle/>
           <a:p>
-            <a:pPr indent="0" marL="0">
+            <a:pPr marL="0" indent="0">
               <a:buNone/>
             </a:pPr>
             <a:r>
-              <a:rPr i="1" lang="en-US" sz="1400" b="1" dirty="0">
+              <a:rPr lang="en-US" sz="1400" b="1" i="1" dirty="0">
                 <a:solidFill>
                   <a:schemeClr val="accent1"/>
                 </a:solidFill>
@@ -3663,7 +3439,7 @@
                   <a:schemeClr val="accent1"/>
                 </a:solidFill>
               </a:rPr>
-              <a:t xml:space="preserve"> = 0.05</a:t>
+              <a:t> = 0.05</a:t>
             </a:r>
             <a:endParaRPr lang="en-US" sz="1400" dirty="0"/>
           </a:p>
@@ -3690,7 +3466,7 @@
           <a:bodyPr wrap="square" lIns="0" tIns="0" rIns="0" bIns="0" rtlCol="0" anchor="t"/>
           <a:lstStyle/>
           <a:p>
-            <a:pPr indent="0" marL="0">
+            <a:pPr marL="0" indent="0">
               <a:buNone/>
             </a:pPr>
             <a:r>
@@ -3729,7 +3505,7 @@
           <a:bodyPr wrap="square" lIns="0" tIns="0" rIns="0" bIns="0" rtlCol="0" anchor="t"/>
           <a:lstStyle/>
           <a:p>
-            <a:pPr indent="0" marL="0">
+            <a:pPr marL="0" indent="0">
               <a:buNone/>
             </a:pPr>
             <a:r>
@@ -3770,7 +3546,7 @@
             <a:prstDash val="solid"/>
           </a:ln>
           <a:effectLst>
-            <a:outerShdw sx="100000" sy="100000" kx="0" ky="0" algn="bl" rotWithShape="0" blurRad="101600" dist="25400" dir="5400000">
+            <a:outerShdw blurRad="101600" dist="25400" dir="5400000" algn="bl" rotWithShape="0">
               <a:srgbClr val="0F1B33">
                 <a:alpha val="12000"/>
               </a:srgbClr>
@@ -3799,11 +3575,11 @@
           <a:bodyPr wrap="square" lIns="0" tIns="0" rIns="0" bIns="0" rtlCol="0" anchor="t"/>
           <a:lstStyle/>
           <a:p>
-            <a:pPr indent="0" marL="0">
+            <a:pPr marL="0" indent="0">
               <a:buNone/>
             </a:pPr>
             <a:r>
-              <a:rPr i="1" lang="en-US" sz="1400" b="1" dirty="0">
+              <a:rPr lang="en-US" sz="1400" b="1" i="1" dirty="0">
                 <a:solidFill>
                   <a:schemeClr val="accent1"/>
                 </a:solidFill>
@@ -3816,7 +3592,7 @@
                   <a:schemeClr val="accent1"/>
                 </a:solidFill>
               </a:rPr>
-              <a:t xml:space="preserve"> = 0.10</a:t>
+              <a:t> = 0.10</a:t>
             </a:r>
             <a:endParaRPr lang="en-US" sz="1400" dirty="0"/>
           </a:p>
@@ -3843,7 +3619,7 @@
           <a:bodyPr wrap="square" lIns="0" tIns="0" rIns="0" bIns="0" rtlCol="0" anchor="t"/>
           <a:lstStyle/>
           <a:p>
-            <a:pPr indent="0" marL="0">
+            <a:pPr marL="0" indent="0">
               <a:buNone/>
             </a:pPr>
             <a:r>
@@ -3882,7 +3658,7 @@
           <a:bodyPr wrap="square" lIns="0" tIns="0" rIns="0" bIns="0" rtlCol="0" anchor="t"/>
           <a:lstStyle/>
           <a:p>
-            <a:pPr indent="0" marL="0">
+            <a:pPr marL="0" indent="0">
               <a:buNone/>
             </a:pPr>
             <a:r>
@@ -3923,7 +3699,7 @@
             <a:prstDash val="solid"/>
           </a:ln>
           <a:effectLst>
-            <a:outerShdw sx="100000" sy="100000" kx="0" ky="0" algn="bl" rotWithShape="0" blurRad="101600" dist="25400" dir="5400000">
+            <a:outerShdw blurRad="101600" dist="25400" dir="5400000" algn="bl" rotWithShape="0">
               <a:srgbClr val="0F1B33">
                 <a:alpha val="12000"/>
               </a:srgbClr>
@@ -3952,7 +3728,7 @@
           <a:bodyPr wrap="square" lIns="0" tIns="0" rIns="0" bIns="0" rtlCol="0" anchor="ctr"/>
           <a:lstStyle/>
           <a:p>
-            <a:pPr indent="0" marL="0">
+            <a:pPr marL="0" indent="0">
               <a:spcAft>
                 <a:spcPts val="800"/>
               </a:spcAft>
@@ -3972,7 +3748,7 @@
             <a:endParaRPr lang="en-US" sz="1600" dirty="0"/>
           </a:p>
           <a:p>
-            <a:pPr indent="0" marL="0">
+            <a:pPr marL="0" indent="0">
               <a:buNone/>
             </a:pPr>
             <a:r>
@@ -3984,42 +3760,6 @@
               <a:t>Not a null, and not counter-evidence. The gate measures the magnitude of raw outputs, not their angular diversity, so a mode-collapsed constant output can pass it. Passing an interpretability gate is not proof that the property it stands for holds.</a:t>
             </a:r>
             <a:endParaRPr lang="en-US" sz="1600" dirty="0"/>
-          </a:p>
-        </p:txBody>
-      </p:sp>
-      <p:sp>
-        <p:nvSpPr>
-          <p:cNvPr id="19" name="source"/>
-          <p:cNvSpPr txBox="1"/>
-          <p:nvPr/>
-        </p:nvSpPr>
-        <p:spPr>
-          <a:xfrm>
-            <a:off x="548640" y="6400800"/>
-            <a:ext cx="10424160" cy="274320"/>
-          </a:xfrm>
-          <a:prstGeom prst="rect">
-            <a:avLst/>
-          </a:prstGeom>
-          <a:noFill/>
-          <a:ln/>
-        </p:spPr>
-        <p:txBody>
-          <a:bodyPr wrap="square" lIns="0" tIns="0" rIns="0" bIns="0" rtlCol="0" anchor="t"/>
-          <a:lstStyle/>
-          <a:p>
-            <a:pPr indent="0" marL="0">
-              <a:buNone/>
-            </a:pPr>
-            <a:r>
-              <a:rPr lang="en-US" sz="1000" dirty="0">
-                <a:solidFill>
-                  <a:schemeClr val="bg2"/>
-                </a:solidFill>
-              </a:rPr>
-              <a:t>Source: preregistration_lam_retune.md; NOTES.md (2026-09-15/16)</a:t>
-            </a:r>
-            <a:endParaRPr lang="en-US" sz="1000" dirty="0"/>
           </a:p>
         </p:txBody>
       </p:sp>
@@ -4043,7 +3783,7 @@
           </a:prstGeom>
           <a:extLst>
             <a:ext uri="{C572A759-6A51-4108-AA02-DFA0A04FC94B}">
-              <ma14:wrappingTextBoxFlag xmlns:ma14="http://schemas.microsoft.com/office/mac/drawingml/2011/main" val="0"/>
+              <ma14:wrappingTextBoxFlag xmlns:ma14="http://schemas.microsoft.com/office/mac/drawingml/2011/main" xmlns="" val="0"/>
             </a:ext>
           </a:extLst>
         </p:spPr>
@@ -4061,7 +3801,7 @@
           <a:p>
             <a:pPr algn="r"/>
             <a:fld id="{F7021451-1387-4CA6-816F-3879F97B5CBC}" type="slidenum">
-              <a:rPr b="0" lang="en-US"/>
+              <a:rPr lang="en-US" b="0"/>
               <a:t>10</a:t>
             </a:fld>
             <a:endParaRPr lang="en-US"/>
@@ -4096,9 +3836,11 @@
       <p:sp>
         <p:nvSpPr>
           <p:cNvPr id="3" name="Text 0"/>
-          <p:cNvSpPr/>
+          <p:cNvSpPr>
+            <a:spLocks noGrp="1"/>
+          </p:cNvSpPr>
           <p:nvPr>
-            <p:ph idx="100" type="title" hasCustomPrompt="1"/>
+            <p:ph type="title" idx="100" hasCustomPrompt="1"/>
           </p:nvPr>
         </p:nvSpPr>
         <p:spPr>
@@ -4116,7 +3858,7 @@
           <a:bodyPr wrap="square" lIns="0" tIns="0" rIns="0" bIns="0" rtlCol="0" anchor="t"/>
           <a:lstStyle/>
           <a:p>
-            <a:pPr algn="l" indent="0" marL="0">
+            <a:pPr marL="0" indent="0" algn="l">
               <a:buNone/>
             </a:pPr>
             <a:r>
@@ -4157,7 +3899,7 @@
             <a:prstDash val="solid"/>
           </a:ln>
           <a:effectLst>
-            <a:outerShdw sx="100000" sy="100000" kx="0" ky="0" algn="bl" rotWithShape="0" blurRad="101600" dist="25400" dir="5400000">
+            <a:outerShdw blurRad="101600" dist="25400" dir="5400000" algn="bl" rotWithShape="0">
               <a:srgbClr val="0F1B33">
                 <a:alpha val="12000"/>
               </a:srgbClr>
@@ -4211,7 +3953,7 @@
           <a:bodyPr wrap="square" lIns="0" tIns="0" rIns="0" bIns="0" rtlCol="0" anchor="ctr"/>
           <a:lstStyle/>
           <a:p>
-            <a:pPr algn="ctr" indent="0" marL="0">
+            <a:pPr marL="0" indent="0" algn="ctr">
               <a:buNone/>
             </a:pPr>
             <a:r>
@@ -4247,7 +3989,7 @@
           <a:bodyPr wrap="square" lIns="0" tIns="0" rIns="0" bIns="0" rtlCol="0" anchor="ctr"/>
           <a:lstStyle/>
           <a:p>
-            <a:pPr indent="0" marL="0">
+            <a:pPr marL="0" indent="0">
               <a:buNone/>
             </a:pPr>
             <a:r>
@@ -4286,7 +4028,7 @@
           <a:bodyPr wrap="square" lIns="0" tIns="0" rIns="0" bIns="0" rtlCol="0" anchor="t"/>
           <a:lstStyle/>
           <a:p>
-            <a:pPr indent="0" marL="0">
+            <a:pPr marL="0" indent="0">
               <a:buNone/>
             </a:pPr>
             <a:r>
@@ -4322,7 +4064,7 @@
           <a:bodyPr wrap="square" lIns="0" tIns="0" rIns="0" bIns="0" rtlCol="0" anchor="t"/>
           <a:lstStyle/>
           <a:p>
-            <a:pPr indent="0" marL="0">
+            <a:pPr marL="0" indent="0">
               <a:buNone/>
             </a:pPr>
             <a:r>
@@ -4342,7 +4084,7 @@
               <a:t>POC</a:t>
             </a:r>
             <a:r>
-              <a:rPr baseline="-25000" lang="en-US" sz="1400" dirty="0">
+              <a:rPr lang="en-US" sz="1400" baseline="-25000" dirty="0">
                 <a:solidFill>
                   <a:schemeClr val="tx1"/>
                 </a:solidFill>
@@ -4355,7 +4097,15 @@
                   <a:schemeClr val="tx1"/>
                 </a:solidFill>
               </a:rPr>
-              <a:t xml:space="preserve"> and </a:t>
+              <a:t> and POC</a:t>
+            </a:r>
+            <a:r>
+              <a:rPr lang="en-US" sz="1400" baseline="-25000" dirty="0">
+                <a:solidFill>
+                  <a:schemeClr val="tx1"/>
+                </a:solidFill>
+              </a:rPr>
+              <a:t>B</a:t>
             </a:r>
             <a:r>
               <a:rPr lang="en-US" sz="1400" dirty="0">
@@ -4363,15 +4113,15 @@
                   <a:schemeClr val="tx1"/>
                 </a:solidFill>
               </a:rPr>
-              <a:t>POC</a:t>
-            </a:r>
-            <a:r>
-              <a:rPr baseline="-25000" lang="en-US" sz="1400" dirty="0">
-                <a:solidFill>
-                  <a:schemeClr val="tx1"/>
-                </a:solidFill>
-              </a:rPr>
-              <a:t>B</a:t>
+              <a:t> mode-collapse; TCN and CNN</a:t>
+            </a:r>
+            <a:r>
+              <a:rPr lang="en-US" sz="1400" baseline="-25000" dirty="0">
+                <a:solidFill>
+                  <a:schemeClr val="tx1"/>
+                </a:solidFill>
+              </a:rPr>
+              <a:t>attention</a:t>
             </a:r>
             <a:r>
               <a:rPr lang="en-US" sz="1400" dirty="0">
@@ -4379,47 +4129,7 @@
                   <a:schemeClr val="tx1"/>
                 </a:solidFill>
               </a:rPr>
-              <a:t xml:space="preserve"> mode-collapse; </a:t>
-            </a:r>
-            <a:r>
-              <a:rPr lang="en-US" sz="1400" dirty="0">
-                <a:solidFill>
-                  <a:schemeClr val="tx1"/>
-                </a:solidFill>
-              </a:rPr>
-              <a:t>TCN</a:t>
-            </a:r>
-            <a:r>
-              <a:rPr lang="en-US" sz="1400" dirty="0">
-                <a:solidFill>
-                  <a:schemeClr val="tx1"/>
-                </a:solidFill>
-              </a:rPr>
-              <a:t xml:space="preserve"> and </a:t>
-            </a:r>
-            <a:r>
-              <a:rPr lang="en-US" sz="1400" dirty="0">
-                <a:solidFill>
-                  <a:schemeClr val="tx1"/>
-                </a:solidFill>
-              </a:rPr>
-              <a:t>CNN</a:t>
-            </a:r>
-            <a:r>
-              <a:rPr baseline="-25000" lang="en-US" sz="1400" dirty="0">
-                <a:solidFill>
-                  <a:schemeClr val="tx1"/>
-                </a:solidFill>
-              </a:rPr>
-              <a:t>attention</a:t>
-            </a:r>
-            <a:r>
-              <a:rPr lang="en-US" sz="1400" dirty="0">
-                <a:solidFill>
-                  <a:schemeClr val="tx1"/>
-                </a:solidFill>
-              </a:rPr>
-              <a:t xml:space="preserve"> are noisy.</a:t>
+              <a:t> are noisy.</a:t>
             </a:r>
             <a:endParaRPr lang="en-US" sz="1400" dirty="0"/>
           </a:p>
@@ -4451,7 +4161,7 @@
             <a:prstDash val="solid"/>
           </a:ln>
           <a:effectLst>
-            <a:outerShdw sx="100000" sy="100000" kx="0" ky="0" algn="bl" rotWithShape="0" blurRad="101600" dist="25400" dir="5400000">
+            <a:outerShdw blurRad="101600" dist="25400" dir="5400000" algn="bl" rotWithShape="0">
               <a:srgbClr val="0F1B33">
                 <a:alpha val="12000"/>
               </a:srgbClr>
@@ -4505,7 +4215,7 @@
           <a:bodyPr wrap="square" lIns="0" tIns="0" rIns="0" bIns="0" rtlCol="0" anchor="ctr"/>
           <a:lstStyle/>
           <a:p>
-            <a:pPr algn="ctr" indent="0" marL="0">
+            <a:pPr marL="0" indent="0" algn="ctr">
               <a:buNone/>
             </a:pPr>
             <a:r>
@@ -4541,7 +4251,7 @@
           <a:bodyPr wrap="square" lIns="0" tIns="0" rIns="0" bIns="0" rtlCol="0" anchor="ctr"/>
           <a:lstStyle/>
           <a:p>
-            <a:pPr indent="0" marL="0">
+            <a:pPr marL="0" indent="0">
               <a:buNone/>
             </a:pPr>
             <a:r>
@@ -4580,7 +4290,7 @@
           <a:bodyPr wrap="square" lIns="0" tIns="0" rIns="0" bIns="0" rtlCol="0" anchor="t"/>
           <a:lstStyle/>
           <a:p>
-            <a:pPr indent="0" marL="0">
+            <a:pPr marL="0" indent="0">
               <a:buNone/>
             </a:pPr>
             <a:r>
@@ -4616,7 +4326,7 @@
           <a:bodyPr wrap="square" lIns="0" tIns="0" rIns="0" bIns="0" rtlCol="0" anchor="t"/>
           <a:lstStyle/>
           <a:p>
-            <a:pPr indent="0" marL="0">
+            <a:pPr marL="0" indent="0">
               <a:buNone/>
             </a:pPr>
             <a:r>
@@ -4665,7 +4375,7 @@
             <a:prstDash val="solid"/>
           </a:ln>
           <a:effectLst>
-            <a:outerShdw sx="100000" sy="100000" kx="0" ky="0" algn="bl" rotWithShape="0" blurRad="101600" dist="25400" dir="5400000">
+            <a:outerShdw blurRad="101600" dist="25400" dir="5400000" algn="bl" rotWithShape="0">
               <a:srgbClr val="0F1B33">
                 <a:alpha val="12000"/>
               </a:srgbClr>
@@ -4719,7 +4429,7 @@
           <a:bodyPr wrap="square" lIns="0" tIns="0" rIns="0" bIns="0" rtlCol="0" anchor="ctr"/>
           <a:lstStyle/>
           <a:p>
-            <a:pPr algn="ctr" indent="0" marL="0">
+            <a:pPr marL="0" indent="0" algn="ctr">
               <a:buNone/>
             </a:pPr>
             <a:r>
@@ -4755,7 +4465,7 @@
           <a:bodyPr wrap="square" lIns="0" tIns="0" rIns="0" bIns="0" rtlCol="0" anchor="ctr"/>
           <a:lstStyle/>
           <a:p>
-            <a:pPr indent="0" marL="0">
+            <a:pPr marL="0" indent="0">
               <a:buNone/>
             </a:pPr>
             <a:r>
@@ -4794,7 +4504,7 @@
           <a:bodyPr wrap="square" lIns="0" tIns="0" rIns="0" bIns="0" rtlCol="0" anchor="t"/>
           <a:lstStyle/>
           <a:p>
-            <a:pPr indent="0" marL="0">
+            <a:pPr marL="0" indent="0">
               <a:buNone/>
             </a:pPr>
             <a:r>
@@ -4830,7 +4540,7 @@
           <a:bodyPr wrap="square" lIns="0" tIns="0" rIns="0" bIns="0" rtlCol="0" anchor="t"/>
           <a:lstStyle/>
           <a:p>
-            <a:pPr indent="0" marL="0">
+            <a:pPr marL="0" indent="0">
               <a:buNone/>
             </a:pPr>
             <a:r>
@@ -4847,10 +4557,10 @@
                   <a:schemeClr val="tx1"/>
                 </a:solidFill>
               </a:rPr>
-              <a:t xml:space="preserve">No </a:t>
-            </a:r>
-            <a:r>
-              <a:rPr i="1" lang="en-US" sz="1400" dirty="0">
+              <a:t>No </a:t>
+            </a:r>
+            <a:r>
+              <a:rPr lang="en-US" sz="1400" i="1" dirty="0">
                 <a:solidFill>
                   <a:schemeClr val="tx1"/>
                 </a:solidFill>
@@ -4858,7 +4568,7 @@
               <a:t>φ</a:t>
             </a:r>
             <a:r>
-              <a:rPr baseline="-25000" lang="en-US" sz="1400" dirty="0">
+              <a:rPr lang="en-US" sz="1400" baseline="-25000" dirty="0">
                 <a:solidFill>
                   <a:schemeClr val="tx1"/>
                 </a:solidFill>
@@ -4874,7 +4584,7 @@
               <a:t>/</a:t>
             </a:r>
             <a:r>
-              <a:rPr i="1" lang="en-US" sz="1400" dirty="0">
+              <a:rPr lang="en-US" sz="1400" i="1" dirty="0">
                 <a:solidFill>
                   <a:schemeClr val="tx1"/>
                 </a:solidFill>
@@ -4887,7 +4597,7 @@
                   <a:schemeClr val="tx1"/>
                 </a:solidFill>
               </a:rPr>
-              <a:t xml:space="preserve"> test is significant; most are on the wrong side of chance.</a:t>
+              <a:t> test is significant; most are on the wrong side of chance.</a:t>
             </a:r>
             <a:endParaRPr lang="en-US" sz="1400" dirty="0"/>
           </a:p>
@@ -4919,7 +4629,7 @@
             <a:prstDash val="solid"/>
           </a:ln>
           <a:effectLst>
-            <a:outerShdw sx="100000" sy="100000" kx="0" ky="0" algn="bl" rotWithShape="0" blurRad="101600" dist="25400" dir="5400000">
+            <a:outerShdw blurRad="101600" dist="25400" dir="5400000" algn="bl" rotWithShape="0">
               <a:srgbClr val="0F1B33">
                 <a:alpha val="12000"/>
               </a:srgbClr>
@@ -4973,7 +4683,7 @@
           <a:bodyPr wrap="square" lIns="0" tIns="0" rIns="0" bIns="0" rtlCol="0" anchor="ctr"/>
           <a:lstStyle/>
           <a:p>
-            <a:pPr algn="ctr" indent="0" marL="0">
+            <a:pPr marL="0" indent="0" algn="ctr">
               <a:buNone/>
             </a:pPr>
             <a:r>
@@ -5009,7 +4719,7 @@
           <a:bodyPr wrap="square" lIns="0" tIns="0" rIns="0" bIns="0" rtlCol="0" anchor="ctr"/>
           <a:lstStyle/>
           <a:p>
-            <a:pPr indent="0" marL="0">
+            <a:pPr marL="0" indent="0">
               <a:buNone/>
             </a:pPr>
             <a:r>
@@ -5048,7 +4758,7 @@
           <a:bodyPr wrap="square" lIns="0" tIns="0" rIns="0" bIns="0" rtlCol="0" anchor="t"/>
           <a:lstStyle/>
           <a:p>
-            <a:pPr indent="0" marL="0">
+            <a:pPr marL="0" indent="0">
               <a:buNone/>
             </a:pPr>
             <a:r>
@@ -5084,7 +4794,7 @@
           <a:bodyPr wrap="square" lIns="0" tIns="0" rIns="0" bIns="0" rtlCol="0" anchor="t"/>
           <a:lstStyle/>
           <a:p>
-            <a:pPr indent="0" marL="0">
+            <a:pPr marL="0" indent="0">
               <a:buNone/>
             </a:pPr>
             <a:r>
@@ -5109,43 +4819,7 @@
       </p:sp>
       <p:sp>
         <p:nvSpPr>
-          <p:cNvPr id="28" name="source"/>
-          <p:cNvSpPr txBox="1"/>
-          <p:nvPr/>
-        </p:nvSpPr>
-        <p:spPr>
-          <a:xfrm>
-            <a:off x="548640" y="6400800"/>
-            <a:ext cx="10424160" cy="274320"/>
-          </a:xfrm>
-          <a:prstGeom prst="rect">
-            <a:avLst/>
-          </a:prstGeom>
-          <a:noFill/>
-          <a:ln/>
-        </p:spPr>
-        <p:txBody>
-          <a:bodyPr wrap="square" lIns="0" tIns="0" rIns="0" bIns="0" rtlCol="0" anchor="t"/>
-          <a:lstStyle/>
-          <a:p>
-            <a:pPr indent="0" marL="0">
-              <a:buNone/>
-            </a:pPr>
-            <a:r>
-              <a:rPr lang="en-US" sz="1000" dirty="0">
-                <a:solidFill>
-                  <a:schemeClr val="accent5"/>
-                </a:solidFill>
-              </a:rPr>
-              <a:t>Source: analyse_predictions.py, diagnostic_checks.py, bootstrap_ang_mae.py, snr_/inclination_stratification.py</a:t>
-            </a:r>
-            <a:endParaRPr lang="en-US" sz="1000" dirty="0"/>
-          </a:p>
-        </p:txBody>
-      </p:sp>
-      <p:sp>
-        <p:nvSpPr>
-          <p:cNvPr id="25" name="Slide Number Placeholder 0"/>
+          <p:cNvPr id="2" name="Slide Number Placeholder 0"/>
           <p:cNvSpPr>
             <a:spLocks noGrp="1"/>
           </p:cNvSpPr>
@@ -5163,7 +4837,7 @@
           </a:prstGeom>
           <a:extLst>
             <a:ext uri="{C572A759-6A51-4108-AA02-DFA0A04FC94B}">
-              <ma14:wrappingTextBoxFlag xmlns:ma14="http://schemas.microsoft.com/office/mac/drawingml/2011/main" val="0"/>
+              <ma14:wrappingTextBoxFlag xmlns:ma14="http://schemas.microsoft.com/office/mac/drawingml/2011/main" xmlns="" val="0"/>
             </a:ext>
           </a:extLst>
         </p:spPr>
@@ -5181,7 +4855,7 @@
           <a:p>
             <a:pPr algn="r"/>
             <a:fld id="{F7021451-1387-4CA6-816F-3879F97B5CBC}" type="slidenum">
-              <a:rPr b="0" lang="en-US"/>
+              <a:rPr lang="en-US" b="0"/>
               <a:t>11</a:t>
             </a:fld>
             <a:endParaRPr lang="en-US"/>
@@ -5216,9 +4890,11 @@
       <p:sp>
         <p:nvSpPr>
           <p:cNvPr id="3" name="Text 0"/>
-          <p:cNvSpPr/>
+          <p:cNvSpPr>
+            <a:spLocks noGrp="1"/>
+          </p:cNvSpPr>
           <p:nvPr>
-            <p:ph idx="100" type="title" hasCustomPrompt="1"/>
+            <p:ph type="title" idx="100" hasCustomPrompt="1"/>
           </p:nvPr>
         </p:nvSpPr>
         <p:spPr>
@@ -5236,7 +4912,7 @@
           <a:bodyPr wrap="square" lIns="0" tIns="0" rIns="0" bIns="0" rtlCol="0" anchor="t"/>
           <a:lstStyle/>
           <a:p>
-            <a:pPr algn="l" indent="0" marL="0">
+            <a:pPr marL="0" indent="0" algn="l">
               <a:buNone/>
             </a:pPr>
             <a:r>
@@ -5277,7 +4953,7 @@
             <a:prstDash val="solid"/>
           </a:ln>
           <a:effectLst>
-            <a:outerShdw sx="100000" sy="100000" kx="0" ky="0" algn="bl" rotWithShape="0" blurRad="101600" dist="25400" dir="5400000">
+            <a:outerShdw blurRad="101600" dist="25400" dir="5400000" algn="bl" rotWithShape="0">
               <a:srgbClr val="0F1B33">
                 <a:alpha val="12000"/>
               </a:srgbClr>
@@ -5306,7 +4982,7 @@
           <a:bodyPr wrap="square" lIns="0" tIns="0" rIns="0" bIns="0" rtlCol="0" anchor="t"/>
           <a:lstStyle/>
           <a:p>
-            <a:pPr indent="0" marL="0">
+            <a:pPr marL="0" indent="0">
               <a:buNone/>
             </a:pPr>
             <a:r>
@@ -5345,11 +5021,11 @@
           <a:bodyPr wrap="square" lIns="0" tIns="0" rIns="0" bIns="0" rtlCol="0" anchor="t"/>
           <a:lstStyle/>
           <a:p>
-            <a:pPr indent="0" marL="0">
+            <a:pPr marL="0" indent="0">
               <a:buNone/>
             </a:pPr>
             <a:r>
-              <a:rPr i="1" lang="en-US" sz="1400" dirty="0">
+              <a:rPr lang="en-US" sz="1400" i="1" dirty="0">
                 <a:solidFill>
                   <a:schemeClr val="tx1"/>
                 </a:solidFill>
@@ -5357,7 +5033,7 @@
               <a:t>φ</a:t>
             </a:r>
             <a:r>
-              <a:rPr baseline="-25000" lang="en-US" sz="1400" dirty="0">
+              <a:rPr lang="en-US" sz="1400" baseline="-25000" dirty="0">
                 <a:solidFill>
                   <a:schemeClr val="tx1"/>
                 </a:solidFill>
@@ -5370,10 +5046,10 @@
                   <a:schemeClr val="tx1"/>
                 </a:solidFill>
               </a:rPr>
-              <a:t xml:space="preserve"> and </a:t>
-            </a:r>
-            <a:r>
-              <a:rPr i="1" lang="en-US" sz="1400" dirty="0">
+              <a:t> and </a:t>
+            </a:r>
+            <a:r>
+              <a:rPr lang="en-US" sz="1400" i="1" dirty="0">
                 <a:solidFill>
                   <a:schemeClr val="tx1"/>
                 </a:solidFill>
@@ -5386,7 +5062,7 @@
                   <a:schemeClr val="tx1"/>
                 </a:solidFill>
               </a:rPr>
-              <a:t xml:space="preserve"> bootstrap tests significant (4 models × 2 heads)</a:t>
+              <a:t> bootstrap tests significant (4 models × 2 heads)</a:t>
             </a:r>
             <a:endParaRPr lang="en-US" sz="1400" dirty="0"/>
           </a:p>
@@ -5418,7 +5094,7 @@
             <a:prstDash val="solid"/>
           </a:ln>
           <a:effectLst>
-            <a:outerShdw sx="100000" sy="100000" kx="0" ky="0" algn="bl" rotWithShape="0" blurRad="101600" dist="25400" dir="5400000">
+            <a:outerShdw blurRad="101600" dist="25400" dir="5400000" algn="bl" rotWithShape="0">
               <a:srgbClr val="0F1B33">
                 <a:alpha val="12000"/>
               </a:srgbClr>
@@ -5447,7 +5123,7 @@
           <a:bodyPr wrap="square" lIns="0" tIns="0" rIns="0" bIns="0" rtlCol="0" anchor="t"/>
           <a:lstStyle/>
           <a:p>
-            <a:pPr indent="0" marL="0">
+            <a:pPr marL="0" indent="0">
               <a:buNone/>
             </a:pPr>
             <a:r>
@@ -5486,7 +5162,7 @@
           <a:bodyPr wrap="square" lIns="0" tIns="0" rIns="0" bIns="0" rtlCol="0" anchor="t"/>
           <a:lstStyle/>
           <a:p>
-            <a:pPr indent="0" marL="0">
+            <a:pPr marL="0" indent="0">
               <a:buNone/>
             </a:pPr>
             <a:r>
@@ -5527,7 +5203,7 @@
             <a:prstDash val="solid"/>
           </a:ln>
           <a:effectLst>
-            <a:outerShdw sx="100000" sy="100000" kx="0" ky="0" algn="bl" rotWithShape="0" blurRad="101600" dist="25400" dir="5400000">
+            <a:outerShdw blurRad="101600" dist="25400" dir="5400000" algn="bl" rotWithShape="0">
               <a:srgbClr val="0F1B33">
                 <a:alpha val="12000"/>
               </a:srgbClr>
@@ -5556,7 +5232,7 @@
           <a:bodyPr wrap="square" lIns="0" tIns="0" rIns="0" bIns="0" rtlCol="0" anchor="t"/>
           <a:lstStyle/>
           <a:p>
-            <a:pPr indent="0" marL="0">
+            <a:pPr marL="0" indent="0">
               <a:buNone/>
             </a:pPr>
             <a:r>
@@ -5595,7 +5271,7 @@
           <a:bodyPr wrap="square" lIns="0" tIns="0" rIns="0" bIns="0" rtlCol="0" anchor="t"/>
           <a:lstStyle/>
           <a:p>
-            <a:pPr indent="0" marL="0">
+            <a:pPr marL="0" indent="0">
               <a:buNone/>
             </a:pPr>
             <a:r>
@@ -5636,7 +5312,7 @@
             <a:prstDash val="solid"/>
           </a:ln>
           <a:effectLst>
-            <a:outerShdw sx="100000" sy="100000" kx="0" ky="0" algn="bl" rotWithShape="0" blurRad="101600" dist="25400" dir="5400000">
+            <a:outerShdw blurRad="101600" dist="25400" dir="5400000" algn="bl" rotWithShape="0">
               <a:srgbClr val="0F1B33">
                 <a:alpha val="12000"/>
               </a:srgbClr>
@@ -5665,7 +5341,7 @@
           <a:bodyPr wrap="square" lIns="0" tIns="0" rIns="0" bIns="0" rtlCol="0" anchor="t"/>
           <a:lstStyle/>
           <a:p>
-            <a:pPr indent="0" marL="0">
+            <a:pPr marL="0" indent="0">
               <a:buNone/>
             </a:pPr>
             <a:r>
@@ -5704,7 +5380,7 @@
           <a:bodyPr wrap="square" lIns="0" tIns="0" rIns="0" bIns="0" rtlCol="0" anchor="t"/>
           <a:lstStyle/>
           <a:p>
-            <a:pPr indent="0" marL="0">
+            <a:pPr marL="0" indent="0">
               <a:buNone/>
             </a:pPr>
             <a:r>
@@ -5745,7 +5421,7 @@
             <a:prstDash val="solid"/>
           </a:ln>
           <a:effectLst>
-            <a:outerShdw sx="100000" sy="100000" kx="0" ky="0" algn="bl" rotWithShape="0" blurRad="101600" dist="25400" dir="5400000">
+            <a:outerShdw blurRad="101600" dist="25400" dir="5400000" algn="bl" rotWithShape="0">
               <a:srgbClr val="0F1B33">
                 <a:alpha val="12000"/>
               </a:srgbClr>
@@ -5774,7 +5450,7 @@
           <a:bodyPr wrap="square" lIns="0" tIns="0" rIns="0" bIns="0" rtlCol="0" anchor="t"/>
           <a:lstStyle/>
           <a:p>
-            <a:pPr indent="0" marL="0">
+            <a:pPr marL="0" indent="0">
               <a:buNone/>
             </a:pPr>
             <a:r>
@@ -5810,7 +5486,7 @@
           <a:bodyPr wrap="square" lIns="0" tIns="0" rIns="0" bIns="0" rtlCol="0" anchor="t"/>
           <a:lstStyle/>
           <a:p>
-            <a:pPr indent="0" marL="0">
+            <a:pPr marL="0" indent="0">
               <a:buNone/>
             </a:pPr>
             <a:r>
@@ -5822,10 +5498,10 @@
                 <a:ea typeface="Cambria" pitchFamily="34" charset="-122"/>
                 <a:cs typeface="Cambria" pitchFamily="34" charset="-120"/>
               </a:rPr>
-              <a:t xml:space="preserve">On this architecture set, </a:t>
-            </a:r>
-            <a:r>
-              <a:rPr i="1" lang="en-US" sz="2000" b="1" dirty="0">
+              <a:t>On this architecture set, </a:t>
+            </a:r>
+            <a:r>
+              <a:rPr lang="en-US" sz="2000" b="1" i="1" dirty="0">
                 <a:solidFill>
                   <a:schemeClr val="bg1"/>
                 </a:solidFill>
@@ -5836,7 +5512,7 @@
               <a:t>φ</a:t>
             </a:r>
             <a:r>
-              <a:rPr baseline="-25000" lang="en-US" sz="2000" b="1" dirty="0">
+              <a:rPr lang="en-US" sz="2000" b="1" baseline="-25000" dirty="0">
                 <a:solidFill>
                   <a:schemeClr val="bg1"/>
                 </a:solidFill>
@@ -5855,10 +5531,10 @@
                 <a:ea typeface="Cambria" pitchFamily="34" charset="-122"/>
                 <a:cs typeface="Cambria" pitchFamily="34" charset="-120"/>
               </a:rPr>
-              <a:t xml:space="preserve"> and </a:t>
-            </a:r>
-            <a:r>
-              <a:rPr i="1" lang="en-US" sz="2000" b="1" dirty="0">
+              <a:t> and </a:t>
+            </a:r>
+            <a:r>
+              <a:rPr lang="en-US" sz="2000" b="1" i="1" dirty="0">
                 <a:solidFill>
                   <a:schemeClr val="bg1"/>
                 </a:solidFill>
@@ -5877,10 +5553,10 @@
                 <a:ea typeface="Cambria" pitchFamily="34" charset="-122"/>
                 <a:cs typeface="Cambria" pitchFamily="34" charset="-120"/>
               </a:rPr>
-              <a:t xml:space="preserve"> are not recoverable from strain by a regression network, individually or through 2</a:t>
-            </a:r>
-            <a:r>
-              <a:rPr i="1" lang="en-US" sz="2000" b="1" dirty="0">
+              <a:t> are not recoverable from strain by a regression network, individually or through 2</a:t>
+            </a:r>
+            <a:r>
+              <a:rPr lang="en-US" sz="2000" b="1" i="1" dirty="0">
                 <a:solidFill>
                   <a:schemeClr val="bg1"/>
                 </a:solidFill>
@@ -5891,7 +5567,7 @@
               <a:t>φ</a:t>
             </a:r>
             <a:r>
-              <a:rPr baseline="-25000" lang="en-US" sz="2000" b="1" dirty="0">
+              <a:rPr lang="en-US" sz="2000" b="1" baseline="-25000" dirty="0">
                 <a:solidFill>
                   <a:schemeClr val="bg1"/>
                 </a:solidFill>
@@ -5910,10 +5586,10 @@
                 <a:ea typeface="Cambria" pitchFamily="34" charset="-122"/>
                 <a:cs typeface="Cambria" pitchFamily="34" charset="-120"/>
               </a:rPr>
-              <a:t xml:space="preserve"> ± 2</a:t>
-            </a:r>
-            <a:r>
-              <a:rPr i="1" lang="en-US" sz="2000" b="1" dirty="0">
+              <a:t> ± 2</a:t>
+            </a:r>
+            <a:r>
+              <a:rPr lang="en-US" sz="2000" b="1" i="1" dirty="0">
                 <a:solidFill>
                   <a:schemeClr val="bg1"/>
                 </a:solidFill>
@@ -5959,7 +5635,7 @@
           <a:bodyPr wrap="square" lIns="0" tIns="0" rIns="0" bIns="0" rtlCol="0" anchor="t"/>
           <a:lstStyle/>
           <a:p>
-            <a:pPr indent="0" marL="0">
+            <a:pPr marL="0" indent="0">
               <a:buNone/>
             </a:pPr>
             <a:r>
@@ -5971,42 +5647,6 @@
               <a:t>A well-evidenced null, not an implementation artifact: the gradient chain is healthy end to end. It rests on four checks assembled after the gated route failed, so it carries less confirmatory weight than a pre-registered test.</a:t>
             </a:r>
             <a:endParaRPr lang="en-US" sz="1400" dirty="0"/>
-          </a:p>
-        </p:txBody>
-      </p:sp>
-      <p:sp>
-        <p:nvSpPr>
-          <p:cNvPr id="20" name="source"/>
-          <p:cNvSpPr txBox="1"/>
-          <p:nvPr/>
-        </p:nvSpPr>
-        <p:spPr>
-          <a:xfrm>
-            <a:off x="548640" y="6400800"/>
-            <a:ext cx="10424160" cy="274320"/>
-          </a:xfrm>
-          <a:prstGeom prst="rect">
-            <a:avLst/>
-          </a:prstGeom>
-          <a:noFill/>
-          <a:ln/>
-        </p:spPr>
-        <p:txBody>
-          <a:bodyPr wrap="square" lIns="0" tIns="0" rIns="0" bIns="0" rtlCol="0" anchor="t"/>
-          <a:lstStyle/>
-          <a:p>
-            <a:pPr indent="0" marL="0">
-              <a:buNone/>
-            </a:pPr>
-            <a:r>
-              <a:rPr lang="en-US" sz="1000" dirty="0">
-                <a:solidFill>
-                  <a:schemeClr val="accent5"/>
-                </a:solidFill>
-              </a:rPr>
-              <a:t>Source: bootstrap_output/; closing_summary.md; paper_summary.md</a:t>
-            </a:r>
-            <a:endParaRPr lang="en-US" sz="1000" dirty="0"/>
           </a:p>
         </p:txBody>
       </p:sp>
@@ -6030,7 +5670,7 @@
           </a:prstGeom>
           <a:extLst>
             <a:ext uri="{C572A759-6A51-4108-AA02-DFA0A04FC94B}">
-              <ma14:wrappingTextBoxFlag xmlns:ma14="http://schemas.microsoft.com/office/mac/drawingml/2011/main" val="0"/>
+              <ma14:wrappingTextBoxFlag xmlns:ma14="http://schemas.microsoft.com/office/mac/drawingml/2011/main" xmlns="" val="0"/>
             </a:ext>
           </a:extLst>
         </p:spPr>
@@ -6048,7 +5688,7 @@
           <a:p>
             <a:pPr algn="r"/>
             <a:fld id="{F7021451-1387-4CA6-816F-3879F97B5CBC}" type="slidenum">
-              <a:rPr b="0" lang="en-US"/>
+              <a:rPr lang="en-US" b="0"/>
               <a:t>12</a:t>
             </a:fld>
             <a:endParaRPr lang="en-US"/>
@@ -6083,9 +5723,11 @@
       <p:sp>
         <p:nvSpPr>
           <p:cNvPr id="3" name="Text 0"/>
-          <p:cNvSpPr/>
+          <p:cNvSpPr>
+            <a:spLocks noGrp="1"/>
+          </p:cNvSpPr>
           <p:nvPr>
-            <p:ph idx="100" type="title" hasCustomPrompt="1"/>
+            <p:ph type="title" idx="100" hasCustomPrompt="1"/>
           </p:nvPr>
         </p:nvSpPr>
         <p:spPr>
@@ -6103,7 +5745,7 @@
           <a:bodyPr wrap="square" lIns="0" tIns="0" rIns="0" bIns="0" rtlCol="0" anchor="t"/>
           <a:lstStyle/>
           <a:p>
-            <a:pPr algn="l" indent="0" marL="0">
+            <a:pPr marL="0" indent="0" algn="l">
               <a:buNone/>
             </a:pPr>
             <a:r>
@@ -6120,7 +5762,7 @@
       </p:sp>
       <p:graphicFrame>
         <p:nvGraphicFramePr>
-          <p:cNvPr id="4" name="Chart 0" descr=""/>
+          <p:cNvPr id="4" name="Chart 0"/>
           <p:cNvGraphicFramePr/>
           <p:nvPr/>
         </p:nvGraphicFramePr>
@@ -6128,9 +5770,9 @@
           <a:off x="548640" y="1280160"/>
           <a:ext cx="6766560" cy="4754880"/>
         </p:xfrm>
-        <a:graphic xmlns:a="http://schemas.openxmlformats.org/drawingml/2006/main">
+        <a:graphic>
           <a:graphicData uri="http://schemas.openxmlformats.org/drawingml/2006/chart">
-            <c:chart xmlns:c="http://schemas.openxmlformats.org/drawingml/2006/chart" r:id="rId1"/>
+            <c:chart xmlns:c="http://schemas.openxmlformats.org/drawingml/2006/chart" xmlns:r="http://schemas.openxmlformats.org/officeDocument/2006/relationships" r:id="rId3"/>
           </a:graphicData>
         </a:graphic>
       </p:graphicFrame>
@@ -6155,7 +5797,7 @@
           <a:bodyPr wrap="square" lIns="0" tIns="0" rIns="0" bIns="0" rtlCol="0" anchor="t"/>
           <a:lstStyle/>
           <a:p>
-            <a:pPr indent="0" marL="0">
+            <a:pPr marL="0" indent="0">
               <a:buNone/>
             </a:pPr>
             <a:r>
@@ -6194,7 +5836,7 @@
           <a:bodyPr wrap="square" lIns="0" tIns="0" rIns="0" bIns="0" rtlCol="0" anchor="t"/>
           <a:lstStyle/>
           <a:p>
-            <a:pPr indent="0" marL="0">
+            <a:pPr marL="0" indent="0">
               <a:buNone/>
             </a:pPr>
             <a:r>
@@ -6206,7 +5848,7 @@
               <a:t>better than the shuffled null (</a:t>
             </a:r>
             <a:r>
-              <a:rPr i="1" lang="en-US" sz="1400" dirty="0">
+              <a:rPr lang="en-US" sz="1400" i="1" dirty="0">
                 <a:solidFill>
                   <a:schemeClr val="tx1"/>
                 </a:solidFill>
@@ -6219,7 +5861,7 @@
                   <a:schemeClr val="tx1"/>
                 </a:solidFill>
               </a:rPr>
-              <a:t xml:space="preserve"> = +23.2σ); clears the 0.10 rad floor</a:t>
+              <a:t> = +23.2σ); clears the 0.10 rad floor</a:t>
             </a:r>
             <a:endParaRPr lang="en-US" sz="1400" dirty="0"/>
           </a:p>
@@ -6251,7 +5893,7 @@
             <a:prstDash val="solid"/>
           </a:ln>
           <a:effectLst>
-            <a:outerShdw sx="100000" sy="100000" kx="0" ky="0" algn="bl" rotWithShape="0" blurRad="101600" dist="25400" dir="5400000">
+            <a:outerShdw blurRad="101600" dist="25400" dir="5400000" algn="bl" rotWithShape="0">
               <a:srgbClr val="0F1B33">
                 <a:alpha val="12000"/>
               </a:srgbClr>
@@ -6332,42 +5974,6 @@
               <a:t>Inferred, untested: cross-detector H1/L1 amplitude ratio via antenna pattern</a:t>
             </a:r>
             <a:endParaRPr lang="en-US" sz="1400" dirty="0"/>
-          </a:p>
-        </p:txBody>
-      </p:sp>
-      <p:sp>
-        <p:nvSpPr>
-          <p:cNvPr id="9" name="source"/>
-          <p:cNvSpPr txBox="1"/>
-          <p:nvPr/>
-        </p:nvSpPr>
-        <p:spPr>
-          <a:xfrm>
-            <a:off x="548640" y="6400800"/>
-            <a:ext cx="10424160" cy="274320"/>
-          </a:xfrm>
-          <a:prstGeom prst="rect">
-            <a:avLst/>
-          </a:prstGeom>
-          <a:noFill/>
-          <a:ln/>
-        </p:spPr>
-        <p:txBody>
-          <a:bodyPr wrap="square" lIns="0" tIns="0" rIns="0" bIns="0" rtlCol="0" anchor="t"/>
-          <a:lstStyle/>
-          <a:p>
-            <a:pPr indent="0" marL="0">
-              <a:buNone/>
-            </a:pPr>
-            <a:r>
-              <a:rPr lang="en-US" sz="1000" dirty="0">
-                <a:solidFill>
-                  <a:schemeClr val="accent5"/>
-                </a:solidFill>
-              </a:rPr>
-              <a:t>Source: bootstrap_sky_separation.py; snr_stratification_sky_position.py; closing_summary.md</a:t>
-            </a:r>
-            <a:endParaRPr lang="en-US" sz="1000" dirty="0"/>
           </a:p>
         </p:txBody>
       </p:sp>
@@ -6391,7 +5997,7 @@
           </a:prstGeom>
           <a:extLst>
             <a:ext uri="{C572A759-6A51-4108-AA02-DFA0A04FC94B}">
-              <ma14:wrappingTextBoxFlag xmlns:ma14="http://schemas.microsoft.com/office/mac/drawingml/2011/main" val="0"/>
+              <ma14:wrappingTextBoxFlag xmlns:ma14="http://schemas.microsoft.com/office/mac/drawingml/2011/main" xmlns="" val="0"/>
             </a:ext>
           </a:extLst>
         </p:spPr>
@@ -6409,7 +6015,7 @@
           <a:p>
             <a:pPr algn="r"/>
             <a:fld id="{F7021451-1387-4CA6-816F-3879F97B5CBC}" type="slidenum">
-              <a:rPr b="0" lang="en-US"/>
+              <a:rPr lang="en-US" b="0"/>
               <a:t>13</a:t>
             </a:fld>
             <a:endParaRPr lang="en-US"/>
@@ -6444,9 +6050,11 @@
       <p:sp>
         <p:nvSpPr>
           <p:cNvPr id="3" name="Text 0"/>
-          <p:cNvSpPr/>
+          <p:cNvSpPr>
+            <a:spLocks noGrp="1"/>
+          </p:cNvSpPr>
           <p:nvPr>
-            <p:ph idx="100" type="title" hasCustomPrompt="1"/>
+            <p:ph type="title" idx="100" hasCustomPrompt="1"/>
           </p:nvPr>
         </p:nvSpPr>
         <p:spPr>
@@ -6464,7 +6072,7 @@
           <a:bodyPr wrap="square" lIns="0" tIns="0" rIns="0" bIns="0" rtlCol="0" anchor="t"/>
           <a:lstStyle/>
           <a:p>
-            <a:pPr algn="l" indent="0" marL="0">
+            <a:pPr marL="0" indent="0" algn="l">
               <a:buNone/>
             </a:pPr>
             <a:r>
@@ -6505,7 +6113,7 @@
             <a:prstDash val="solid"/>
           </a:ln>
           <a:effectLst>
-            <a:outerShdw sx="100000" sy="100000" kx="0" ky="0" algn="bl" rotWithShape="0" blurRad="101600" dist="25400" dir="5400000">
+            <a:outerShdw blurRad="101600" dist="25400" dir="5400000" algn="bl" rotWithShape="0">
               <a:srgbClr val="0F1B33">
                 <a:alpha val="12000"/>
               </a:srgbClr>
@@ -6534,7 +6142,7 @@
           <a:bodyPr wrap="square" lIns="0" tIns="0" rIns="0" bIns="0" rtlCol="0" anchor="t"/>
           <a:lstStyle/>
           <a:p>
-            <a:pPr indent="0" marL="0">
+            <a:pPr marL="0" indent="0">
               <a:buNone/>
             </a:pPr>
             <a:r>
@@ -6570,7 +6178,7 @@
           <a:bodyPr wrap="square" lIns="0" tIns="0" rIns="0" bIns="0" rtlCol="0" anchor="t"/>
           <a:lstStyle/>
           <a:p>
-            <a:pPr indent="0" marL="0">
+            <a:pPr marL="0" indent="0">
               <a:buNone/>
             </a:pPr>
             <a:r>
@@ -6609,7 +6217,7 @@
           <a:bodyPr wrap="square" lIns="0" tIns="0" rIns="0" bIns="0" rtlCol="0" anchor="t"/>
           <a:lstStyle/>
           <a:p>
-            <a:pPr indent="0" marL="0">
+            <a:pPr marL="0" indent="0">
               <a:buNone/>
             </a:pPr>
             <a:r>
@@ -6676,10 +6284,10 @@
                   <a:schemeClr val="tx1"/>
                 </a:solidFill>
               </a:rPr>
-              <a:t xml:space="preserve">Its severity tracks each model's </a:t>
-            </a:r>
-            <a:r>
-              <a:rPr i="1" lang="en-US" sz="1400" dirty="0">
+              <a:t>Its severity tracks each model's </a:t>
+            </a:r>
+            <a:r>
+              <a:rPr lang="en-US" sz="1400" i="1" dirty="0">
                 <a:solidFill>
                   <a:schemeClr val="tx1"/>
                 </a:solidFill>
@@ -6687,7 +6295,7 @@
               <a:t>φ</a:t>
             </a:r>
             <a:r>
-              <a:rPr baseline="-25000" lang="en-US" sz="1400" dirty="0">
+              <a:rPr lang="en-US" sz="1400" baseline="-25000" dirty="0">
                 <a:solidFill>
                   <a:schemeClr val="tx1"/>
                 </a:solidFill>
@@ -6703,7 +6311,7 @@
               <a:t>/</a:t>
             </a:r>
             <a:r>
-              <a:rPr i="1" lang="en-US" sz="1400" dirty="0">
+              <a:rPr lang="en-US" sz="1400" i="1" dirty="0">
                 <a:solidFill>
                   <a:schemeClr val="tx1"/>
                 </a:solidFill>
@@ -6716,7 +6324,7 @@
                   <a:schemeClr val="tx1"/>
                 </a:solidFill>
               </a:rPr>
-              <a:t xml:space="preserve"> collapse, pointing to shared training dynamics rather than recoverable physics</a:t>
+              <a:t> collapse, pointing to shared training dynamics rather than recoverable physics</a:t>
             </a:r>
             <a:endParaRPr lang="en-US" sz="1400" dirty="0"/>
           </a:p>
@@ -6748,7 +6356,7 @@
             <a:prstDash val="solid"/>
           </a:ln>
           <a:effectLst>
-            <a:outerShdw sx="100000" sy="100000" kx="0" ky="0" algn="bl" rotWithShape="0" blurRad="101600" dist="25400" dir="5400000">
+            <a:outerShdw blurRad="101600" dist="25400" dir="5400000" algn="bl" rotWithShape="0">
               <a:srgbClr val="0F1B33">
                 <a:alpha val="12000"/>
               </a:srgbClr>
@@ -6777,7 +6385,7 @@
           <a:bodyPr wrap="square" lIns="0" tIns="0" rIns="0" bIns="0" rtlCol="0" anchor="t"/>
           <a:lstStyle/>
           <a:p>
-            <a:pPr indent="0" marL="0">
+            <a:pPr marL="0" indent="0">
               <a:buNone/>
             </a:pPr>
             <a:r>
@@ -6786,10 +6394,10 @@
                   <a:schemeClr val="accent5"/>
                 </a:solidFill>
               </a:rPr>
-              <a:t xml:space="preserve">CNN_ATTENTION MEMORIZES </a:t>
-            </a:r>
-            <a:r>
-              <a:rPr i="1" lang="en-US" sz="1400" b="1" dirty="0">
+              <a:t>CNN_ATTENTION MEMORIZES </a:t>
+            </a:r>
+            <a:r>
+              <a:rPr lang="en-US" sz="1400" b="1" i="1" dirty="0">
                 <a:solidFill>
                   <a:schemeClr val="accent5"/>
                 </a:solidFill>
@@ -6797,7 +6405,7 @@
               <a:t>φ</a:t>
             </a:r>
             <a:r>
-              <a:rPr baseline="-25000" lang="en-US" sz="1400" b="1" dirty="0">
+              <a:rPr lang="en-US" sz="1400" b="1" baseline="-25000" dirty="0">
                 <a:solidFill>
                   <a:schemeClr val="accent5"/>
                 </a:solidFill>
@@ -6810,10 +6418,10 @@
                   <a:schemeClr val="accent5"/>
                 </a:solidFill>
               </a:rPr>
-              <a:t xml:space="preserve"> AND </a:t>
-            </a:r>
-            <a:r>
-              <a:rPr i="1" lang="en-US" sz="1400" b="1" dirty="0">
+              <a:t> AND </a:t>
+            </a:r>
+            <a:r>
+              <a:rPr lang="en-US" sz="1400" b="1" i="1" dirty="0">
                 <a:solidFill>
                   <a:schemeClr val="accent5"/>
                 </a:solidFill>
@@ -6845,7 +6453,7 @@
           <a:bodyPr wrap="square" lIns="0" tIns="0" rIns="0" bIns="0" rtlCol="0" anchor="t"/>
           <a:lstStyle/>
           <a:p>
-            <a:pPr indent="0" marL="0">
+            <a:pPr marL="0" indent="0">
               <a:buNone/>
             </a:pPr>
             <a:r>
@@ -6884,7 +6492,7 @@
           <a:bodyPr wrap="square" lIns="0" tIns="0" rIns="0" bIns="0" rtlCol="0" anchor="t"/>
           <a:lstStyle/>
           <a:p>
-            <a:pPr indent="0" marL="0">
+            <a:pPr marL="0" indent="0">
               <a:buNone/>
             </a:pPr>
             <a:r>
@@ -6972,42 +6580,6 @@
               <a:t>Why the sky-position result needed an SNR-stratification check before it was trusted</a:t>
             </a:r>
             <a:endParaRPr lang="en-US" sz="1400" dirty="0"/>
-          </a:p>
-        </p:txBody>
-      </p:sp>
-      <p:sp>
-        <p:nvSpPr>
-          <p:cNvPr id="14" name="source"/>
-          <p:cNvSpPr txBox="1"/>
-          <p:nvPr/>
-        </p:nvSpPr>
-        <p:spPr>
-          <a:xfrm>
-            <a:off x="548640" y="6400800"/>
-            <a:ext cx="10424160" cy="274320"/>
-          </a:xfrm>
-          <a:prstGeom prst="rect">
-            <a:avLst/>
-          </a:prstGeom>
-          <a:noFill/>
-          <a:ln/>
-        </p:spPr>
-        <p:txBody>
-          <a:bodyPr wrap="square" lIns="0" tIns="0" rIns="0" bIns="0" rtlCol="0" anchor="t"/>
-          <a:lstStyle/>
-          <a:p>
-            <a:pPr indent="0" marL="0">
-              <a:buNone/>
-            </a:pPr>
-            <a:r>
-              <a:rPr lang="en-US" sz="1000" dirty="0">
-                <a:solidFill>
-                  <a:schemeClr val="accent5"/>
-                </a:solidFill>
-              </a:rPr>
-              <a:t>Source: bootstrap_ang_mae.py; plot_certified_memorization.py; paper_summary.md</a:t>
-            </a:r>
-            <a:endParaRPr lang="en-US" sz="1000" dirty="0"/>
           </a:p>
         </p:txBody>
       </p:sp>
@@ -7031,7 +6603,7 @@
           </a:prstGeom>
           <a:extLst>
             <a:ext uri="{C572A759-6A51-4108-AA02-DFA0A04FC94B}">
-              <ma14:wrappingTextBoxFlag xmlns:ma14="http://schemas.microsoft.com/office/mac/drawingml/2011/main" val="0"/>
+              <ma14:wrappingTextBoxFlag xmlns:ma14="http://schemas.microsoft.com/office/mac/drawingml/2011/main" xmlns="" val="0"/>
             </a:ext>
           </a:extLst>
         </p:spPr>
@@ -7049,7 +6621,7 @@
           <a:p>
             <a:pPr algn="r"/>
             <a:fld id="{F7021451-1387-4CA6-816F-3879F97B5CBC}" type="slidenum">
-              <a:rPr b="0" lang="en-US"/>
+              <a:rPr lang="en-US" b="0"/>
               <a:t>14</a:t>
             </a:fld>
             <a:endParaRPr lang="en-US"/>
@@ -7084,9 +6656,11 @@
       <p:sp>
         <p:nvSpPr>
           <p:cNvPr id="3" name="Text 0"/>
-          <p:cNvSpPr/>
+          <p:cNvSpPr>
+            <a:spLocks noGrp="1"/>
+          </p:cNvSpPr>
           <p:nvPr>
-            <p:ph idx="100" type="title" hasCustomPrompt="1"/>
+            <p:ph type="title" idx="100" hasCustomPrompt="1"/>
           </p:nvPr>
         </p:nvSpPr>
         <p:spPr>
@@ -7104,7 +6678,7 @@
           <a:bodyPr wrap="square" lIns="0" tIns="0" rIns="0" bIns="0" rtlCol="0" anchor="t"/>
           <a:lstStyle/>
           <a:p>
-            <a:pPr algn="l" indent="0" marL="0">
+            <a:pPr marL="0" indent="0" algn="l">
               <a:buNone/>
             </a:pPr>
             <a:r>
@@ -7145,7 +6719,7 @@
             <a:prstDash val="solid"/>
           </a:ln>
           <a:effectLst>
-            <a:outerShdw sx="100000" sy="100000" kx="0" ky="0" algn="bl" rotWithShape="0" blurRad="101600" dist="25400" dir="5400000">
+            <a:outerShdw blurRad="101600" dist="25400" dir="5400000" algn="bl" rotWithShape="0">
               <a:srgbClr val="0F1B33">
                 <a:alpha val="12000"/>
               </a:srgbClr>
@@ -7199,7 +6773,7 @@
           <a:bodyPr wrap="square" lIns="0" tIns="0" rIns="0" bIns="0" rtlCol="0" anchor="ctr"/>
           <a:lstStyle/>
           <a:p>
-            <a:pPr algn="ctr" indent="0" marL="0">
+            <a:pPr marL="0" indent="0" algn="ctr">
               <a:buNone/>
             </a:pPr>
             <a:r>
@@ -7235,7 +6809,7 @@
           <a:bodyPr wrap="square" lIns="0" tIns="0" rIns="0" bIns="0" rtlCol="0" anchor="ctr"/>
           <a:lstStyle/>
           <a:p>
-            <a:pPr indent="0" marL="0">
+            <a:pPr marL="0" indent="0">
               <a:buNone/>
             </a:pPr>
             <a:r>
@@ -7391,7 +6965,7 @@
             <a:prstDash val="solid"/>
           </a:ln>
           <a:effectLst>
-            <a:outerShdw sx="100000" sy="100000" kx="0" ky="0" algn="bl" rotWithShape="0" blurRad="101600" dist="25400" dir="5400000">
+            <a:outerShdw blurRad="101600" dist="25400" dir="5400000" algn="bl" rotWithShape="0">
               <a:srgbClr val="0F1B33">
                 <a:alpha val="12000"/>
               </a:srgbClr>
@@ -7445,7 +7019,7 @@
           <a:bodyPr wrap="square" lIns="0" tIns="0" rIns="0" bIns="0" rtlCol="0" anchor="ctr"/>
           <a:lstStyle/>
           <a:p>
-            <a:pPr algn="ctr" indent="0" marL="0">
+            <a:pPr marL="0" indent="0" algn="ctr">
               <a:buNone/>
             </a:pPr>
             <a:r>
@@ -7481,7 +7055,7 @@
           <a:bodyPr wrap="square" lIns="0" tIns="0" rIns="0" bIns="0" rtlCol="0" anchor="ctr"/>
           <a:lstStyle/>
           <a:p>
-            <a:pPr indent="0" marL="0">
+            <a:pPr marL="0" indent="0">
               <a:buNone/>
             </a:pPr>
             <a:r>
@@ -7596,7 +7170,7 @@
               <a:t>POC</a:t>
             </a:r>
             <a:r>
-              <a:rPr baseline="-25000" lang="en-US" sz="1400" dirty="0">
+              <a:rPr lang="en-US" sz="1400" baseline="-25000" dirty="0">
                 <a:solidFill>
                   <a:schemeClr val="tx1"/>
                 </a:solidFill>
@@ -7609,7 +7183,7 @@
                   <a:schemeClr val="tx1"/>
                 </a:solidFill>
               </a:rPr>
-              <a:t xml:space="preserve"> bootstrap numbers are ground-truth-assisted (disclosed)</a:t>
+              <a:t> bootstrap numbers are ground-truth-assisted (disclosed)</a:t>
             </a:r>
             <a:endParaRPr lang="en-US" sz="1400" dirty="0"/>
           </a:p>
@@ -7664,7 +7238,7 @@
               <a:t>synthetic ablation, high-SNR / Fisher bound, joint (</a:t>
             </a:r>
             <a:r>
-              <a:rPr i="1" lang="en-US" sz="1400" dirty="0">
+              <a:rPr lang="en-US" sz="1400" i="1" dirty="0">
                 <a:solidFill>
                   <a:schemeClr val="tx1"/>
                 </a:solidFill>
@@ -7672,7 +7246,7 @@
               <a:t>φ</a:t>
             </a:r>
             <a:r>
-              <a:rPr baseline="-25000" lang="en-US" sz="1400" dirty="0">
+              <a:rPr lang="en-US" sz="1400" baseline="-25000" dirty="0">
                 <a:solidFill>
                   <a:schemeClr val="tx1"/>
                 </a:solidFill>
@@ -7685,10 +7259,10 @@
                   <a:schemeClr val="tx1"/>
                 </a:solidFill>
               </a:rPr>
-              <a:t xml:space="preserve">, </a:t>
-            </a:r>
-            <a:r>
-              <a:rPr i="1" lang="en-US" sz="1400" dirty="0">
+              <a:t>, </a:t>
+            </a:r>
+            <a:r>
+              <a:rPr lang="en-US" sz="1400" i="1" dirty="0">
                 <a:solidFill>
                   <a:schemeClr val="tx1"/>
                 </a:solidFill>
@@ -7730,42 +7304,6 @@
               <a:t>of the manuscript yet</a:t>
             </a:r>
             <a:endParaRPr lang="en-US" sz="1400" dirty="0"/>
-          </a:p>
-        </p:txBody>
-      </p:sp>
-      <p:sp>
-        <p:nvSpPr>
-          <p:cNvPr id="14" name="source"/>
-          <p:cNvSpPr txBox="1"/>
-          <p:nvPr/>
-        </p:nvSpPr>
-        <p:spPr>
-          <a:xfrm>
-            <a:off x="548640" y="6400800"/>
-            <a:ext cx="10424160" cy="274320"/>
-          </a:xfrm>
-          <a:prstGeom prst="rect">
-            <a:avLst/>
-          </a:prstGeom>
-          <a:noFill/>
-          <a:ln/>
-        </p:spPr>
-        <p:txBody>
-          <a:bodyPr wrap="square" lIns="0" tIns="0" rIns="0" bIns="0" rtlCol="0" anchor="t"/>
-          <a:lstStyle/>
-          <a:p>
-            <a:pPr indent="0" marL="0">
-              <a:buNone/>
-            </a:pPr>
-            <a:r>
-              <a:rPr lang="en-US" sz="1000" dirty="0">
-                <a:solidFill>
-                  <a:schemeClr val="accent5"/>
-                </a:solidFill>
-              </a:rPr>
-              <a:t>Source: paper_summary.md ("How strong is the evidence", "Limitations"); closing_summary.md</a:t>
-            </a:r>
-            <a:endParaRPr lang="en-US" sz="1000" dirty="0"/>
           </a:p>
         </p:txBody>
       </p:sp>
@@ -7789,7 +7327,7 @@
           </a:prstGeom>
           <a:extLst>
             <a:ext uri="{C572A759-6A51-4108-AA02-DFA0A04FC94B}">
-              <ma14:wrappingTextBoxFlag xmlns:ma14="http://schemas.microsoft.com/office/mac/drawingml/2011/main" val="0"/>
+              <ma14:wrappingTextBoxFlag xmlns:ma14="http://schemas.microsoft.com/office/mac/drawingml/2011/main" xmlns="" val="0"/>
             </a:ext>
           </a:extLst>
         </p:spPr>
@@ -7807,7 +7345,7 @@
           <a:p>
             <a:pPr algn="r"/>
             <a:fld id="{F7021451-1387-4CA6-816F-3879F97B5CBC}" type="slidenum">
-              <a:rPr b="0" lang="en-US"/>
+              <a:rPr lang="en-US" b="0"/>
               <a:t>15</a:t>
             </a:fld>
             <a:endParaRPr lang="en-US"/>
@@ -7842,9 +7380,11 @@
       <p:sp>
         <p:nvSpPr>
           <p:cNvPr id="3" name="Text 0"/>
-          <p:cNvSpPr/>
+          <p:cNvSpPr>
+            <a:spLocks noGrp="1"/>
+          </p:cNvSpPr>
           <p:nvPr>
-            <p:ph idx="100" type="title" hasCustomPrompt="1"/>
+            <p:ph type="title" idx="100" hasCustomPrompt="1"/>
           </p:nvPr>
         </p:nvSpPr>
         <p:spPr>
@@ -7862,7 +7402,7 @@
           <a:bodyPr wrap="square" lIns="0" tIns="0" rIns="0" bIns="0" rtlCol="0" anchor="t"/>
           <a:lstStyle/>
           <a:p>
-            <a:pPr algn="l" indent="0" marL="0">
+            <a:pPr marL="0" indent="0" algn="l">
               <a:buNone/>
             </a:pPr>
             <a:r>
@@ -7923,7 +7463,7 @@
           <a:bodyPr wrap="square" lIns="0" tIns="0" rIns="0" bIns="0" rtlCol="0" anchor="ctr"/>
           <a:lstStyle/>
           <a:p>
-            <a:pPr algn="ctr" indent="0" marL="0">
+            <a:pPr marL="0" indent="0" algn="ctr">
               <a:buNone/>
             </a:pPr>
             <a:r>
@@ -7959,7 +7499,7 @@
           <a:bodyPr wrap="square" lIns="0" tIns="0" rIns="0" bIns="0" rtlCol="0" anchor="t"/>
           <a:lstStyle/>
           <a:p>
-            <a:pPr indent="0" marL="0">
+            <a:pPr marL="0" indent="0">
               <a:buNone/>
             </a:pPr>
             <a:r>
@@ -7998,11 +7538,11 @@
           <a:bodyPr wrap="square" lIns="0" tIns="0" rIns="0" bIns="0" rtlCol="0" anchor="t"/>
           <a:lstStyle/>
           <a:p>
-            <a:pPr indent="0" marL="0">
+            <a:pPr marL="0" indent="0">
               <a:buNone/>
             </a:pPr>
             <a:r>
-              <a:rPr i="1" lang="en-US" sz="1400" dirty="0">
+              <a:rPr lang="en-US" sz="1400" i="1" dirty="0">
                 <a:solidFill>
                   <a:schemeClr val="bg2"/>
                 </a:solidFill>
@@ -8010,7 +7550,7 @@
               <a:t>φ</a:t>
             </a:r>
             <a:r>
-              <a:rPr baseline="-25000" lang="en-US" sz="1400" dirty="0">
+              <a:rPr lang="en-US" sz="1400" baseline="-25000" dirty="0">
                 <a:solidFill>
                   <a:schemeClr val="bg2"/>
                 </a:solidFill>
@@ -8023,10 +7563,10 @@
                   <a:schemeClr val="bg2"/>
                 </a:solidFill>
               </a:rPr>
-              <a:t xml:space="preserve"> and </a:t>
-            </a:r>
-            <a:r>
-              <a:rPr i="1" lang="en-US" sz="1400" dirty="0">
+              <a:t> and </a:t>
+            </a:r>
+            <a:r>
+              <a:rPr lang="en-US" sz="1400" i="1" dirty="0">
                 <a:solidFill>
                   <a:schemeClr val="bg2"/>
                 </a:solidFill>
@@ -8039,10 +7579,10 @@
                   <a:schemeClr val="bg2"/>
                 </a:solidFill>
               </a:rPr>
-              <a:t xml:space="preserve"> are not recoverable from strain on this architecture set, individually or through 2</a:t>
-            </a:r>
-            <a:r>
-              <a:rPr i="1" lang="en-US" sz="1400" dirty="0">
+              <a:t> are not recoverable from strain on this architecture set, individually or through 2</a:t>
+            </a:r>
+            <a:r>
+              <a:rPr lang="en-US" sz="1400" i="1" dirty="0">
                 <a:solidFill>
                   <a:schemeClr val="bg2"/>
                 </a:solidFill>
@@ -8050,7 +7590,7 @@
               <a:t>φ</a:t>
             </a:r>
             <a:r>
-              <a:rPr baseline="-25000" lang="en-US" sz="1400" dirty="0">
+              <a:rPr lang="en-US" sz="1400" baseline="-25000" dirty="0">
                 <a:solidFill>
                   <a:schemeClr val="bg2"/>
                 </a:solidFill>
@@ -8063,10 +7603,10 @@
                   <a:schemeClr val="bg2"/>
                 </a:solidFill>
               </a:rPr>
-              <a:t xml:space="preserve"> ± 2</a:t>
-            </a:r>
-            <a:r>
-              <a:rPr i="1" lang="en-US" sz="1400" dirty="0">
+              <a:t> ± 2</a:t>
+            </a:r>
+            <a:r>
+              <a:rPr lang="en-US" sz="1400" i="1" dirty="0">
                 <a:solidFill>
                   <a:schemeClr val="bg2"/>
                 </a:solidFill>
@@ -8131,7 +7671,7 @@
           <a:bodyPr wrap="square" lIns="0" tIns="0" rIns="0" bIns="0" rtlCol="0" anchor="ctr"/>
           <a:lstStyle/>
           <a:p>
-            <a:pPr algn="ctr" indent="0" marL="0">
+            <a:pPr marL="0" indent="0" algn="ctr">
               <a:buNone/>
             </a:pPr>
             <a:r>
@@ -8167,7 +7707,7 @@
           <a:bodyPr wrap="square" lIns="0" tIns="0" rIns="0" bIns="0" rtlCol="0" anchor="t"/>
           <a:lstStyle/>
           <a:p>
-            <a:pPr indent="0" marL="0">
+            <a:pPr marL="0" indent="0">
               <a:buNone/>
             </a:pPr>
             <a:r>
@@ -8206,7 +7746,7 @@
           <a:bodyPr wrap="square" lIns="0" tIns="0" rIns="0" bIns="0" rtlCol="0" anchor="t"/>
           <a:lstStyle/>
           <a:p>
-            <a:pPr indent="0" marL="0">
+            <a:pPr marL="0" indent="0">
               <a:buNone/>
             </a:pPr>
             <a:r>
@@ -8267,7 +7807,7 @@
           <a:bodyPr wrap="square" lIns="0" tIns="0" rIns="0" bIns="0" rtlCol="0" anchor="ctr"/>
           <a:lstStyle/>
           <a:p>
-            <a:pPr algn="ctr" indent="0" marL="0">
+            <a:pPr marL="0" indent="0" algn="ctr">
               <a:buNone/>
             </a:pPr>
             <a:r>
@@ -8303,7 +7843,7 @@
           <a:bodyPr wrap="square" lIns="0" tIns="0" rIns="0" bIns="0" rtlCol="0" anchor="t"/>
           <a:lstStyle/>
           <a:p>
-            <a:pPr indent="0" marL="0">
+            <a:pPr marL="0" indent="0">
               <a:buNone/>
             </a:pPr>
             <a:r>
@@ -8342,7 +7882,7 @@
           <a:bodyPr wrap="square" lIns="0" tIns="0" rIns="0" bIns="0" rtlCol="0" anchor="t"/>
           <a:lstStyle/>
           <a:p>
-            <a:pPr indent="0" marL="0">
+            <a:pPr marL="0" indent="0">
               <a:buNone/>
             </a:pPr>
             <a:r>
@@ -8383,7 +7923,7 @@
             <a:prstDash val="solid"/>
           </a:ln>
           <a:effectLst>
-            <a:outerShdw sx="100000" sy="100000" kx="0" ky="0" algn="bl" rotWithShape="0" blurRad="101600" dist="25400" dir="5400000">
+            <a:outerShdw blurRad="101600" dist="25400" dir="5400000" algn="bl" rotWithShape="0">
               <a:srgbClr val="0F1B33">
                 <a:alpha val="12000"/>
               </a:srgbClr>
@@ -8412,7 +7952,7 @@
           <a:bodyPr wrap="square" lIns="0" tIns="0" rIns="0" bIns="0" rtlCol="0" anchor="t"/>
           <a:lstStyle/>
           <a:p>
-            <a:pPr indent="0" marL="0">
+            <a:pPr marL="0" indent="0">
               <a:buNone/>
             </a:pPr>
             <a:r>
@@ -8482,7 +8022,7 @@
               <a:t>Joint (</a:t>
             </a:r>
             <a:r>
-              <a:rPr i="1" lang="en-US" sz="1400" dirty="0">
+              <a:rPr lang="en-US" sz="1400" i="1" dirty="0">
                 <a:solidFill>
                   <a:schemeClr val="bg1"/>
                 </a:solidFill>
@@ -8490,7 +8030,7 @@
               <a:t>φ</a:t>
             </a:r>
             <a:r>
-              <a:rPr baseline="-25000" lang="en-US" sz="1400" dirty="0">
+              <a:rPr lang="en-US" sz="1400" baseline="-25000" dirty="0">
                 <a:solidFill>
                   <a:schemeClr val="bg1"/>
                 </a:solidFill>
@@ -8503,10 +8043,10 @@
                   <a:schemeClr val="bg1"/>
                 </a:solidFill>
               </a:rPr>
-              <a:t xml:space="preserve">, </a:t>
-            </a:r>
-            <a:r>
-              <a:rPr i="1" lang="en-US" sz="1400" dirty="0">
+              <a:t>, </a:t>
+            </a:r>
+            <a:r>
+              <a:rPr lang="en-US" sz="1400" i="1" dirty="0">
                 <a:solidFill>
                   <a:schemeClr val="bg1"/>
                 </a:solidFill>
@@ -8576,42 +8116,6 @@
               <a:t>Independent adversarial review</a:t>
             </a:r>
             <a:endParaRPr lang="en-US" sz="1400" dirty="0"/>
-          </a:p>
-        </p:txBody>
-      </p:sp>
-      <p:sp>
-        <p:nvSpPr>
-          <p:cNvPr id="19" name="source"/>
-          <p:cNvSpPr txBox="1"/>
-          <p:nvPr/>
-        </p:nvSpPr>
-        <p:spPr>
-          <a:xfrm>
-            <a:off x="548640" y="6400800"/>
-            <a:ext cx="10424160" cy="274320"/>
-          </a:xfrm>
-          <a:prstGeom prst="rect">
-            <a:avLst/>
-          </a:prstGeom>
-          <a:noFill/>
-          <a:ln/>
-        </p:spPr>
-        <p:txBody>
-          <a:bodyPr wrap="square" lIns="0" tIns="0" rIns="0" bIns="0" rtlCol="0" anchor="t"/>
-          <a:lstStyle/>
-          <a:p>
-            <a:pPr indent="0" marL="0">
-              <a:buNone/>
-            </a:pPr>
-            <a:r>
-              <a:rPr lang="en-US" sz="1000" dirty="0">
-                <a:solidFill>
-                  <a:schemeClr val="bg2"/>
-                </a:solidFill>
-              </a:rPr>
-              <a:t>Source: paper_summary.md; closing_summary.md</a:t>
-            </a:r>
-            <a:endParaRPr lang="en-US" sz="1000" dirty="0"/>
           </a:p>
         </p:txBody>
       </p:sp>
@@ -8635,7 +8139,7 @@
           </a:prstGeom>
           <a:extLst>
             <a:ext uri="{C572A759-6A51-4108-AA02-DFA0A04FC94B}">
-              <ma14:wrappingTextBoxFlag xmlns:ma14="http://schemas.microsoft.com/office/mac/drawingml/2011/main" val="0"/>
+              <ma14:wrappingTextBoxFlag xmlns:ma14="http://schemas.microsoft.com/office/mac/drawingml/2011/main" xmlns="" val="0"/>
             </a:ext>
           </a:extLst>
         </p:spPr>
@@ -8653,7 +8157,7 @@
           <a:p>
             <a:pPr algn="r"/>
             <a:fld id="{F7021451-1387-4CA6-816F-3879F97B5CBC}" type="slidenum">
-              <a:rPr b="0" lang="en-US"/>
+              <a:rPr lang="en-US" b="0"/>
               <a:t>16</a:t>
             </a:fld>
             <a:endParaRPr lang="en-US"/>
@@ -8688,9 +8192,11 @@
       <p:sp>
         <p:nvSpPr>
           <p:cNvPr id="3" name="Text 0"/>
-          <p:cNvSpPr/>
+          <p:cNvSpPr>
+            <a:spLocks noGrp="1"/>
+          </p:cNvSpPr>
           <p:nvPr>
-            <p:ph idx="100" type="title" hasCustomPrompt="1"/>
+            <p:ph type="title" idx="100" hasCustomPrompt="1"/>
           </p:nvPr>
         </p:nvSpPr>
         <p:spPr>
@@ -8708,7 +8214,7 @@
           <a:bodyPr wrap="square" lIns="0" tIns="0" rIns="0" bIns="0" rtlCol="0" anchor="t"/>
           <a:lstStyle/>
           <a:p>
-            <a:pPr algn="l" indent="0" marL="0">
+            <a:pPr marL="0" indent="0" algn="l">
               <a:buNone/>
             </a:pPr>
             <a:r>
@@ -8717,10 +8223,10 @@
                   <a:schemeClr val="tx1"/>
                 </a:solidFill>
               </a:rPr>
-              <a:t xml:space="preserve">Can a network recover </a:t>
-            </a:r>
-            <a:r>
-              <a:rPr i="1" lang="en-US" sz="3600" b="1" dirty="0">
+              <a:t>Can a network recover </a:t>
+            </a:r>
+            <a:r>
+              <a:rPr lang="en-US" sz="3600" b="1" i="1" dirty="0">
                 <a:solidFill>
                   <a:schemeClr val="tx1"/>
                 </a:solidFill>
@@ -8728,7 +8234,7 @@
               <a:t>φ</a:t>
             </a:r>
             <a:r>
-              <a:rPr baseline="-25000" lang="en-US" sz="3600" b="1" dirty="0">
+              <a:rPr lang="en-US" sz="3600" b="1" baseline="-25000" dirty="0">
                 <a:solidFill>
                   <a:schemeClr val="tx1"/>
                 </a:solidFill>
@@ -8741,10 +8247,10 @@
                   <a:schemeClr val="tx1"/>
                 </a:solidFill>
               </a:rPr>
-              <a:t xml:space="preserve"> and </a:t>
-            </a:r>
-            <a:r>
-              <a:rPr i="1" lang="en-US" sz="3600" b="1" dirty="0">
+              <a:t> and </a:t>
+            </a:r>
+            <a:r>
+              <a:rPr lang="en-US" sz="3600" b="1" i="1" dirty="0">
                 <a:solidFill>
                   <a:schemeClr val="tx1"/>
                 </a:solidFill>
@@ -8784,7 +8290,7 @@
           <a:bodyPr wrap="square" lIns="0" tIns="0" rIns="0" bIns="0" rtlCol="0" anchor="t"/>
           <a:lstStyle/>
           <a:p>
-            <a:pPr indent="0" marL="0">
+            <a:pPr marL="0" indent="0">
               <a:buNone/>
             </a:pPr>
             <a:r>
@@ -8828,7 +8334,7 @@
               <a:buChar char="•"/>
             </a:pPr>
             <a:r>
-              <a:rPr i="1" lang="en-US" sz="1600" dirty="0">
+              <a:rPr lang="en-US" sz="1600" i="1" dirty="0">
                 <a:solidFill>
                   <a:schemeClr val="tx1"/>
                 </a:solidFill>
@@ -8836,7 +8342,7 @@
               <a:t>φ</a:t>
             </a:r>
             <a:r>
-              <a:rPr baseline="-25000" lang="en-US" sz="1600" dirty="0">
+              <a:rPr lang="en-US" sz="1600" baseline="-25000" dirty="0">
                 <a:solidFill>
                   <a:schemeClr val="tx1"/>
                 </a:solidFill>
@@ -8849,7 +8355,7 @@
                   <a:schemeClr val="tx1"/>
                 </a:solidFill>
               </a:rPr>
-              <a:t xml:space="preserve"> is the coalescence phase</a:t>
+              <a:t> is the coalescence phase</a:t>
             </a:r>
             <a:endParaRPr lang="en-US" sz="1600" dirty="0"/>
           </a:p>
@@ -8862,7 +8368,7 @@
               <a:buChar char="•"/>
             </a:pPr>
             <a:r>
-              <a:rPr i="1" lang="en-US" sz="1600" dirty="0">
+              <a:rPr lang="en-US" sz="1600" i="1" dirty="0">
                 <a:solidFill>
                   <a:schemeClr val="tx1"/>
                 </a:solidFill>
@@ -8875,7 +8381,7 @@
                   <a:schemeClr val="tx1"/>
                 </a:solidFill>
               </a:rPr>
-              <a:t xml:space="preserve"> is the polarization angle</a:t>
+              <a:t> is the polarization angle</a:t>
             </a:r>
             <a:endParaRPr lang="en-US" sz="1600" dirty="0"/>
           </a:p>
@@ -8914,7 +8420,7 @@
               <a:t>Face-on, only the combination 2</a:t>
             </a:r>
             <a:r>
-              <a:rPr i="1" lang="en-US" sz="1600" dirty="0">
+              <a:rPr lang="en-US" sz="1600" i="1" dirty="0">
                 <a:solidFill>
                   <a:schemeClr val="tx1"/>
                 </a:solidFill>
@@ -8922,7 +8428,7 @@
               <a:t>φ</a:t>
             </a:r>
             <a:r>
-              <a:rPr baseline="-25000" lang="en-US" sz="1600" dirty="0">
+              <a:rPr lang="en-US" sz="1600" baseline="-25000" dirty="0">
                 <a:solidFill>
                   <a:schemeClr val="tx1"/>
                 </a:solidFill>
@@ -8935,10 +8441,10 @@
                   <a:schemeClr val="tx1"/>
                 </a:solidFill>
               </a:rPr>
-              <a:t xml:space="preserve"> ± 2</a:t>
-            </a:r>
-            <a:r>
-              <a:rPr i="1" lang="en-US" sz="1600" dirty="0">
+              <a:t> ± 2</a:t>
+            </a:r>
+            <a:r>
+              <a:rPr lang="en-US" sz="1600" i="1" dirty="0">
                 <a:solidFill>
                   <a:schemeClr val="tx1"/>
                 </a:solidFill>
@@ -8951,7 +8457,7 @@
                   <a:schemeClr val="tx1"/>
                 </a:solidFill>
               </a:rPr>
-              <a:t xml:space="preserve"> is constrained; the individual angles cannot be told apart</a:t>
+              <a:t> is constrained; the individual angles cannot be told apart</a:t>
             </a:r>
             <a:endParaRPr lang="en-US" sz="1600" dirty="0"/>
           </a:p>
@@ -8996,7 +8502,7 @@
           <a:bodyPr wrap="square" lIns="0" tIns="0" rIns="0" bIns="0" rtlCol="0" anchor="t"/>
           <a:lstStyle/>
           <a:p>
-            <a:pPr indent="0" marL="0">
+            <a:pPr marL="0" indent="0">
               <a:buNone/>
             </a:pPr>
             <a:r>
@@ -9037,7 +8543,7 @@
             <a:prstDash val="solid"/>
           </a:ln>
           <a:effectLst>
-            <a:outerShdw sx="100000" sy="100000" kx="0" ky="0" algn="bl" rotWithShape="0" blurRad="101600" dist="25400" dir="5400000">
+            <a:outerShdw blurRad="101600" dist="25400" dir="5400000" algn="bl" rotWithShape="0">
               <a:srgbClr val="0F1B33">
                 <a:alpha val="12000"/>
               </a:srgbClr>
@@ -9066,7 +8572,7 @@
           <a:bodyPr wrap="square" lIns="0" tIns="0" rIns="0" bIns="0" rtlCol="0" anchor="t"/>
           <a:lstStyle/>
           <a:p>
-            <a:pPr indent="0" marL="0">
+            <a:pPr marL="0" indent="0">
               <a:buNone/>
             </a:pPr>
             <a:r>
@@ -9102,7 +8608,7 @@
           <a:bodyPr wrap="square" lIns="0" tIns="0" rIns="0" bIns="0" rtlCol="0" anchor="t"/>
           <a:lstStyle/>
           <a:p>
-            <a:pPr indent="0" marL="0">
+            <a:pPr marL="0" indent="0">
               <a:buNone/>
             </a:pPr>
             <a:r>
@@ -9138,7 +8644,7 @@
           <a:bodyPr wrap="square" lIns="0" tIns="0" rIns="0" bIns="0" rtlCol="0" anchor="t"/>
           <a:lstStyle/>
           <a:p>
-            <a:pPr indent="0" marL="0">
+            <a:pPr marL="0" indent="0">
               <a:buNone/>
             </a:pPr>
             <a:r>
@@ -9147,10 +8653,10 @@
                   <a:schemeClr val="bg1"/>
                 </a:solidFill>
               </a:rPr>
-              <a:t xml:space="preserve">Can it recover </a:t>
-            </a:r>
-            <a:r>
-              <a:rPr i="1" lang="en-US" sz="1800" dirty="0">
+              <a:t>Can it recover </a:t>
+            </a:r>
+            <a:r>
+              <a:rPr lang="en-US" sz="1800" i="1" dirty="0">
                 <a:solidFill>
                   <a:schemeClr val="bg1"/>
                 </a:solidFill>
@@ -9158,7 +8664,7 @@
               <a:t>φ</a:t>
             </a:r>
             <a:r>
-              <a:rPr baseline="-25000" lang="en-US" sz="1800" dirty="0">
+              <a:rPr lang="en-US" sz="1800" baseline="-25000" dirty="0">
                 <a:solidFill>
                   <a:schemeClr val="bg1"/>
                 </a:solidFill>
@@ -9171,10 +8677,10 @@
                   <a:schemeClr val="bg1"/>
                 </a:solidFill>
               </a:rPr>
-              <a:t xml:space="preserve"> and </a:t>
-            </a:r>
-            <a:r>
-              <a:rPr i="1" lang="en-US" sz="1800" dirty="0">
+              <a:t> and </a:t>
+            </a:r>
+            <a:r>
+              <a:rPr lang="en-US" sz="1800" i="1" dirty="0">
                 <a:solidFill>
                   <a:schemeClr val="bg1"/>
                 </a:solidFill>
@@ -9187,7 +8693,7 @@
                   <a:schemeClr val="bg1"/>
                 </a:solidFill>
               </a:rPr>
-              <a:t xml:space="preserve"> at all, individually or through the better-conditioned sum and difference combinations?</a:t>
+              <a:t> at all, individually or through the better-conditioned sum and difference combinations?</a:t>
             </a:r>
             <a:endParaRPr lang="en-US" sz="1800" dirty="0"/>
           </a:p>
@@ -9214,7 +8720,7 @@
           <a:bodyPr wrap="square" lIns="0" tIns="0" rIns="0" bIns="0" rtlCol="0" anchor="t"/>
           <a:lstStyle/>
           <a:p>
-            <a:pPr indent="0" marL="0">
+            <a:pPr marL="0" indent="0">
               <a:buNone/>
             </a:pPr>
             <a:r>
@@ -9229,7 +8735,7 @@
               <a:t>2</a:t>
             </a:r>
             <a:r>
-              <a:rPr i="1" lang="en-US" sz="3800" b="1" dirty="0">
+              <a:rPr lang="en-US" sz="3800" b="1" i="1" dirty="0">
                 <a:solidFill>
                   <a:schemeClr val="accent1"/>
                 </a:solidFill>
@@ -9240,7 +8746,7 @@
               <a:t>φ</a:t>
             </a:r>
             <a:r>
-              <a:rPr baseline="-25000" lang="en-US" sz="3800" b="1" dirty="0">
+              <a:rPr lang="en-US" sz="3800" b="1" baseline="-25000" dirty="0">
                 <a:solidFill>
                   <a:schemeClr val="accent1"/>
                 </a:solidFill>
@@ -9259,10 +8765,10 @@
                 <a:ea typeface="Cambria" pitchFamily="34" charset="-122"/>
                 <a:cs typeface="Cambria" pitchFamily="34" charset="-120"/>
               </a:rPr>
-              <a:t xml:space="preserve"> ± 2</a:t>
-            </a:r>
-            <a:r>
-              <a:rPr i="1" lang="en-US" sz="3800" b="1" dirty="0">
+              <a:t> ± 2</a:t>
+            </a:r>
+            <a:r>
+              <a:rPr lang="en-US" sz="3800" b="1" i="1" dirty="0">
                 <a:solidFill>
                   <a:schemeClr val="accent1"/>
                 </a:solidFill>
@@ -9273,42 +8779,6 @@
               <a:t>ψ</a:t>
             </a:r>
             <a:endParaRPr lang="en-US" sz="3800" dirty="0"/>
-          </a:p>
-        </p:txBody>
-      </p:sp>
-      <p:sp>
-        <p:nvSpPr>
-          <p:cNvPr id="12" name="source"/>
-          <p:cNvSpPr txBox="1"/>
-          <p:nvPr/>
-        </p:nvSpPr>
-        <p:spPr>
-          <a:xfrm>
-            <a:off x="548640" y="6400800"/>
-            <a:ext cx="10424160" cy="274320"/>
-          </a:xfrm>
-          <a:prstGeom prst="rect">
-            <a:avLst/>
-          </a:prstGeom>
-          <a:noFill/>
-          <a:ln/>
-        </p:spPr>
-        <p:txBody>
-          <a:bodyPr wrap="square" lIns="0" tIns="0" rIns="0" bIns="0" rtlCol="0" anchor="t"/>
-          <a:lstStyle/>
-          <a:p>
-            <a:pPr indent="0" marL="0">
-              <a:buNone/>
-            </a:pPr>
-            <a:r>
-              <a:rPr lang="en-US" sz="1000" dirty="0">
-                <a:solidFill>
-                  <a:schemeClr val="accent5"/>
-                </a:solidFill>
-              </a:rPr>
-              <a:t>Source: paper_summary.md, "The question"</a:t>
-            </a:r>
-            <a:endParaRPr lang="en-US" sz="1000" dirty="0"/>
           </a:p>
         </p:txBody>
       </p:sp>
@@ -9332,7 +8802,7 @@
           </a:prstGeom>
           <a:extLst>
             <a:ext uri="{C572A759-6A51-4108-AA02-DFA0A04FC94B}">
-              <ma14:wrappingTextBoxFlag xmlns:ma14="http://schemas.microsoft.com/office/mac/drawingml/2011/main" val="0"/>
+              <ma14:wrappingTextBoxFlag xmlns:ma14="http://schemas.microsoft.com/office/mac/drawingml/2011/main" xmlns="" val="0"/>
             </a:ext>
           </a:extLst>
         </p:spPr>
@@ -9350,7 +8820,7 @@
           <a:p>
             <a:pPr algn="r"/>
             <a:fld id="{F7021451-1387-4CA6-816F-3879F97B5CBC}" type="slidenum">
-              <a:rPr b="0" lang="en-US"/>
+              <a:rPr lang="en-US" b="0"/>
               <a:t>2</a:t>
             </a:fld>
             <a:endParaRPr lang="en-US"/>
@@ -9385,9 +8855,11 @@
       <p:sp>
         <p:nvSpPr>
           <p:cNvPr id="3" name="Text 0"/>
-          <p:cNvSpPr/>
+          <p:cNvSpPr>
+            <a:spLocks noGrp="1"/>
+          </p:cNvSpPr>
           <p:nvPr>
-            <p:ph idx="100" type="title" hasCustomPrompt="1"/>
+            <p:ph type="title" idx="100" hasCustomPrompt="1"/>
           </p:nvPr>
         </p:nvSpPr>
         <p:spPr>
@@ -9405,7 +8877,7 @@
           <a:bodyPr wrap="square" lIns="0" tIns="0" rIns="0" bIns="0" rtlCol="0" anchor="t"/>
           <a:lstStyle/>
           <a:p>
-            <a:pPr algn="l" indent="0" marL="0">
+            <a:pPr marL="0" indent="0" algn="l">
               <a:buNone/>
             </a:pPr>
             <a:r>
@@ -9446,7 +8918,7 @@
             <a:prstDash val="solid"/>
           </a:ln>
           <a:effectLst>
-            <a:outerShdw sx="100000" sy="100000" kx="0" ky="0" algn="bl" rotWithShape="0" blurRad="101600" dist="25400" dir="5400000">
+            <a:outerShdw blurRad="101600" dist="25400" dir="5400000" algn="bl" rotWithShape="0">
               <a:srgbClr val="0F1B33">
                 <a:alpha val="12000"/>
               </a:srgbClr>
@@ -9475,7 +8947,7 @@
           <a:bodyPr wrap="square" lIns="0" tIns="0" rIns="0" bIns="0" rtlCol="0" anchor="t"/>
           <a:lstStyle/>
           <a:p>
-            <a:pPr indent="0" marL="0">
+            <a:pPr marL="0" indent="0">
               <a:buNone/>
             </a:pPr>
             <a:r>
@@ -9511,7 +8983,7 @@
           <a:bodyPr wrap="square" lIns="0" tIns="0" rIns="0" bIns="0" rtlCol="0" anchor="t"/>
           <a:lstStyle/>
           <a:p>
-            <a:pPr indent="0" marL="0">
+            <a:pPr marL="0" indent="0">
               <a:buNone/>
             </a:pPr>
             <a:r>
@@ -9520,10 +8992,10 @@
                   <a:schemeClr val="tx1"/>
                 </a:solidFill>
               </a:rPr>
-              <a:t xml:space="preserve">Can a regression network recover </a:t>
-            </a:r>
-            <a:r>
-              <a:rPr i="1" lang="en-US" sz="1600" dirty="0">
+              <a:t>Can a regression network recover </a:t>
+            </a:r>
+            <a:r>
+              <a:rPr lang="en-US" sz="1600" i="1" dirty="0">
                 <a:solidFill>
                   <a:schemeClr val="tx1"/>
                 </a:solidFill>
@@ -9531,7 +9003,7 @@
               <a:t>φ</a:t>
             </a:r>
             <a:r>
-              <a:rPr baseline="-25000" lang="en-US" sz="1600" dirty="0">
+              <a:rPr lang="en-US" sz="1600" baseline="-25000" dirty="0">
                 <a:solidFill>
                   <a:schemeClr val="tx1"/>
                 </a:solidFill>
@@ -9544,10 +9016,10 @@
                   <a:schemeClr val="tx1"/>
                 </a:solidFill>
               </a:rPr>
-              <a:t xml:space="preserve"> and </a:t>
-            </a:r>
-            <a:r>
-              <a:rPr i="1" lang="en-US" sz="1600" dirty="0">
+              <a:t> and </a:t>
+            </a:r>
+            <a:r>
+              <a:rPr lang="en-US" sz="1600" i="1" dirty="0">
                 <a:solidFill>
                   <a:schemeClr val="tx1"/>
                 </a:solidFill>
@@ -9560,10 +9032,10 @@
                   <a:schemeClr val="tx1"/>
                 </a:solidFill>
               </a:rPr>
-              <a:t xml:space="preserve"> from two-detector strain, individually or through the better-conditioned combinations 2</a:t>
-            </a:r>
-            <a:r>
-              <a:rPr i="1" lang="en-US" sz="1600" dirty="0">
+              <a:t> from two-detector strain, individually or through the better-conditioned combinations 2</a:t>
+            </a:r>
+            <a:r>
+              <a:rPr lang="en-US" sz="1600" i="1" dirty="0">
                 <a:solidFill>
                   <a:schemeClr val="tx1"/>
                 </a:solidFill>
@@ -9571,7 +9043,7 @@
               <a:t>φ</a:t>
             </a:r>
             <a:r>
-              <a:rPr baseline="-25000" lang="en-US" sz="1600" dirty="0">
+              <a:rPr lang="en-US" sz="1600" baseline="-25000" dirty="0">
                 <a:solidFill>
                   <a:schemeClr val="tx1"/>
                 </a:solidFill>
@@ -9584,10 +9056,10 @@
                   <a:schemeClr val="tx1"/>
                 </a:solidFill>
               </a:rPr>
-              <a:t xml:space="preserve"> ± 2</a:t>
-            </a:r>
-            <a:r>
-              <a:rPr i="1" lang="en-US" sz="1600" dirty="0">
+              <a:t> ± 2</a:t>
+            </a:r>
+            <a:r>
+              <a:rPr lang="en-US" sz="1600" i="1" dirty="0">
                 <a:solidFill>
                   <a:schemeClr val="tx1"/>
                 </a:solidFill>
@@ -9632,7 +9104,7 @@
             <a:prstDash val="solid"/>
           </a:ln>
           <a:effectLst>
-            <a:outerShdw sx="100000" sy="100000" kx="0" ky="0" algn="bl" rotWithShape="0" blurRad="101600" dist="25400" dir="5400000">
+            <a:outerShdw blurRad="101600" dist="25400" dir="5400000" algn="bl" rotWithShape="0">
               <a:srgbClr val="0F1B33">
                 <a:alpha val="12000"/>
               </a:srgbClr>
@@ -9661,7 +9133,7 @@
           <a:bodyPr wrap="square" lIns="0" tIns="0" rIns="0" bIns="0" rtlCol="0" anchor="t"/>
           <a:lstStyle/>
           <a:p>
-            <a:pPr indent="0" marL="0">
+            <a:pPr marL="0" indent="0">
               <a:buNone/>
             </a:pPr>
             <a:r>
@@ -9697,7 +9169,7 @@
           <a:bodyPr wrap="square" lIns="0" tIns="0" rIns="0" bIns="0" rtlCol="0" anchor="t"/>
           <a:lstStyle/>
           <a:p>
-            <a:pPr indent="0" marL="0">
+            <a:pPr marL="0" indent="0">
               <a:buNone/>
             </a:pPr>
             <a:r>
@@ -9738,7 +9210,7 @@
             <a:prstDash val="solid"/>
           </a:ln>
           <a:effectLst>
-            <a:outerShdw sx="100000" sy="100000" kx="0" ky="0" algn="bl" rotWithShape="0" blurRad="101600" dist="25400" dir="5400000">
+            <a:outerShdw blurRad="101600" dist="25400" dir="5400000" algn="bl" rotWithShape="0">
               <a:srgbClr val="0F1B33">
                 <a:alpha val="12000"/>
               </a:srgbClr>
@@ -9767,7 +9239,7 @@
           <a:bodyPr wrap="square" lIns="0" tIns="0" rIns="0" bIns="0" rtlCol="0" anchor="t"/>
           <a:lstStyle/>
           <a:p>
-            <a:pPr indent="0" marL="0">
+            <a:pPr marL="0" indent="0">
               <a:buNone/>
             </a:pPr>
             <a:r>
@@ -9803,7 +9275,7 @@
           <a:bodyPr wrap="square" lIns="0" tIns="0" rIns="0" bIns="0" rtlCol="0" anchor="t"/>
           <a:lstStyle/>
           <a:p>
-            <a:pPr indent="0" marL="0">
+            <a:pPr marL="0" indent="0">
               <a:buNone/>
             </a:pPr>
             <a:r>
@@ -9815,7 +9287,7 @@
               <a:t>No. Every configuration sits at the random-guess baseline on both angles, and none of 8 bootstrap tests is significant, while the controls are recovered (</a:t>
             </a:r>
             <a:r>
-              <a:rPr i="1" lang="en-US" sz="1600" dirty="0">
+              <a:rPr lang="en-US" sz="1600" i="1" dirty="0">
                 <a:solidFill>
                   <a:schemeClr val="tx1"/>
                 </a:solidFill>
@@ -9823,7 +9295,7 @@
               <a:t>R</a:t>
             </a:r>
             <a:r>
-              <a:rPr baseline="30000" lang="en-US" sz="1600" dirty="0">
+              <a:rPr lang="en-US" sz="1600" baseline="30000" dirty="0">
                 <a:solidFill>
                   <a:schemeClr val="tx1"/>
                 </a:solidFill>
@@ -9836,7 +9308,7 @@
                   <a:schemeClr val="tx1"/>
                 </a:solidFill>
               </a:rPr>
-              <a:t xml:space="preserve"> up to 0.96).</a:t>
+              <a:t> up to 0.96).</a:t>
             </a:r>
             <a:endParaRPr lang="en-US" sz="1600" dirty="0"/>
           </a:p>
@@ -9868,7 +9340,7 @@
             <a:prstDash val="solid"/>
           </a:ln>
           <a:effectLst>
-            <a:outerShdw sx="100000" sy="100000" kx="0" ky="0" algn="bl" rotWithShape="0" blurRad="101600" dist="25400" dir="5400000">
+            <a:outerShdw blurRad="101600" dist="25400" dir="5400000" algn="bl" rotWithShape="0">
               <a:srgbClr val="0F1B33">
                 <a:alpha val="12000"/>
               </a:srgbClr>
@@ -9897,7 +9369,7 @@
           <a:bodyPr wrap="square" lIns="0" tIns="0" rIns="0" bIns="0" rtlCol="0" anchor="ctr"/>
           <a:lstStyle/>
           <a:p>
-            <a:pPr indent="0" marL="0">
+            <a:pPr marL="0" indent="0">
               <a:buNone/>
             </a:pPr>
             <a:r>
@@ -9914,7 +9386,15 @@
                   <a:schemeClr val="bg1"/>
                 </a:solidFill>
               </a:rPr>
-              <a:t xml:space="preserve">partial sky localization in </a:t>
+              <a:t>partial sky localization in CNN</a:t>
+            </a:r>
+            <a:r>
+              <a:rPr lang="en-US" sz="1800" baseline="-25000" dirty="0">
+                <a:solidFill>
+                  <a:schemeClr val="bg1"/>
+                </a:solidFill>
+              </a:rPr>
+              <a:t>attention</a:t>
             </a:r>
             <a:r>
               <a:rPr lang="en-US" sz="1800" dirty="0">
@@ -9922,15 +9402,15 @@
                   <a:schemeClr val="bg1"/>
                 </a:solidFill>
               </a:rPr>
-              <a:t>CNN</a:t>
-            </a:r>
-            <a:r>
-              <a:rPr baseline="-25000" lang="en-US" sz="1800" dirty="0">
+              <a:t> (+12.6°, </a:t>
+            </a:r>
+            <a:r>
+              <a:rPr lang="en-US" sz="1800" i="1" dirty="0">
                 <a:solidFill>
                   <a:schemeClr val="bg1"/>
                 </a:solidFill>
               </a:rPr>
-              <a:t>attention</a:t>
+              <a:t>z</a:t>
             </a:r>
             <a:r>
               <a:rPr lang="en-US" sz="1800" dirty="0">
@@ -9938,15 +9418,23 @@
                   <a:schemeClr val="bg1"/>
                 </a:solidFill>
               </a:rPr>
-              <a:t xml:space="preserve"> (+12.6°, </a:t>
-            </a:r>
-            <a:r>
-              <a:rPr i="1" lang="en-US" sz="1800" dirty="0">
+              <a:t> = +23σ), an inclination head that is not a clean noise floor, and memorization of </a:t>
+            </a:r>
+            <a:r>
+              <a:rPr lang="en-US" sz="1800" i="1" dirty="0">
                 <a:solidFill>
                   <a:schemeClr val="bg1"/>
                 </a:solidFill>
               </a:rPr>
-              <a:t>z</a:t>
+              <a:t>φ</a:t>
+            </a:r>
+            <a:r>
+              <a:rPr lang="en-US" sz="1800" baseline="-25000" dirty="0">
+                <a:solidFill>
+                  <a:schemeClr val="bg1"/>
+                </a:solidFill>
+              </a:rPr>
+              <a:t>c</a:t>
             </a:r>
             <a:r>
               <a:rPr lang="en-US" sz="1800" dirty="0">
@@ -9954,85 +9442,25 @@
                   <a:schemeClr val="bg1"/>
                 </a:solidFill>
               </a:rPr>
-              <a:t xml:space="preserve"> = +23σ), an inclination head that is not a clean noise floor, and memorization of </a:t>
-            </a:r>
-            <a:r>
-              <a:rPr i="1" lang="en-US" sz="1800" dirty="0">
+              <a:t> and </a:t>
+            </a:r>
+            <a:r>
+              <a:rPr lang="en-US" sz="1800" i="1" dirty="0">
                 <a:solidFill>
                   <a:schemeClr val="bg1"/>
                 </a:solidFill>
               </a:rPr>
-              <a:t>φ</a:t>
-            </a:r>
-            <a:r>
-              <a:rPr baseline="-25000" lang="en-US" sz="1800" dirty="0">
+              <a:t>ψ</a:t>
+            </a:r>
+            <a:r>
+              <a:rPr lang="en-US" sz="1800" dirty="0">
                 <a:solidFill>
                   <a:schemeClr val="bg1"/>
                 </a:solidFill>
               </a:rPr>
-              <a:t>c</a:t>
-            </a:r>
-            <a:r>
-              <a:rPr lang="en-US" sz="1800" dirty="0">
-                <a:solidFill>
-                  <a:schemeClr val="bg1"/>
-                </a:solidFill>
-              </a:rPr>
-              <a:t xml:space="preserve"> and </a:t>
-            </a:r>
-            <a:r>
-              <a:rPr i="1" lang="en-US" sz="1800" dirty="0">
-                <a:solidFill>
-                  <a:schemeClr val="bg1"/>
-                </a:solidFill>
-              </a:rPr>
-              <a:t>ψ</a:t>
-            </a:r>
-            <a:r>
-              <a:rPr lang="en-US" sz="1800" dirty="0">
-                <a:solidFill>
-                  <a:schemeClr val="bg1"/>
-                </a:solidFill>
-              </a:rPr>
-              <a:t xml:space="preserve"> in the training split.</a:t>
+              <a:t> in the training split.</a:t>
             </a:r>
             <a:endParaRPr lang="en-US" sz="1800" dirty="0"/>
-          </a:p>
-        </p:txBody>
-      </p:sp>
-      <p:sp>
-        <p:nvSpPr>
-          <p:cNvPr id="15" name="source"/>
-          <p:cNvSpPr txBox="1"/>
-          <p:nvPr/>
-        </p:nvSpPr>
-        <p:spPr>
-          <a:xfrm>
-            <a:off x="548640" y="6400800"/>
-            <a:ext cx="10424160" cy="274320"/>
-          </a:xfrm>
-          <a:prstGeom prst="rect">
-            <a:avLst/>
-          </a:prstGeom>
-          <a:noFill/>
-          <a:ln/>
-        </p:spPr>
-        <p:txBody>
-          <a:bodyPr wrap="square" lIns="0" tIns="0" rIns="0" bIns="0" rtlCol="0" anchor="t"/>
-          <a:lstStyle/>
-          <a:p>
-            <a:pPr indent="0" marL="0">
-              <a:buNone/>
-            </a:pPr>
-            <a:r>
-              <a:rPr lang="en-US" sz="1000" dirty="0">
-                <a:solidFill>
-                  <a:schemeClr val="accent5"/>
-                </a:solidFill>
-              </a:rPr>
-              <a:t>Source: paper_summary.md; closing_summary.md</a:t>
-            </a:r>
-            <a:endParaRPr lang="en-US" sz="1000" dirty="0"/>
           </a:p>
         </p:txBody>
       </p:sp>
@@ -10056,7 +9484,7 @@
           </a:prstGeom>
           <a:extLst>
             <a:ext uri="{C572A759-6A51-4108-AA02-DFA0A04FC94B}">
-              <ma14:wrappingTextBoxFlag xmlns:ma14="http://schemas.microsoft.com/office/mac/drawingml/2011/main" val="0"/>
+              <ma14:wrappingTextBoxFlag xmlns:ma14="http://schemas.microsoft.com/office/mac/drawingml/2011/main" xmlns="" val="0"/>
             </a:ext>
           </a:extLst>
         </p:spPr>
@@ -10074,7 +9502,7 @@
           <a:p>
             <a:pPr algn="r"/>
             <a:fld id="{F7021451-1387-4CA6-816F-3879F97B5CBC}" type="slidenum">
-              <a:rPr b="0" lang="en-US"/>
+              <a:rPr lang="en-US" b="0"/>
               <a:t>3</a:t>
             </a:fld>
             <a:endParaRPr lang="en-US"/>
@@ -10109,9 +9537,11 @@
       <p:sp>
         <p:nvSpPr>
           <p:cNvPr id="3" name="Text 0"/>
-          <p:cNvSpPr/>
+          <p:cNvSpPr>
+            <a:spLocks noGrp="1"/>
+          </p:cNvSpPr>
           <p:nvPr>
-            <p:ph idx="100" type="title" hasCustomPrompt="1"/>
+            <p:ph type="title" idx="100" hasCustomPrompt="1"/>
           </p:nvPr>
         </p:nvSpPr>
         <p:spPr>
@@ -10129,7 +9559,7 @@
           <a:bodyPr wrap="square" lIns="0" tIns="0" rIns="0" bIns="0" rtlCol="0" anchor="t"/>
           <a:lstStyle/>
           <a:p>
-            <a:pPr algn="l" indent="0" marL="0">
+            <a:pPr marL="0" indent="0" algn="l">
               <a:buNone/>
             </a:pPr>
             <a:r>
@@ -10146,14 +9576,14 @@
       </p:sp>
       <p:pic>
         <p:nvPicPr>
-          <p:cNvPr id="4" name="Image 0" descr="Correlation ratio versus inclination: about 1.6 face-on falling to about 1.05-1.15 edge-on, for both cos iota signs">    </p:cNvPr>
+          <p:cNvPr id="4" name="Image 0" descr="Correlation ratio versus inclination: about 1.6 face-on falling to about 1.05-1.15 edge-on, for both cos iota signs"/>
           <p:cNvPicPr>
             <a:picLocks noChangeAspect="1"/>
           </p:cNvPicPr>
           <p:nvPr/>
         </p:nvPicPr>
         <p:blipFill>
-          <a:blip r:embed="rId1"/>
+          <a:blip r:embed="rId3"/>
           <a:stretch>
             <a:fillRect/>
           </a:stretch>
@@ -10189,7 +9619,7 @@
           <a:bodyPr wrap="square" lIns="0" tIns="0" rIns="0" bIns="0" rtlCol="0" anchor="t"/>
           <a:lstStyle/>
           <a:p>
-            <a:pPr indent="0" marL="0">
+            <a:pPr marL="0" indent="0">
               <a:buNone/>
             </a:pPr>
             <a:r>
@@ -10201,7 +9631,7 @@
               <a:t>Correlation ratio between the combination 2</a:t>
             </a:r>
             <a:r>
-              <a:rPr i="1" lang="en-US" sz="1400" dirty="0">
+              <a:rPr lang="en-US" sz="1400" i="1" dirty="0">
                 <a:solidFill>
                   <a:schemeClr val="accent5"/>
                 </a:solidFill>
@@ -10209,7 +9639,7 @@
               <a:t>φ</a:t>
             </a:r>
             <a:r>
-              <a:rPr baseline="-25000" lang="en-US" sz="1400" dirty="0">
+              <a:rPr lang="en-US" sz="1400" baseline="-25000" dirty="0">
                 <a:solidFill>
                   <a:schemeClr val="accent5"/>
                 </a:solidFill>
@@ -10222,10 +9652,10 @@
                   <a:schemeClr val="accent5"/>
                 </a:solidFill>
               </a:rPr>
-              <a:t xml:space="preserve"> + 2</a:t>
-            </a:r>
-            <a:r>
-              <a:rPr i="1" lang="en-US" sz="1400" dirty="0">
+              <a:t> + 2</a:t>
+            </a:r>
+            <a:r>
+              <a:rPr lang="en-US" sz="1400" i="1" dirty="0">
                 <a:solidFill>
                   <a:schemeClr val="accent5"/>
                 </a:solidFill>
@@ -10238,10 +9668,10 @@
                   <a:schemeClr val="accent5"/>
                 </a:solidFill>
               </a:rPr>
-              <a:t xml:space="preserve"> and its complement, swept over inclination </a:t>
-            </a:r>
-            <a:r>
-              <a:rPr i="1" lang="en-US" sz="1400" dirty="0">
+              <a:t> and its complement, swept over inclination </a:t>
+            </a:r>
+            <a:r>
+              <a:rPr lang="en-US" sz="1400" i="1" dirty="0">
                 <a:solidFill>
                   <a:schemeClr val="accent5"/>
                 </a:solidFill>
@@ -10281,7 +9711,7 @@
           <a:bodyPr wrap="square" lIns="0" tIns="0" rIns="0" bIns="0" rtlCol="0" anchor="t"/>
           <a:lstStyle/>
           <a:p>
-            <a:pPr indent="0" marL="0">
+            <a:pPr marL="0" indent="0">
               <a:buNone/>
             </a:pPr>
             <a:r>
@@ -10320,7 +9750,7 @@
           <a:bodyPr wrap="square" lIns="0" tIns="0" rIns="0" bIns="0" rtlCol="0" anchor="t"/>
           <a:lstStyle/>
           <a:p>
-            <a:pPr indent="0" marL="0">
+            <a:pPr marL="0" indent="0">
               <a:buNone/>
             </a:pPr>
             <a:r>
@@ -10356,7 +9786,7 @@
           <a:bodyPr wrap="square" lIns="0" tIns="0" rIns="0" bIns="0" rtlCol="0" anchor="t"/>
           <a:lstStyle/>
           <a:p>
-            <a:pPr indent="0" marL="0">
+            <a:pPr marL="0" indent="0">
               <a:buNone/>
             </a:pPr>
             <a:r>
@@ -10395,7 +9825,7 @@
           <a:bodyPr wrap="square" lIns="0" tIns="0" rIns="0" bIns="0" rtlCol="0" anchor="t"/>
           <a:lstStyle/>
           <a:p>
-            <a:pPr indent="0" marL="0">
+            <a:pPr marL="0" indent="0">
               <a:buNone/>
             </a:pPr>
             <a:r>
@@ -10436,7 +9866,7 @@
             <a:prstDash val="solid"/>
           </a:ln>
           <a:effectLst>
-            <a:outerShdw sx="100000" sy="100000" kx="0" ky="0" algn="bl" rotWithShape="0" blurRad="101600" dist="25400" dir="5400000">
+            <a:outerShdw blurRad="101600" dist="25400" dir="5400000" algn="bl" rotWithShape="0">
               <a:srgbClr val="0F1B33">
                 <a:alpha val="12000"/>
               </a:srgbClr>
@@ -10465,7 +9895,7 @@
           <a:bodyPr wrap="square" lIns="0" tIns="0" rIns="0" bIns="0" rtlCol="0" anchor="ctr"/>
           <a:lstStyle/>
           <a:p>
-            <a:pPr indent="0" marL="0">
+            <a:pPr marL="0" indent="0">
               <a:buNone/>
             </a:pPr>
             <a:r>
@@ -10485,7 +9915,7 @@
               <a:t>(</a:t>
             </a:r>
             <a:r>
-              <a:rPr i="1" lang="en-US" sz="1600" dirty="0">
+              <a:rPr lang="en-US" sz="1600" i="1" dirty="0">
                 <a:solidFill>
                   <a:schemeClr val="tx1"/>
                 </a:solidFill>
@@ -10498,7 +9928,15 @@
                   <a:schemeClr val="tx1"/>
                 </a:solidFill>
               </a:rPr>
-              <a:t>,</a:t>
+              <a:t>, </a:t>
+            </a:r>
+            <a:r>
+              <a:rPr lang="en-US" sz="1600" i="1" dirty="0">
+                <a:solidFill>
+                  <a:schemeClr val="tx1"/>
+                </a:solidFill>
+              </a:rPr>
+              <a:t>δ</a:t>
             </a:r>
             <a:r>
               <a:rPr lang="en-US" sz="1600" dirty="0">
@@ -10506,15 +9944,23 @@
                   <a:schemeClr val="tx1"/>
                 </a:solidFill>
               </a:rPr>
-              <a:t xml:space="preserve"> </a:t>
-            </a:r>
-            <a:r>
-              <a:rPr i="1" lang="en-US" sz="1600" dirty="0">
-                <a:solidFill>
-                  <a:schemeClr val="tx1"/>
-                </a:solidFill>
-              </a:rPr>
-              <a:t>δ</a:t>
+              <a:t>) stays constant along 2</a:t>
+            </a:r>
+            <a:r>
+              <a:rPr lang="en-US" sz="1600" i="1" dirty="0">
+                <a:solidFill>
+                  <a:schemeClr val="tx1"/>
+                </a:solidFill>
+              </a:rPr>
+              <a:t>φ</a:t>
+            </a:r>
+            <a:r>
+              <a:rPr lang="en-US" sz="1600" baseline="-25000" dirty="0">
+                <a:solidFill>
+                  <a:schemeClr val="tx1"/>
+                </a:solidFill>
+              </a:rPr>
+              <a:t>c</a:t>
             </a:r>
             <a:r>
               <a:rPr lang="en-US" sz="1600" dirty="0">
@@ -10522,23 +9968,15 @@
                   <a:schemeClr val="tx1"/>
                 </a:solidFill>
               </a:rPr>
-              <a:t>) stays constant along 2</a:t>
-            </a:r>
-            <a:r>
-              <a:rPr i="1" lang="en-US" sz="1600" dirty="0">
-                <a:solidFill>
-                  <a:schemeClr val="tx1"/>
-                </a:solidFill>
-              </a:rPr>
-              <a:t>φ</a:t>
-            </a:r>
-            <a:r>
-              <a:rPr baseline="-25000" lang="en-US" sz="1600" dirty="0">
-                <a:solidFill>
-                  <a:schemeClr val="tx1"/>
-                </a:solidFill>
-              </a:rPr>
-              <a:t>c</a:t>
+              <a:t> + 2</a:t>
+            </a:r>
+            <a:r>
+              <a:rPr lang="en-US" sz="1600" i="1" dirty="0">
+                <a:solidFill>
+                  <a:schemeClr val="tx1"/>
+                </a:solidFill>
+              </a:rPr>
+              <a:t>ψ</a:t>
             </a:r>
             <a:r>
               <a:rPr lang="en-US" sz="1600" dirty="0">
@@ -10546,15 +9984,15 @@
                   <a:schemeClr val="tx1"/>
                 </a:solidFill>
               </a:rPr>
-              <a:t xml:space="preserve"> + 2</a:t>
-            </a:r>
-            <a:r>
-              <a:rPr i="1" lang="en-US" sz="1600" dirty="0">
-                <a:solidFill>
-                  <a:schemeClr val="tx1"/>
-                </a:solidFill>
-              </a:rPr>
-              <a:t>ψ</a:t>
+              <a:t> = const at face-on; largest standard deviations 1.16×10</a:t>
+            </a:r>
+            <a:r>
+              <a:rPr lang="en-US" sz="1600" baseline="30000" dirty="0">
+                <a:solidFill>
+                  <a:schemeClr val="tx1"/>
+                </a:solidFill>
+              </a:rPr>
+              <a:t>−14</a:t>
             </a:r>
             <a:r>
               <a:rPr lang="en-US" sz="1600" dirty="0">
@@ -10562,7 +10000,15 @@
                   <a:schemeClr val="tx1"/>
                 </a:solidFill>
               </a:rPr>
-              <a:t xml:space="preserve"> = const at face-on; largest standard deviations 1.16×</a:t>
+              <a:t> and 5.87×10</a:t>
+            </a:r>
+            <a:r>
+              <a:rPr lang="en-US" sz="1600" baseline="30000" dirty="0">
+                <a:solidFill>
+                  <a:schemeClr val="tx1"/>
+                </a:solidFill>
+              </a:rPr>
+              <a:t>−16</a:t>
             </a:r>
             <a:r>
               <a:rPr lang="en-US" sz="1600" dirty="0">
@@ -10570,85 +10016,9 @@
                   <a:schemeClr val="tx1"/>
                 </a:solidFill>
               </a:rPr>
-              <a:t>10</a:t>
-            </a:r>
-            <a:r>
-              <a:rPr baseline="30000" lang="en-US" sz="1600" dirty="0">
-                <a:solidFill>
-                  <a:schemeClr val="tx1"/>
-                </a:solidFill>
-              </a:rPr>
-              <a:t>−14</a:t>
-            </a:r>
-            <a:r>
-              <a:rPr lang="en-US" sz="1600" dirty="0">
-                <a:solidFill>
-                  <a:schemeClr val="tx1"/>
-                </a:solidFill>
-              </a:rPr>
-              <a:t xml:space="preserve"> and 5.87×</a:t>
-            </a:r>
-            <a:r>
-              <a:rPr lang="en-US" sz="1600" dirty="0">
-                <a:solidFill>
-                  <a:schemeClr val="tx1"/>
-                </a:solidFill>
-              </a:rPr>
-              <a:t>10</a:t>
-            </a:r>
-            <a:r>
-              <a:rPr baseline="30000" lang="en-US" sz="1600" dirty="0">
-                <a:solidFill>
-                  <a:schemeClr val="tx1"/>
-                </a:solidFill>
-              </a:rPr>
-              <a:t>−16</a:t>
-            </a:r>
-            <a:r>
-              <a:rPr lang="en-US" sz="1600" dirty="0">
-                <a:solidFill>
-                  <a:schemeClr val="tx1"/>
-                </a:solidFill>
-              </a:rPr>
               <a:t>.</a:t>
             </a:r>
             <a:endParaRPr lang="en-US" sz="1600" dirty="0"/>
-          </a:p>
-        </p:txBody>
-      </p:sp>
-      <p:sp>
-        <p:nvSpPr>
-          <p:cNvPr id="12" name="source"/>
-          <p:cNvSpPr txBox="1"/>
-          <p:nvPr/>
-        </p:nvSpPr>
-        <p:spPr>
-          <a:xfrm>
-            <a:off x="548640" y="6400800"/>
-            <a:ext cx="10424160" cy="274320"/>
-          </a:xfrm>
-          <a:prstGeom prst="rect">
-            <a:avLst/>
-          </a:prstGeom>
-          <a:noFill/>
-          <a:ln/>
-        </p:spPr>
-        <p:txBody>
-          <a:bodyPr wrap="square" lIns="0" tIns="0" rIns="0" bIns="0" rtlCol="0" anchor="t"/>
-          <a:lstStyle/>
-          <a:p>
-            <a:pPr indent="0" marL="0">
-              <a:buNone/>
-            </a:pPr>
-            <a:r>
-              <a:rPr lang="en-US" sz="1000" dirty="0">
-                <a:solidFill>
-                  <a:schemeClr val="accent5"/>
-                </a:solidFill>
-              </a:rPr>
-              <a:t>Source: sweep_1_1_ratio_vs_iota.png / .csv; paper_summary.md</a:t>
-            </a:r>
-            <a:endParaRPr lang="en-US" sz="1000" dirty="0"/>
           </a:p>
         </p:txBody>
       </p:sp>
@@ -10672,7 +10042,7 @@
           </a:prstGeom>
           <a:extLst>
             <a:ext uri="{C572A759-6A51-4108-AA02-DFA0A04FC94B}">
-              <ma14:wrappingTextBoxFlag xmlns:ma14="http://schemas.microsoft.com/office/mac/drawingml/2011/main" val="0"/>
+              <ma14:wrappingTextBoxFlag xmlns:ma14="http://schemas.microsoft.com/office/mac/drawingml/2011/main" xmlns="" val="0"/>
             </a:ext>
           </a:extLst>
         </p:spPr>
@@ -10690,7 +10060,7 @@
           <a:p>
             <a:pPr algn="r"/>
             <a:fld id="{F7021451-1387-4CA6-816F-3879F97B5CBC}" type="slidenum">
-              <a:rPr b="0" lang="en-US"/>
+              <a:rPr lang="en-US" b="0"/>
               <a:t>4</a:t>
             </a:fld>
             <a:endParaRPr lang="en-US"/>
@@ -10725,9 +10095,11 @@
       <p:sp>
         <p:nvSpPr>
           <p:cNvPr id="3" name="Text 0"/>
-          <p:cNvSpPr/>
+          <p:cNvSpPr>
+            <a:spLocks noGrp="1"/>
+          </p:cNvSpPr>
           <p:nvPr>
-            <p:ph idx="100" type="title" hasCustomPrompt="1"/>
+            <p:ph type="title" idx="100" hasCustomPrompt="1"/>
           </p:nvPr>
         </p:nvSpPr>
         <p:spPr>
@@ -10745,7 +10117,7 @@
           <a:bodyPr wrap="square" lIns="0" tIns="0" rIns="0" bIns="0" rtlCol="0" anchor="t"/>
           <a:lstStyle/>
           <a:p>
-            <a:pPr algn="l" indent="0" marL="0">
+            <a:pPr marL="0" indent="0" algn="l">
               <a:buNone/>
             </a:pPr>
             <a:r>
@@ -10786,7 +10158,7 @@
             <a:prstDash val="solid"/>
           </a:ln>
           <a:effectLst>
-            <a:outerShdw sx="100000" sy="100000" kx="0" ky="0" algn="bl" rotWithShape="0" blurRad="101600" dist="25400" dir="5400000">
+            <a:outerShdw blurRad="101600" dist="25400" dir="5400000" algn="bl" rotWithShape="0">
               <a:srgbClr val="0F1B33">
                 <a:alpha val="12000"/>
               </a:srgbClr>
@@ -10815,7 +10187,7 @@
           <a:bodyPr wrap="square" lIns="0" tIns="0" rIns="0" bIns="0" rtlCol="0" anchor="t"/>
           <a:lstStyle/>
           <a:p>
-            <a:pPr indent="0" marL="0">
+            <a:pPr marL="0" indent="0">
               <a:buNone/>
             </a:pPr>
             <a:r>
@@ -10854,7 +10226,7 @@
           <a:bodyPr wrap="square" lIns="0" tIns="0" rIns="0" bIns="0" rtlCol="0" anchor="t"/>
           <a:lstStyle/>
           <a:p>
-            <a:pPr indent="0" marL="0">
+            <a:pPr marL="0" indent="0">
               <a:buNone/>
             </a:pPr>
             <a:r>
@@ -10895,7 +10267,7 @@
             <a:prstDash val="solid"/>
           </a:ln>
           <a:effectLst>
-            <a:outerShdw sx="100000" sy="100000" kx="0" ky="0" algn="bl" rotWithShape="0" blurRad="101600" dist="25400" dir="5400000">
+            <a:outerShdw blurRad="101600" dist="25400" dir="5400000" algn="bl" rotWithShape="0">
               <a:srgbClr val="0F1B33">
                 <a:alpha val="12000"/>
               </a:srgbClr>
@@ -10924,7 +10296,7 @@
           <a:bodyPr wrap="square" lIns="0" tIns="0" rIns="0" bIns="0" rtlCol="0" anchor="t"/>
           <a:lstStyle/>
           <a:p>
-            <a:pPr indent="0" marL="0">
+            <a:pPr marL="0" indent="0">
               <a:buNone/>
             </a:pPr>
             <a:r>
@@ -10963,7 +10335,7 @@
           <a:bodyPr wrap="square" lIns="0" tIns="0" rIns="0" bIns="0" rtlCol="0" anchor="t"/>
           <a:lstStyle/>
           <a:p>
-            <a:pPr indent="0" marL="0">
+            <a:pPr marL="0" indent="0">
               <a:buNone/>
             </a:pPr>
             <a:r>
@@ -11004,7 +10376,7 @@
             <a:prstDash val="solid"/>
           </a:ln>
           <a:effectLst>
-            <a:outerShdw sx="100000" sy="100000" kx="0" ky="0" algn="bl" rotWithShape="0" blurRad="101600" dist="25400" dir="5400000">
+            <a:outerShdw blurRad="101600" dist="25400" dir="5400000" algn="bl" rotWithShape="0">
               <a:srgbClr val="0F1B33">
                 <a:alpha val="12000"/>
               </a:srgbClr>
@@ -11033,7 +10405,7 @@
           <a:bodyPr wrap="square" lIns="0" tIns="0" rIns="0" bIns="0" rtlCol="0" anchor="t"/>
           <a:lstStyle/>
           <a:p>
-            <a:pPr indent="0" marL="0">
+            <a:pPr marL="0" indent="0">
               <a:buNone/>
             </a:pPr>
             <a:r>
@@ -11072,7 +10444,7 @@
           <a:bodyPr wrap="square" lIns="0" tIns="0" rIns="0" bIns="0" rtlCol="0" anchor="t"/>
           <a:lstStyle/>
           <a:p>
-            <a:pPr indent="0" marL="0">
+            <a:pPr marL="0" indent="0">
               <a:buNone/>
             </a:pPr>
             <a:r>
@@ -11113,7 +10485,7 @@
             <a:prstDash val="solid"/>
           </a:ln>
           <a:effectLst>
-            <a:outerShdw sx="100000" sy="100000" kx="0" ky="0" algn="bl" rotWithShape="0" blurRad="101600" dist="25400" dir="5400000">
+            <a:outerShdw blurRad="101600" dist="25400" dir="5400000" algn="bl" rotWithShape="0">
               <a:srgbClr val="0F1B33">
                 <a:alpha val="12000"/>
               </a:srgbClr>
@@ -11142,7 +10514,7 @@
           <a:bodyPr wrap="square" lIns="0" tIns="0" rIns="0" bIns="0" rtlCol="0" anchor="t"/>
           <a:lstStyle/>
           <a:p>
-            <a:pPr indent="0" marL="0">
+            <a:pPr marL="0" indent="0">
               <a:buNone/>
             </a:pPr>
             <a:r>
@@ -11181,7 +10553,7 @@
           <a:bodyPr wrap="square" lIns="0" tIns="0" rIns="0" bIns="0" rtlCol="0" anchor="t"/>
           <a:lstStyle/>
           <a:p>
-            <a:pPr indent="0" marL="0">
+            <a:pPr marL="0" indent="0">
               <a:buNone/>
             </a:pPr>
             <a:r>
@@ -11190,10 +10562,10 @@
                   <a:schemeClr val="tx1"/>
                 </a:solidFill>
               </a:rPr>
-              <a:t xml:space="preserve">angular MAE of a constant prediction, for </a:t>
-            </a:r>
-            <a:r>
-              <a:rPr i="1" lang="en-US" sz="1400" dirty="0">
+              <a:t>angular MAE of a constant prediction, for </a:t>
+            </a:r>
+            <a:r>
+              <a:rPr lang="en-US" sz="1400" i="1" dirty="0">
                 <a:solidFill>
                   <a:schemeClr val="tx1"/>
                 </a:solidFill>
@@ -11201,7 +10573,7 @@
               <a:t>φ</a:t>
             </a:r>
             <a:r>
-              <a:rPr baseline="-25000" lang="en-US" sz="1400" dirty="0">
+              <a:rPr lang="en-US" sz="1400" baseline="-25000" dirty="0">
                 <a:solidFill>
                   <a:schemeClr val="tx1"/>
                 </a:solidFill>
@@ -11214,10 +10586,10 @@
                   <a:schemeClr val="tx1"/>
                 </a:solidFill>
               </a:rPr>
-              <a:t xml:space="preserve"> and </a:t>
-            </a:r>
-            <a:r>
-              <a:rPr i="1" lang="en-US" sz="1400" dirty="0">
+              <a:t> and </a:t>
+            </a:r>
+            <a:r>
+              <a:rPr lang="en-US" sz="1400" i="1" dirty="0">
                 <a:solidFill>
                   <a:schemeClr val="tx1"/>
                 </a:solidFill>
@@ -11230,7 +10602,7 @@
                   <a:schemeClr val="tx1"/>
                 </a:solidFill>
               </a:rPr>
-              <a:t xml:space="preserve"> respectively</a:t>
+              <a:t> respectively</a:t>
             </a:r>
             <a:endParaRPr lang="en-US" sz="1400" dirty="0"/>
           </a:p>
@@ -11257,7 +10629,7 @@
           <a:bodyPr wrap="square" lIns="0" tIns="0" rIns="0" bIns="0" rtlCol="0" anchor="t"/>
           <a:lstStyle/>
           <a:p>
-            <a:pPr indent="0" marL="0">
+            <a:pPr marL="0" indent="0">
               <a:buNone/>
             </a:pPr>
             <a:r>
@@ -11298,7 +10670,7 @@
             <a:prstDash val="solid"/>
           </a:ln>
           <a:effectLst>
-            <a:outerShdw sx="100000" sy="100000" kx="0" ky="0" algn="bl" rotWithShape="0" blurRad="101600" dist="25400" dir="5400000">
+            <a:outerShdw blurRad="101600" dist="25400" dir="5400000" algn="bl" rotWithShape="0">
               <a:srgbClr val="0F1B33">
                 <a:alpha val="12000"/>
               </a:srgbClr>
@@ -11327,7 +10699,7 @@
           <a:bodyPr wrap="square" lIns="0" tIns="0" rIns="0" bIns="0" rtlCol="0" anchor="t"/>
           <a:lstStyle/>
           <a:p>
-            <a:pPr indent="0" marL="0">
+            <a:pPr marL="0" indent="0">
               <a:buNone/>
             </a:pPr>
             <a:r>
@@ -11363,7 +10735,7 @@
           <a:bodyPr wrap="square" lIns="0" tIns="0" rIns="0" bIns="0" rtlCol="0" anchor="t"/>
           <a:lstStyle/>
           <a:p>
-            <a:pPr indent="0" marL="0">
+            <a:pPr marL="0" indent="0">
               <a:buNone/>
             </a:pPr>
             <a:r>
@@ -11372,10 +10744,10 @@
                   <a:schemeClr val="bg1"/>
                 </a:solidFill>
               </a:rPr>
-              <a:t xml:space="preserve">Chirp mass, merger time and SNR must be recovered by the same shared features. If they are, a failure on </a:t>
-            </a:r>
-            <a:r>
-              <a:rPr i="1" lang="en-US" sz="1600" dirty="0">
+              <a:t>Chirp mass, merger time and SNR must be recovered by the same shared features. If they are, a failure on </a:t>
+            </a:r>
+            <a:r>
+              <a:rPr lang="en-US" sz="1600" i="1" dirty="0">
                 <a:solidFill>
                   <a:schemeClr val="bg1"/>
                 </a:solidFill>
@@ -11383,7 +10755,7 @@
               <a:t>φ</a:t>
             </a:r>
             <a:r>
-              <a:rPr baseline="-25000" lang="en-US" sz="1600" dirty="0">
+              <a:rPr lang="en-US" sz="1600" baseline="-25000" dirty="0">
                 <a:solidFill>
                   <a:schemeClr val="bg1"/>
                 </a:solidFill>
@@ -11396,10 +10768,10 @@
                   <a:schemeClr val="bg1"/>
                 </a:solidFill>
               </a:rPr>
-              <a:t xml:space="preserve"> and </a:t>
-            </a:r>
-            <a:r>
-              <a:rPr i="1" lang="en-US" sz="1600" dirty="0">
+              <a:t> and </a:t>
+            </a:r>
+            <a:r>
+              <a:rPr lang="en-US" sz="1600" i="1" dirty="0">
                 <a:solidFill>
                   <a:schemeClr val="bg1"/>
                 </a:solidFill>
@@ -11412,45 +10784,9 @@
                   <a:schemeClr val="bg1"/>
                 </a:solidFill>
               </a:rPr>
-              <a:t xml:space="preserve"> is a statement about those angles, not about the pipeline.</a:t>
+              <a:t> is a statement about those angles, not about the pipeline.</a:t>
             </a:r>
             <a:endParaRPr lang="en-US" sz="1600" dirty="0"/>
-          </a:p>
-        </p:txBody>
-      </p:sp>
-      <p:sp>
-        <p:nvSpPr>
-          <p:cNvPr id="20" name="source"/>
-          <p:cNvSpPr txBox="1"/>
-          <p:nvPr/>
-        </p:nvSpPr>
-        <p:spPr>
-          <a:xfrm>
-            <a:off x="548640" y="6400800"/>
-            <a:ext cx="10424160" cy="274320"/>
-          </a:xfrm>
-          <a:prstGeom prst="rect">
-            <a:avLst/>
-          </a:prstGeom>
-          <a:noFill/>
-          <a:ln/>
-        </p:spPr>
-        <p:txBody>
-          <a:bodyPr wrap="square" lIns="0" tIns="0" rIns="0" bIns="0" rtlCol="0" anchor="t"/>
-          <a:lstStyle/>
-          <a:p>
-            <a:pPr indent="0" marL="0">
-              <a:buNone/>
-            </a:pPr>
-            <a:r>
-              <a:rPr lang="en-US" sz="1000" dirty="0">
-                <a:solidFill>
-                  <a:schemeClr val="accent5"/>
-                </a:solidFill>
-              </a:rPr>
-              <a:t>Source: paper_summary.md, "What we did"</a:t>
-            </a:r>
-            <a:endParaRPr lang="en-US" sz="1000" dirty="0"/>
           </a:p>
         </p:txBody>
       </p:sp>
@@ -11474,7 +10810,7 @@
           </a:prstGeom>
           <a:extLst>
             <a:ext uri="{C572A759-6A51-4108-AA02-DFA0A04FC94B}">
-              <ma14:wrappingTextBoxFlag xmlns:ma14="http://schemas.microsoft.com/office/mac/drawingml/2011/main" val="0"/>
+              <ma14:wrappingTextBoxFlag xmlns:ma14="http://schemas.microsoft.com/office/mac/drawingml/2011/main" xmlns="" val="0"/>
             </a:ext>
           </a:extLst>
         </p:spPr>
@@ -11492,7 +10828,7 @@
           <a:p>
             <a:pPr algn="r"/>
             <a:fld id="{F7021451-1387-4CA6-816F-3879F97B5CBC}" type="slidenum">
-              <a:rPr b="0" lang="en-US"/>
+              <a:rPr lang="en-US" b="0"/>
               <a:t>5</a:t>
             </a:fld>
             <a:endParaRPr lang="en-US"/>
@@ -11527,9 +10863,11 @@
       <p:sp>
         <p:nvSpPr>
           <p:cNvPr id="3" name="Text 0"/>
-          <p:cNvSpPr/>
+          <p:cNvSpPr>
+            <a:spLocks noGrp="1"/>
+          </p:cNvSpPr>
           <p:nvPr>
-            <p:ph idx="100" type="title" hasCustomPrompt="1"/>
+            <p:ph type="title" idx="100" hasCustomPrompt="1"/>
           </p:nvPr>
         </p:nvSpPr>
         <p:spPr>
@@ -11547,7 +10885,7 @@
           <a:bodyPr wrap="square" lIns="0" tIns="0" rIns="0" bIns="0" rtlCol="0" anchor="t"/>
           <a:lstStyle/>
           <a:p>
-            <a:pPr algn="l" indent="0" marL="0">
+            <a:pPr marL="0" indent="0" algn="l">
               <a:buNone/>
             </a:pPr>
             <a:r>
@@ -11588,7 +10926,7 @@
             <a:prstDash val="solid"/>
           </a:ln>
           <a:effectLst>
-            <a:outerShdw sx="100000" sy="100000" kx="0" ky="0" algn="bl" rotWithShape="0" blurRad="101600" dist="25400" dir="5400000">
+            <a:outerShdw blurRad="101600" dist="25400" dir="5400000" algn="bl" rotWithShape="0">
               <a:srgbClr val="0F1B33">
                 <a:alpha val="12000"/>
               </a:srgbClr>
@@ -11617,7 +10955,7 @@
           <a:bodyPr wrap="square" lIns="0" tIns="0" rIns="0" bIns="0" rtlCol="0" anchor="t"/>
           <a:lstStyle/>
           <a:p>
-            <a:pPr indent="0" marL="0">
+            <a:pPr marL="0" indent="0">
               <a:buNone/>
             </a:pPr>
             <a:r>
@@ -11653,7 +10991,7 @@
           <a:bodyPr wrap="square" lIns="0" tIns="0" rIns="0" bIns="0" rtlCol="0" anchor="t"/>
           <a:lstStyle/>
           <a:p>
-            <a:pPr indent="0" marL="0">
+            <a:pPr marL="0" indent="0">
               <a:buNone/>
             </a:pPr>
             <a:r>
@@ -11692,7 +11030,7 @@
           <a:bodyPr wrap="square" lIns="0" tIns="0" rIns="0" bIns="0" rtlCol="0" anchor="t"/>
           <a:lstStyle/>
           <a:p>
-            <a:pPr indent="0" marL="0">
+            <a:pPr marL="0" indent="0">
               <a:buNone/>
             </a:pPr>
             <a:r>
@@ -11701,10 +11039,10 @@
                   <a:schemeClr val="tx1"/>
                 </a:solidFill>
               </a:rPr>
-              <a:t xml:space="preserve">TCN, plain CNN, conv-transformer, InceptionTime, ResNet. All sat at chance on </a:t>
-            </a:r>
-            <a:r>
-              <a:rPr i="1" lang="en-US" sz="1400" dirty="0">
+              <a:t>TCN, plain CNN, conv-transformer, InceptionTime, ResNet. All sat at chance on </a:t>
+            </a:r>
+            <a:r>
+              <a:rPr lang="en-US" sz="1400" i="1" dirty="0">
                 <a:solidFill>
                   <a:schemeClr val="tx1"/>
                 </a:solidFill>
@@ -11712,7 +11050,7 @@
               <a:t>φ</a:t>
             </a:r>
             <a:r>
-              <a:rPr baseline="-25000" lang="en-US" sz="1400" dirty="0">
+              <a:rPr lang="en-US" sz="1400" baseline="-25000" dirty="0">
                 <a:solidFill>
                   <a:schemeClr val="tx1"/>
                 </a:solidFill>
@@ -11725,10 +11063,10 @@
                   <a:schemeClr val="tx1"/>
                 </a:solidFill>
               </a:rPr>
-              <a:t xml:space="preserve"> and </a:t>
-            </a:r>
-            <a:r>
-              <a:rPr i="1" lang="en-US" sz="1400" dirty="0">
+              <a:t> and </a:t>
+            </a:r>
+            <a:r>
+              <a:rPr lang="en-US" sz="1400" i="1" dirty="0">
                 <a:solidFill>
                   <a:schemeClr val="tx1"/>
                 </a:solidFill>
@@ -11798,7 +11136,7 @@
             <a:prstDash val="solid"/>
           </a:ln>
           <a:effectLst>
-            <a:outerShdw sx="100000" sy="100000" kx="0" ky="0" algn="bl" rotWithShape="0" blurRad="101600" dist="25400" dir="5400000">
+            <a:outerShdw blurRad="101600" dist="25400" dir="5400000" algn="bl" rotWithShape="0">
               <a:srgbClr val="0F1B33">
                 <a:alpha val="12000"/>
               </a:srgbClr>
@@ -11827,7 +11165,7 @@
           <a:bodyPr wrap="square" lIns="0" tIns="0" rIns="0" bIns="0" rtlCol="0" anchor="t"/>
           <a:lstStyle/>
           <a:p>
-            <a:pPr indent="0" marL="0">
+            <a:pPr marL="0" indent="0">
               <a:buNone/>
             </a:pPr>
             <a:r>
@@ -11863,7 +11201,7 @@
           <a:bodyPr wrap="square" lIns="0" tIns="0" rIns="0" bIns="0" rtlCol="0" anchor="t"/>
           <a:lstStyle/>
           <a:p>
-            <a:pPr indent="0" marL="0">
+            <a:pPr marL="0" indent="0">
               <a:buNone/>
             </a:pPr>
             <a:r>
@@ -11875,10 +11213,10 @@
                 <a:ea typeface="Cambria" pitchFamily="34" charset="-122"/>
                 <a:cs typeface="Cambria" pitchFamily="34" charset="-120"/>
               </a:rPr>
-              <a:t xml:space="preserve">Positive-control </a:t>
-            </a:r>
-            <a:r>
-              <a:rPr i="1" lang="en-US" sz="1800" b="1" dirty="0">
+              <a:t>Positive-control </a:t>
+            </a:r>
+            <a:r>
+              <a:rPr lang="en-US" sz="1800" b="1" i="1" dirty="0">
                 <a:solidFill>
                   <a:schemeClr val="tx1"/>
                 </a:solidFill>
@@ -11889,7 +11227,7 @@
               <a:t>R</a:t>
             </a:r>
             <a:r>
-              <a:rPr baseline="30000" lang="en-US" sz="1800" b="1" dirty="0">
+              <a:rPr lang="en-US" sz="1800" b="1" baseline="30000" dirty="0">
                 <a:solidFill>
                   <a:schemeClr val="tx1"/>
                 </a:solidFill>
@@ -11924,7 +11262,7 @@
           <a:bodyPr wrap="square" lIns="0" tIns="0" rIns="0" bIns="0" rtlCol="0" anchor="t"/>
           <a:lstStyle/>
           <a:p>
-            <a:pPr indent="0" marL="0">
+            <a:pPr marL="0" indent="0">
               <a:buNone/>
             </a:pPr>
             <a:r>
@@ -11990,7 +11328,7 @@
             <a:prstDash val="solid"/>
           </a:ln>
           <a:effectLst>
-            <a:outerShdw sx="100000" sy="100000" kx="0" ky="0" algn="bl" rotWithShape="0" blurRad="101600" dist="25400" dir="5400000">
+            <a:outerShdw blurRad="101600" dist="25400" dir="5400000" algn="bl" rotWithShape="0">
               <a:srgbClr val="0F1B33">
                 <a:alpha val="12000"/>
               </a:srgbClr>
@@ -12019,7 +11357,7 @@
           <a:bodyPr wrap="square" lIns="0" tIns="0" rIns="0" bIns="0" rtlCol="0" anchor="t"/>
           <a:lstStyle/>
           <a:p>
-            <a:pPr indent="0" marL="0">
+            <a:pPr marL="0" indent="0">
               <a:buNone/>
             </a:pPr>
             <a:r>
@@ -12055,7 +11393,7 @@
           <a:bodyPr wrap="square" lIns="0" tIns="0" rIns="0" bIns="0" rtlCol="0" anchor="t"/>
           <a:lstStyle/>
           <a:p>
-            <a:pPr indent="0" marL="0">
+            <a:pPr marL="0" indent="0">
               <a:buNone/>
             </a:pPr>
             <a:r>
@@ -12094,7 +11432,7 @@
           <a:bodyPr wrap="square" lIns="0" tIns="0" rIns="0" bIns="0" rtlCol="0" anchor="t"/>
           <a:lstStyle/>
           <a:p>
-            <a:pPr indent="0" marL="0">
+            <a:pPr marL="0" indent="0">
               <a:buNone/>
             </a:pPr>
             <a:r>
@@ -12106,7 +11444,7 @@
               <a:t>POC</a:t>
             </a:r>
             <a:r>
-              <a:rPr baseline="-25000" lang="en-US" sz="1400" dirty="0">
+              <a:rPr lang="en-US" sz="1400" baseline="-25000" dirty="0">
                 <a:solidFill>
                   <a:schemeClr val="bg1"/>
                 </a:solidFill>
@@ -12119,7 +11457,15 @@
                   <a:schemeClr val="bg1"/>
                 </a:solidFill>
               </a:rPr>
-              <a:t xml:space="preserve">, </a:t>
+              <a:t>, POC</a:t>
+            </a:r>
+            <a:r>
+              <a:rPr lang="en-US" sz="1400" baseline="-25000" dirty="0">
+                <a:solidFill>
+                  <a:schemeClr val="bg1"/>
+                </a:solidFill>
+              </a:rPr>
+              <a:t>B</a:t>
             </a:r>
             <a:r>
               <a:rPr lang="en-US" sz="1400" dirty="0">
@@ -12127,50 +11473,10 @@
                   <a:schemeClr val="bg1"/>
                 </a:solidFill>
               </a:rPr>
-              <a:t>POC</a:t>
-            </a:r>
-            <a:r>
-              <a:rPr baseline="-25000" lang="en-US" sz="1400" dirty="0">
-                <a:solidFill>
-                  <a:schemeClr val="bg1"/>
-                </a:solidFill>
-              </a:rPr>
-              <a:t>B</a:t>
-            </a:r>
-            <a:r>
-              <a:rPr lang="en-US" sz="1400" dirty="0">
-                <a:solidFill>
-                  <a:schemeClr val="bg1"/>
-                </a:solidFill>
-              </a:rPr>
-              <a:t xml:space="preserve">, </a:t>
-            </a:r>
-            <a:r>
-              <a:rPr lang="en-US" sz="1400" dirty="0">
-                <a:solidFill>
-                  <a:schemeClr val="bg1"/>
-                </a:solidFill>
-              </a:rPr>
-              <a:t>TCN</a:t>
-            </a:r>
-            <a:r>
-              <a:rPr lang="en-US" sz="1400" dirty="0">
-                <a:solidFill>
-                  <a:schemeClr val="bg1"/>
-                </a:solidFill>
-              </a:rPr>
-              <a:t xml:space="preserve">, </a:t>
-            </a:r>
-            <a:r>
-              <a:rPr lang="en-US" sz="1400" dirty="0">
-                <a:solidFill>
-                  <a:schemeClr val="bg1"/>
-                </a:solidFill>
-              </a:rPr>
-              <a:t>CNN</a:t>
-            </a:r>
-            <a:r>
-              <a:rPr baseline="-25000" lang="en-US" sz="1400" dirty="0">
+              <a:t>, TCN, CNN</a:t>
+            </a:r>
+            <a:r>
+              <a:rPr lang="en-US" sz="1400" baseline="-25000" dirty="0">
                 <a:solidFill>
                   <a:schemeClr val="bg1"/>
                 </a:solidFill>
@@ -12215,7 +11521,7 @@
             <a:prstDash val="solid"/>
           </a:ln>
           <a:effectLst>
-            <a:outerShdw sx="100000" sy="100000" kx="0" ky="0" algn="bl" rotWithShape="0" blurRad="101600" dist="25400" dir="5400000">
+            <a:outerShdw blurRad="101600" dist="25400" dir="5400000" algn="bl" rotWithShape="0">
               <a:srgbClr val="0F1B33">
                 <a:alpha val="12000"/>
               </a:srgbClr>
@@ -12244,7 +11550,7 @@
           <a:bodyPr wrap="square" lIns="0" tIns="0" rIns="0" bIns="0" rtlCol="0" anchor="t"/>
           <a:lstStyle/>
           <a:p>
-            <a:pPr indent="0" marL="0">
+            <a:pPr marL="0" indent="0">
               <a:buNone/>
             </a:pPr>
             <a:r>
@@ -12296,7 +11602,7 @@
               <a:t>POC</a:t>
             </a:r>
             <a:r>
-              <a:rPr baseline="-25000" lang="en-US" sz="1600" dirty="0">
+              <a:rPr lang="en-US" sz="1600" baseline="-25000" dirty="0">
                 <a:solidFill>
                   <a:schemeClr val="tx1"/>
                 </a:solidFill>
@@ -12330,7 +11636,7 @@
               <a:t>POC</a:t>
             </a:r>
             <a:r>
-              <a:rPr baseline="-25000" lang="en-US" sz="1600" dirty="0">
+              <a:rPr lang="en-US" sz="1600" baseline="-25000" dirty="0">
                 <a:solidFill>
                   <a:schemeClr val="tx1"/>
                 </a:solidFill>
@@ -12346,7 +11652,7 @@
               <a:t>: explicit combination-space head (2</a:t>
             </a:r>
             <a:r>
-              <a:rPr i="1" lang="en-US" sz="1600" dirty="0">
+              <a:rPr lang="en-US" sz="1600" i="1" dirty="0">
                 <a:solidFill>
                   <a:schemeClr val="tx1"/>
                 </a:solidFill>
@@ -12354,7 +11660,7 @@
               <a:t>φ</a:t>
             </a:r>
             <a:r>
-              <a:rPr baseline="-25000" lang="en-US" sz="1600" dirty="0">
+              <a:rPr lang="en-US" sz="1600" baseline="-25000" dirty="0">
                 <a:solidFill>
                   <a:schemeClr val="tx1"/>
                 </a:solidFill>
@@ -12367,10 +11673,10 @@
                   <a:schemeClr val="tx1"/>
                 </a:solidFill>
               </a:rPr>
-              <a:t xml:space="preserve"> + 2</a:t>
-            </a:r>
-            <a:r>
-              <a:rPr i="1" lang="en-US" sz="1600" dirty="0">
+              <a:t> + 2</a:t>
+            </a:r>
+            <a:r>
+              <a:rPr lang="en-US" sz="1600" i="1" dirty="0">
                 <a:solidFill>
                   <a:schemeClr val="tx1"/>
                 </a:solidFill>
@@ -12386,7 +11692,7 @@
               <a:t>, 2</a:t>
             </a:r>
             <a:r>
-              <a:rPr i="1" lang="en-US" sz="1600" dirty="0">
+              <a:rPr lang="en-US" sz="1600" i="1" dirty="0">
                 <a:solidFill>
                   <a:schemeClr val="tx1"/>
                 </a:solidFill>
@@ -12394,7 +11700,7 @@
               <a:t>φ</a:t>
             </a:r>
             <a:r>
-              <a:rPr baseline="-25000" lang="en-US" sz="1600" dirty="0">
+              <a:rPr lang="en-US" sz="1600" baseline="-25000" dirty="0">
                 <a:solidFill>
                   <a:schemeClr val="tx1"/>
                 </a:solidFill>
@@ -12407,10 +11713,10 @@
                   <a:schemeClr val="tx1"/>
                 </a:solidFill>
               </a:rPr>
-              <a:t xml:space="preserve"> − 2</a:t>
-            </a:r>
-            <a:r>
-              <a:rPr i="1" lang="en-US" sz="1600" dirty="0">
+              <a:t> − 2</a:t>
+            </a:r>
+            <a:r>
+              <a:rPr lang="en-US" sz="1600" i="1" dirty="0">
                 <a:solidFill>
                   <a:schemeClr val="tx1"/>
                 </a:solidFill>
@@ -12455,7 +11761,7 @@
             <a:prstDash val="solid"/>
           </a:ln>
           <a:effectLst>
-            <a:outerShdw sx="100000" sy="100000" kx="0" ky="0" algn="bl" rotWithShape="0" blurRad="101600" dist="25400" dir="5400000">
+            <a:outerShdw blurRad="101600" dist="25400" dir="5400000" algn="bl" rotWithShape="0">
               <a:srgbClr val="0F1B33">
                 <a:alpha val="12000"/>
               </a:srgbClr>
@@ -12484,7 +11790,7 @@
           <a:bodyPr wrap="square" lIns="0" tIns="0" rIns="0" bIns="0" rtlCol="0" anchor="t"/>
           <a:lstStyle/>
           <a:p>
-            <a:pPr indent="0" marL="0">
+            <a:pPr marL="0" indent="0">
               <a:buNone/>
             </a:pPr>
             <a:r>
@@ -12528,7 +11834,7 @@
               <a:buChar char="•"/>
             </a:pPr>
             <a:r>
-              <a:rPr i="1" lang="en-US" sz="1600" dirty="0">
+              <a:rPr lang="en-US" sz="1600" i="1" dirty="0">
                 <a:solidFill>
                   <a:schemeClr val="tx1"/>
                 </a:solidFill>
@@ -12541,7 +11847,7 @@
                   <a:schemeClr val="tx1"/>
                 </a:solidFill>
               </a:rPr>
-              <a:t xml:space="preserve"> = 0.01, 0.05 and 0.10 on the TCN models</a:t>
+              <a:t> = 0.01, 0.05 and 0.10 on the TCN models</a:t>
             </a:r>
             <a:endParaRPr lang="en-US" sz="1600" dirty="0"/>
           </a:p>
@@ -12562,42 +11868,6 @@
               <a:t>Aim: keep the raw head outputs from shrinking to zero magnitude</a:t>
             </a:r>
             <a:endParaRPr lang="en-US" sz="1600" dirty="0"/>
-          </a:p>
-        </p:txBody>
-      </p:sp>
-      <p:sp>
-        <p:nvSpPr>
-          <p:cNvPr id="24" name="source"/>
-          <p:cNvSpPr txBox="1"/>
-          <p:nvPr/>
-        </p:nvSpPr>
-        <p:spPr>
-          <a:xfrm>
-            <a:off x="548640" y="6400800"/>
-            <a:ext cx="10424160" cy="274320"/>
-          </a:xfrm>
-          <a:prstGeom prst="rect">
-            <a:avLst/>
-          </a:prstGeom>
-          <a:noFill/>
-          <a:ln/>
-        </p:spPr>
-        <p:txBody>
-          <a:bodyPr wrap="square" lIns="0" tIns="0" rIns="0" bIns="0" rtlCol="0" anchor="t"/>
-          <a:lstStyle/>
-          <a:p>
-            <a:pPr indent="0" marL="0">
-              <a:buNone/>
-            </a:pPr>
-            <a:r>
-              <a:rPr lang="en-US" sz="1000" dirty="0">
-                <a:solidFill>
-                  <a:schemeClr val="accent5"/>
-                </a:solidFill>
-              </a:rPr>
-              <a:t>Source: paper_summary.md; closing_summary.md addendum (2026-10-19)</a:t>
-            </a:r>
-            <a:endParaRPr lang="en-US" sz="1000" dirty="0"/>
           </a:p>
         </p:txBody>
       </p:sp>
@@ -12621,7 +11891,7 @@
           </a:prstGeom>
           <a:extLst>
             <a:ext uri="{C572A759-6A51-4108-AA02-DFA0A04FC94B}">
-              <ma14:wrappingTextBoxFlag xmlns:ma14="http://schemas.microsoft.com/office/mac/drawingml/2011/main" val="0"/>
+              <ma14:wrappingTextBoxFlag xmlns:ma14="http://schemas.microsoft.com/office/mac/drawingml/2011/main" xmlns="" val="0"/>
             </a:ext>
           </a:extLst>
         </p:spPr>
@@ -12639,7 +11909,7 @@
           <a:p>
             <a:pPr algn="r"/>
             <a:fld id="{F7021451-1387-4CA6-816F-3879F97B5CBC}" type="slidenum">
-              <a:rPr b="0" lang="en-US"/>
+              <a:rPr lang="en-US" b="0"/>
               <a:t>6</a:t>
             </a:fld>
             <a:endParaRPr lang="en-US"/>
@@ -12674,9 +11944,11 @@
       <p:sp>
         <p:nvSpPr>
           <p:cNvPr id="3" name="Text 0"/>
-          <p:cNvSpPr/>
+          <p:cNvSpPr>
+            <a:spLocks noGrp="1"/>
+          </p:cNvSpPr>
           <p:nvPr>
-            <p:ph idx="100" type="title" hasCustomPrompt="1"/>
+            <p:ph type="title" idx="100" hasCustomPrompt="1"/>
           </p:nvPr>
         </p:nvSpPr>
         <p:spPr>
@@ -12694,7 +11966,7 @@
           <a:bodyPr wrap="square" lIns="0" tIns="0" rIns="0" bIns="0" rtlCol="0" anchor="t"/>
           <a:lstStyle/>
           <a:p>
-            <a:pPr algn="l" indent="0" marL="0">
+            <a:pPr marL="0" indent="0" algn="l">
               <a:buNone/>
             </a:pPr>
             <a:r>
@@ -12711,14 +11983,14 @@
       </p:sp>
       <p:pic>
         <p:nvPicPr>
-          <p:cNvPr id="4" name="Image 0" descr="Health-check heatmap: positive-control heads green, φc and ψ heads dead or collapsed in all four models">    </p:cNvPr>
+          <p:cNvPr id="4" name="Image 0" descr="Health-check heatmap: positive-control heads green, φc and ψ heads dead or collapsed in all four models"/>
           <p:cNvPicPr>
             <a:picLocks noChangeAspect="1"/>
           </p:cNvPicPr>
           <p:nvPr/>
         </p:nvPicPr>
         <p:blipFill>
-          <a:blip r:embed="rId1"/>
+          <a:blip r:embed="rId3"/>
           <a:stretch>
             <a:fillRect/>
           </a:stretch>
@@ -12759,7 +12031,7 @@
             <a:prstDash val="solid"/>
           </a:ln>
           <a:effectLst>
-            <a:outerShdw sx="100000" sy="100000" kx="0" ky="0" algn="bl" rotWithShape="0" blurRad="101600" dist="25400" dir="5400000">
+            <a:outerShdw blurRad="101600" dist="25400" dir="5400000" algn="bl" rotWithShape="0">
               <a:srgbClr val="0F1B33">
                 <a:alpha val="12000"/>
               </a:srgbClr>
@@ -12788,7 +12060,7 @@
           <a:bodyPr wrap="square" lIns="0" tIns="0" rIns="0" bIns="0" rtlCol="0" anchor="t"/>
           <a:lstStyle/>
           <a:p>
-            <a:pPr indent="0" marL="0">
+            <a:pPr marL="0" indent="0">
               <a:buNone/>
             </a:pPr>
             <a:r>
@@ -12827,7 +12099,7 @@
           <a:bodyPr wrap="square" lIns="0" tIns="0" rIns="0" bIns="0" rtlCol="0" anchor="t"/>
           <a:lstStyle/>
           <a:p>
-            <a:pPr indent="0" marL="0">
+            <a:pPr marL="0" indent="0">
               <a:buNone/>
             </a:pPr>
             <a:r>
@@ -12836,10 +12108,10 @@
                   <a:schemeClr val="tx1"/>
                 </a:solidFill>
               </a:rPr>
-              <a:t xml:space="preserve">Chirp mass </a:t>
-            </a:r>
-            <a:r>
-              <a:rPr i="1" lang="en-US" sz="1400" dirty="0">
+              <a:t>Chirp mass </a:t>
+            </a:r>
+            <a:r>
+              <a:rPr lang="en-US" sz="1400" i="1" dirty="0">
                 <a:solidFill>
                   <a:schemeClr val="tx1"/>
                 </a:solidFill>
@@ -12847,7 +12119,7 @@
               <a:t>R</a:t>
             </a:r>
             <a:r>
-              <a:rPr baseline="30000" lang="en-US" sz="1400" dirty="0">
+              <a:rPr lang="en-US" sz="1400" baseline="30000" dirty="0">
                 <a:solidFill>
                   <a:schemeClr val="tx1"/>
                 </a:solidFill>
@@ -12860,7 +12132,7 @@
                   <a:schemeClr val="tx1"/>
                 </a:solidFill>
               </a:rPr>
-              <a:t xml:space="preserve"> 0.92–0.96, merger time 0.90–0.92, SNR 0.75–0.79: the shared features carry real information.</a:t>
+              <a:t> 0.92–0.96, merger time 0.90–0.92, SNR 0.75–0.79: the shared features carry real information.</a:t>
             </a:r>
             <a:endParaRPr lang="en-US" sz="1400" dirty="0"/>
           </a:p>
@@ -12892,7 +12164,7 @@
             <a:prstDash val="solid"/>
           </a:ln>
           <a:effectLst>
-            <a:outerShdw sx="100000" sy="100000" kx="0" ky="0" algn="bl" rotWithShape="0" blurRad="101600" dist="25400" dir="5400000">
+            <a:outerShdw blurRad="101600" dist="25400" dir="5400000" algn="bl" rotWithShape="0">
               <a:srgbClr val="0F1B33">
                 <a:alpha val="12000"/>
               </a:srgbClr>
@@ -12921,11 +12193,11 @@
           <a:bodyPr wrap="square" lIns="0" tIns="0" rIns="0" bIns="0" rtlCol="0" anchor="t"/>
           <a:lstStyle/>
           <a:p>
-            <a:pPr indent="0" marL="0">
+            <a:pPr marL="0" indent="0">
               <a:buNone/>
             </a:pPr>
             <a:r>
-              <a:rPr i="1" lang="en-US" sz="2000" b="1" dirty="0">
+              <a:rPr lang="en-US" sz="2000" b="1" i="1" dirty="0">
                 <a:solidFill>
                   <a:schemeClr val="accent4"/>
                 </a:solidFill>
@@ -12936,7 +12208,7 @@
               <a:t>φ</a:t>
             </a:r>
             <a:r>
-              <a:rPr baseline="-25000" lang="en-US" sz="2000" b="1" dirty="0">
+              <a:rPr lang="en-US" sz="2000" b="1" baseline="-25000" dirty="0">
                 <a:solidFill>
                   <a:schemeClr val="accent4"/>
                 </a:solidFill>
@@ -12955,10 +12227,10 @@
                 <a:ea typeface="Cambria" pitchFamily="34" charset="-122"/>
                 <a:cs typeface="Cambria" pitchFamily="34" charset="-120"/>
               </a:rPr>
-              <a:t xml:space="preserve"> and </a:t>
-            </a:r>
-            <a:r>
-              <a:rPr i="1" lang="en-US" sz="2000" b="1" dirty="0">
+              <a:t> and </a:t>
+            </a:r>
+            <a:r>
+              <a:rPr lang="en-US" sz="2000" b="1" i="1" dirty="0">
                 <a:solidFill>
                   <a:schemeClr val="accent4"/>
                 </a:solidFill>
@@ -12977,7 +12249,7 @@
                 <a:ea typeface="Cambria" pitchFamily="34" charset="-122"/>
                 <a:cs typeface="Cambria" pitchFamily="34" charset="-120"/>
               </a:rPr>
-              <a:t xml:space="preserve"> do not</a:t>
+              <a:t> do not</a:t>
             </a:r>
             <a:endParaRPr lang="en-US" sz="2000" dirty="0"/>
           </a:p>
@@ -13004,7 +12276,7 @@
           <a:bodyPr wrap="square" lIns="0" tIns="0" rIns="0" bIns="0" rtlCol="0" anchor="t"/>
           <a:lstStyle/>
           <a:p>
-            <a:pPr indent="0" marL="0">
+            <a:pPr marL="0" indent="0">
               <a:buNone/>
             </a:pPr>
             <a:r>
@@ -13013,10 +12285,10 @@
                   <a:schemeClr val="tx1"/>
                 </a:solidFill>
               </a:rPr>
-              <a:t xml:space="preserve">Every configuration converges to the random-guess baseline (MAE ≈ 1.55–1.59 rad for </a:t>
-            </a:r>
-            <a:r>
-              <a:rPr i="1" lang="en-US" sz="1400" dirty="0">
+              <a:t>Every configuration converges to the random-guess baseline (MAE ≈ 1.55–1.59 rad for </a:t>
+            </a:r>
+            <a:r>
+              <a:rPr lang="en-US" sz="1400" i="1" dirty="0">
                 <a:solidFill>
                   <a:schemeClr val="tx1"/>
                 </a:solidFill>
@@ -13024,7 +12296,7 @@
               <a:t>φ</a:t>
             </a:r>
             <a:r>
-              <a:rPr baseline="-25000" lang="en-US" sz="1400" dirty="0">
+              <a:rPr lang="en-US" sz="1400" baseline="-25000" dirty="0">
                 <a:solidFill>
                   <a:schemeClr val="tx1"/>
                 </a:solidFill>
@@ -13069,7 +12341,7 @@
             <a:prstDash val="solid"/>
           </a:ln>
           <a:effectLst>
-            <a:outerShdw sx="100000" sy="100000" kx="0" ky="0" algn="bl" rotWithShape="0" blurRad="101600" dist="25400" dir="5400000">
+            <a:outerShdw blurRad="101600" dist="25400" dir="5400000" algn="bl" rotWithShape="0">
               <a:srgbClr val="0F1B33">
                 <a:alpha val="12000"/>
               </a:srgbClr>
@@ -13098,7 +12370,7 @@
           <a:bodyPr wrap="square" lIns="0" tIns="0" rIns="0" bIns="0" rtlCol="0" anchor="t"/>
           <a:lstStyle/>
           <a:p>
-            <a:pPr indent="0" marL="0">
+            <a:pPr marL="0" indent="0">
               <a:buNone/>
             </a:pPr>
             <a:r>
@@ -13137,7 +12409,7 @@
           <a:bodyPr wrap="square" lIns="0" tIns="0" rIns="0" bIns="0" rtlCol="0" anchor="t"/>
           <a:lstStyle/>
           <a:p>
-            <a:pPr indent="0" marL="0">
+            <a:pPr marL="0" indent="0">
               <a:buNone/>
             </a:pPr>
             <a:r>
@@ -13149,7 +12421,7 @@
               <a:t>POC</a:t>
             </a:r>
             <a:r>
-              <a:rPr baseline="-25000" lang="en-US" sz="1400" dirty="0">
+              <a:rPr lang="en-US" sz="1400" baseline="-25000" dirty="0">
                 <a:solidFill>
                   <a:schemeClr val="tx1"/>
                 </a:solidFill>
@@ -13162,10 +12434,10 @@
                   <a:schemeClr val="tx1"/>
                 </a:solidFill>
               </a:rPr>
-              <a:t xml:space="preserve"> (</a:t>
-            </a:r>
-            <a:r>
-              <a:rPr i="1" lang="en-US" sz="1400" dirty="0">
+              <a:t> (</a:t>
+            </a:r>
+            <a:r>
+              <a:rPr lang="en-US" sz="1400" i="1" dirty="0">
                 <a:solidFill>
                   <a:schemeClr val="tx1"/>
                 </a:solidFill>
@@ -13178,7 +12450,15 @@
                   <a:schemeClr val="tx1"/>
                 </a:solidFill>
               </a:rPr>
-              <a:t xml:space="preserve">) and </a:t>
+              <a:t>) and POC</a:t>
+            </a:r>
+            <a:r>
+              <a:rPr lang="en-US" sz="1400" baseline="-25000" dirty="0">
+                <a:solidFill>
+                  <a:schemeClr val="tx1"/>
+                </a:solidFill>
+              </a:rPr>
+              <a:t>B</a:t>
             </a:r>
             <a:r>
               <a:rPr lang="en-US" sz="1400" dirty="0">
@@ -13186,15 +12466,23 @@
                   <a:schemeClr val="tx1"/>
                 </a:solidFill>
               </a:rPr>
-              <a:t>POC</a:t>
-            </a:r>
-            <a:r>
-              <a:rPr baseline="-25000" lang="en-US" sz="1400" dirty="0">
-                <a:solidFill>
-                  <a:schemeClr val="tx1"/>
-                </a:solidFill>
-              </a:rPr>
-              <a:t>B</a:t>
+              <a:t> (</a:t>
+            </a:r>
+            <a:r>
+              <a:rPr lang="en-US" sz="1400" i="1" dirty="0">
+                <a:solidFill>
+                  <a:schemeClr val="tx1"/>
+                </a:solidFill>
+              </a:rPr>
+              <a:t>φ</a:t>
+            </a:r>
+            <a:r>
+              <a:rPr lang="en-US" sz="1400" baseline="-25000" dirty="0">
+                <a:solidFill>
+                  <a:schemeClr val="tx1"/>
+                </a:solidFill>
+              </a:rPr>
+              <a:t>c</a:t>
             </a:r>
             <a:r>
               <a:rPr lang="en-US" sz="1400" dirty="0">
@@ -13202,23 +12490,15 @@
                   <a:schemeClr val="tx1"/>
                 </a:solidFill>
               </a:rPr>
-              <a:t xml:space="preserve"> (</a:t>
-            </a:r>
-            <a:r>
-              <a:rPr i="1" lang="en-US" sz="1400" dirty="0">
-                <a:solidFill>
-                  <a:schemeClr val="tx1"/>
-                </a:solidFill>
-              </a:rPr>
-              <a:t>φ</a:t>
-            </a:r>
-            <a:r>
-              <a:rPr baseline="-25000" lang="en-US" sz="1400" dirty="0">
-                <a:solidFill>
-                  <a:schemeClr val="tx1"/>
-                </a:solidFill>
-              </a:rPr>
-              <a:t>c</a:t>
+              <a:t>, </a:t>
+            </a:r>
+            <a:r>
+              <a:rPr lang="en-US" sz="1400" i="1" dirty="0">
+                <a:solidFill>
+                  <a:schemeClr val="tx1"/>
+                </a:solidFill>
+              </a:rPr>
+              <a:t>ψ</a:t>
             </a:r>
             <a:r>
               <a:rPr lang="en-US" sz="1400" dirty="0">
@@ -13226,15 +12506,15 @@
                   <a:schemeClr val="tx1"/>
                 </a:solidFill>
               </a:rPr>
-              <a:t xml:space="preserve">, </a:t>
-            </a:r>
-            <a:r>
-              <a:rPr i="1" lang="en-US" sz="1400" dirty="0">
-                <a:solidFill>
-                  <a:schemeClr val="tx1"/>
-                </a:solidFill>
-              </a:rPr>
-              <a:t>ψ</a:t>
+              <a:t>) collapse to one angle; TCN and CNN</a:t>
+            </a:r>
+            <a:r>
+              <a:rPr lang="en-US" sz="1400" baseline="-25000" dirty="0">
+                <a:solidFill>
+                  <a:schemeClr val="tx1"/>
+                </a:solidFill>
+              </a:rPr>
+              <a:t>attention</a:t>
             </a:r>
             <a:r>
               <a:rPr lang="en-US" sz="1400" dirty="0">
@@ -13242,85 +12522,9 @@
                   <a:schemeClr val="tx1"/>
                 </a:solidFill>
               </a:rPr>
-              <a:t xml:space="preserve">) collapse to one angle; </a:t>
-            </a:r>
-            <a:r>
-              <a:rPr lang="en-US" sz="1400" dirty="0">
-                <a:solidFill>
-                  <a:schemeClr val="tx1"/>
-                </a:solidFill>
-              </a:rPr>
-              <a:t>TCN</a:t>
-            </a:r>
-            <a:r>
-              <a:rPr lang="en-US" sz="1400" dirty="0">
-                <a:solidFill>
-                  <a:schemeClr val="tx1"/>
-                </a:solidFill>
-              </a:rPr>
-              <a:t xml:space="preserve"> and </a:t>
-            </a:r>
-            <a:r>
-              <a:rPr lang="en-US" sz="1400" dirty="0">
-                <a:solidFill>
-                  <a:schemeClr val="tx1"/>
-                </a:solidFill>
-              </a:rPr>
-              <a:t>CNN</a:t>
-            </a:r>
-            <a:r>
-              <a:rPr baseline="-25000" lang="en-US" sz="1400" dirty="0">
-                <a:solidFill>
-                  <a:schemeClr val="tx1"/>
-                </a:solidFill>
-              </a:rPr>
-              <a:t>attention</a:t>
-            </a:r>
-            <a:r>
-              <a:rPr lang="en-US" sz="1400" dirty="0">
-                <a:solidFill>
-                  <a:schemeClr val="tx1"/>
-                </a:solidFill>
-              </a:rPr>
-              <a:t xml:space="preserve"> are noisy and uninformative instead.</a:t>
+              <a:t> are noisy and uninformative instead.</a:t>
             </a:r>
             <a:endParaRPr lang="en-US" sz="1400" dirty="0"/>
-          </a:p>
-        </p:txBody>
-      </p:sp>
-      <p:sp>
-        <p:nvSpPr>
-          <p:cNvPr id="14" name="source"/>
-          <p:cNvSpPr txBox="1"/>
-          <p:nvPr/>
-        </p:nvSpPr>
-        <p:spPr>
-          <a:xfrm>
-            <a:off x="548640" y="6400800"/>
-            <a:ext cx="10424160" cy="274320"/>
-          </a:xfrm>
-          <a:prstGeom prst="rect">
-            <a:avLst/>
-          </a:prstGeom>
-          <a:noFill/>
-          <a:ln/>
-        </p:spPr>
-        <p:txBody>
-          <a:bodyPr wrap="square" lIns="0" tIns="0" rIns="0" bIns="0" rtlCol="0" anchor="t"/>
-          <a:lstStyle/>
-          <a:p>
-            <a:pPr indent="0" marL="0">
-              <a:buNone/>
-            </a:pPr>
-            <a:r>
-              <a:rPr lang="en-US" sz="1000" dirty="0">
-                <a:solidFill>
-                  <a:schemeClr val="accent5"/>
-                </a:solidFill>
-              </a:rPr>
-              <a:t>Source: heatmap_throwaway_output/heatmap_throwaway_20261019_125442.png; paper_summary.md</a:t>
-            </a:r>
-            <a:endParaRPr lang="en-US" sz="1000" dirty="0"/>
           </a:p>
         </p:txBody>
       </p:sp>
@@ -13344,7 +12548,7 @@
           </a:prstGeom>
           <a:extLst>
             <a:ext uri="{C572A759-6A51-4108-AA02-DFA0A04FC94B}">
-              <ma14:wrappingTextBoxFlag xmlns:ma14="http://schemas.microsoft.com/office/mac/drawingml/2011/main" val="0"/>
+              <ma14:wrappingTextBoxFlag xmlns:ma14="http://schemas.microsoft.com/office/mac/drawingml/2011/main" xmlns="" val="0"/>
             </a:ext>
           </a:extLst>
         </p:spPr>
@@ -13362,7 +12566,7 @@
           <a:p>
             <a:pPr algn="r"/>
             <a:fld id="{F7021451-1387-4CA6-816F-3879F97B5CBC}" type="slidenum">
-              <a:rPr b="0" lang="en-US"/>
+              <a:rPr lang="en-US" b="0"/>
               <a:t>7</a:t>
             </a:fld>
             <a:endParaRPr lang="en-US"/>
@@ -13397,9 +12601,11 @@
       <p:sp>
         <p:nvSpPr>
           <p:cNvPr id="3" name="Text 0"/>
-          <p:cNvSpPr/>
+          <p:cNvSpPr>
+            <a:spLocks noGrp="1"/>
+          </p:cNvSpPr>
           <p:nvPr>
-            <p:ph idx="100" type="title" hasCustomPrompt="1"/>
+            <p:ph type="title" idx="100" hasCustomPrompt="1"/>
           </p:nvPr>
         </p:nvSpPr>
         <p:spPr>
@@ -13417,7 +12623,7 @@
           <a:bodyPr wrap="square" lIns="0" tIns="0" rIns="0" bIns="0" rtlCol="0" anchor="t"/>
           <a:lstStyle/>
           <a:p>
-            <a:pPr algn="l" indent="0" marL="0">
+            <a:pPr marL="0" indent="0" algn="l">
               <a:buNone/>
             </a:pPr>
             <a:r>
@@ -13426,10 +12632,10 @@
                   <a:schemeClr val="tx1"/>
                 </a:solidFill>
               </a:rPr>
-              <a:t xml:space="preserve">Mode collapse on </a:t>
-            </a:r>
-            <a:r>
-              <a:rPr i="1" lang="en-US" sz="3600" b="1" dirty="0">
+              <a:t>Mode collapse on </a:t>
+            </a:r>
+            <a:r>
+              <a:rPr lang="en-US" sz="3600" b="1" i="1" dirty="0">
                 <a:solidFill>
                   <a:schemeClr val="tx1"/>
                 </a:solidFill>
@@ -13442,14 +12648,14 @@
       </p:sp>
       <p:pic>
         <p:nvPicPr>
-          <p:cNvPr id="4" name="Image 0" descr="Histograms of predicted psi for four models; poc_a and poc_b are single spikes, tcn and cnn_attention are broad uninformative bands, true psi is flat">    </p:cNvPr>
+          <p:cNvPr id="4" name="Image 0" descr="Histograms of predicted psi for four models; poc_a and poc_b are single spikes, tcn and cnn_attention are broad uninformative bands, true psi is flat"/>
           <p:cNvPicPr>
             <a:picLocks noChangeAspect="1"/>
           </p:cNvPicPr>
           <p:nvPr/>
         </p:nvPicPr>
         <p:blipFill>
-          <a:blip r:embed="rId1"/>
+          <a:blip r:embed="rId3"/>
           <a:stretch>
             <a:fillRect/>
           </a:stretch>
@@ -13485,7 +12691,7 @@
           <a:bodyPr wrap="square" lIns="0" tIns="0" rIns="0" bIns="0" rtlCol="0" anchor="t"/>
           <a:lstStyle/>
           <a:p>
-            <a:pPr indent="0" marL="0">
+            <a:pPr marL="0" indent="0">
               <a:buNone/>
             </a:pPr>
             <a:r>
@@ -13494,10 +12700,10 @@
                   <a:schemeClr val="accent5"/>
                 </a:solidFill>
               </a:rPr>
-              <a:t xml:space="preserve">Grey: true </a:t>
-            </a:r>
-            <a:r>
-              <a:rPr i="1" lang="en-US" sz="1400" dirty="0">
+              <a:t>Grey: true </a:t>
+            </a:r>
+            <a:r>
+              <a:rPr lang="en-US" sz="1400" i="1" dirty="0">
                 <a:solidFill>
                   <a:schemeClr val="accent5"/>
                 </a:solidFill>
@@ -13510,7 +12716,7 @@
                   <a:schemeClr val="accent5"/>
                 </a:solidFill>
               </a:rPr>
-              <a:t xml:space="preserve"> (flat over 0 to π). Colour: model predictions on the 5,000 validation events.</a:t>
+              <a:t> (flat over 0 to π). Colour: model predictions on the 5,000 validation events.</a:t>
             </a:r>
             <a:endParaRPr lang="en-US" sz="1400" dirty="0"/>
           </a:p>
@@ -13537,7 +12743,7 @@
           <a:bodyPr wrap="square" lIns="0" tIns="0" rIns="0" bIns="0" rtlCol="0" anchor="t"/>
           <a:lstStyle/>
           <a:p>
-            <a:pPr indent="0" marL="0">
+            <a:pPr marL="0" indent="0">
               <a:buNone/>
             </a:pPr>
             <a:r>
@@ -13576,7 +12782,7 @@
           <a:bodyPr wrap="square" lIns="0" tIns="0" rIns="0" bIns="0" rtlCol="0" anchor="t"/>
           <a:lstStyle/>
           <a:p>
-            <a:pPr indent="0" marL="0">
+            <a:pPr marL="0" indent="0">
               <a:buNone/>
             </a:pPr>
             <a:r>
@@ -13585,7 +12791,15 @@
                   <a:schemeClr val="tx1"/>
                 </a:solidFill>
               </a:rPr>
-              <a:t xml:space="preserve">of </a:t>
+              <a:t>of POC</a:t>
+            </a:r>
+            <a:r>
+              <a:rPr lang="en-US" sz="1400" baseline="-25000" dirty="0">
+                <a:solidFill>
+                  <a:schemeClr val="tx1"/>
+                </a:solidFill>
+              </a:rPr>
+              <a:t>B</a:t>
             </a:r>
             <a:r>
               <a:rPr lang="en-US" sz="1400" dirty="0">
@@ -13593,15 +12807,15 @@
                   <a:schemeClr val="tx1"/>
                 </a:solidFill>
               </a:rPr>
-              <a:t>POC</a:t>
-            </a:r>
-            <a:r>
-              <a:rPr baseline="-25000" lang="en-US" sz="1400" dirty="0">
-                <a:solidFill>
-                  <a:schemeClr val="tx1"/>
-                </a:solidFill>
-              </a:rPr>
-              <a:t>B</a:t>
+              <a:t>'s 5,000 </a:t>
+            </a:r>
+            <a:r>
+              <a:rPr lang="en-US" sz="1400" i="1" dirty="0">
+                <a:solidFill>
+                  <a:schemeClr val="tx1"/>
+                </a:solidFill>
+              </a:rPr>
+              <a:t>ψ</a:t>
             </a:r>
             <a:r>
               <a:rPr lang="en-US" sz="1400" dirty="0">
@@ -13609,23 +12823,7 @@
                   <a:schemeClr val="tx1"/>
                 </a:solidFill>
               </a:rPr>
-              <a:t xml:space="preserve">'s 5,000 </a:t>
-            </a:r>
-            <a:r>
-              <a:rPr i="1" lang="en-US" sz="1400" dirty="0">
-                <a:solidFill>
-                  <a:schemeClr val="tx1"/>
-                </a:solidFill>
-              </a:rPr>
-              <a:t>ψ</a:t>
-            </a:r>
-            <a:r>
-              <a:rPr lang="en-US" sz="1400" dirty="0">
-                <a:solidFill>
-                  <a:schemeClr val="tx1"/>
-                </a:solidFill>
-              </a:rPr>
-              <a:t xml:space="preserve"> predictions fall in one histogram bin</a:t>
+              <a:t> predictions fall in one histogram bin</a:t>
             </a:r>
             <a:endParaRPr lang="en-US" sz="1400" dirty="0"/>
           </a:p>
@@ -13657,7 +12855,7 @@
             <a:prstDash val="solid"/>
           </a:ln>
           <a:effectLst>
-            <a:outerShdw sx="100000" sy="100000" kx="0" ky="0" algn="bl" rotWithShape="0" blurRad="101600" dist="25400" dir="5400000">
+            <a:outerShdw blurRad="101600" dist="25400" dir="5400000" algn="bl" rotWithShape="0">
               <a:srgbClr val="0F1B33">
                 <a:alpha val="12000"/>
               </a:srgbClr>
@@ -13710,7 +12908,7 @@
               <a:t>POC</a:t>
             </a:r>
             <a:r>
-              <a:rPr baseline="-25000" lang="en-US" sz="1400" dirty="0">
+              <a:rPr lang="en-US" sz="1400" baseline="-25000" dirty="0">
                 <a:solidFill>
                   <a:schemeClr val="tx1"/>
                 </a:solidFill>
@@ -13723,7 +12921,15 @@
                   <a:schemeClr val="tx1"/>
                 </a:solidFill>
               </a:rPr>
-              <a:t xml:space="preserve">, </a:t>
+              <a:t>, POC</a:t>
+            </a:r>
+            <a:r>
+              <a:rPr lang="en-US" sz="1400" baseline="-25000" dirty="0">
+                <a:solidFill>
+                  <a:schemeClr val="tx1"/>
+                </a:solidFill>
+              </a:rPr>
+              <a:t>B</a:t>
             </a:r>
             <a:r>
               <a:rPr lang="en-US" sz="1400" dirty="0">
@@ -13731,23 +12937,7 @@
                   <a:schemeClr val="tx1"/>
                 </a:solidFill>
               </a:rPr>
-              <a:t>POC</a:t>
-            </a:r>
-            <a:r>
-              <a:rPr baseline="-25000" lang="en-US" sz="1400" dirty="0">
-                <a:solidFill>
-                  <a:schemeClr val="tx1"/>
-                </a:solidFill>
-              </a:rPr>
-              <a:t>B</a:t>
-            </a:r>
-            <a:r>
-              <a:rPr lang="en-US" sz="1400" dirty="0">
-                <a:solidFill>
-                  <a:schemeClr val="tx1"/>
-                </a:solidFill>
-              </a:rPr>
-              <a:t xml:space="preserve"> output a near-constant angle whatever the input</a:t>
+              <a:t> output a near-constant angle whatever the input</a:t>
             </a:r>
             <a:endParaRPr lang="en-US" sz="1400" dirty="0"/>
           </a:p>
@@ -13773,7 +12963,15 @@
                   <a:schemeClr val="tx1"/>
                 </a:solidFill>
               </a:rPr>
-              <a:t>TCN</a:t>
+              <a:t>TCN, CNN</a:t>
+            </a:r>
+            <a:r>
+              <a:rPr lang="en-US" sz="1400" baseline="-25000" dirty="0">
+                <a:solidFill>
+                  <a:schemeClr val="tx1"/>
+                </a:solidFill>
+              </a:rPr>
+              <a:t>attention</a:t>
             </a:r>
             <a:r>
               <a:rPr lang="en-US" sz="1400" dirty="0">
@@ -13781,31 +12979,7 @@
                   <a:schemeClr val="tx1"/>
                 </a:solidFill>
               </a:rPr>
-              <a:t xml:space="preserve">, </a:t>
-            </a:r>
-            <a:r>
-              <a:rPr lang="en-US" sz="1400" dirty="0">
-                <a:solidFill>
-                  <a:schemeClr val="tx1"/>
-                </a:solidFill>
-              </a:rPr>
-              <a:t>CNN</a:t>
-            </a:r>
-            <a:r>
-              <a:rPr baseline="-25000" lang="en-US" sz="1400" dirty="0">
-                <a:solidFill>
-                  <a:schemeClr val="tx1"/>
-                </a:solidFill>
-              </a:rPr>
-              <a:t>attention</a:t>
-            </a:r>
-            <a:r>
-              <a:rPr lang="en-US" sz="1400" dirty="0">
-                <a:solidFill>
-                  <a:schemeClr val="tx1"/>
-                </a:solidFill>
-              </a:rPr>
-              <a:t xml:space="preserve"> are noisy and uninformative, a different failure with the same conclusion</a:t>
+              <a:t> are noisy and uninformative, a different failure with the same conclusion</a:t>
             </a:r>
             <a:endParaRPr lang="en-US" sz="1400" dirty="0"/>
           </a:p>
@@ -13837,7 +13011,7 @@
             <a:prstDash val="solid"/>
           </a:ln>
           <a:effectLst>
-            <a:outerShdw sx="100000" sy="100000" kx="0" ky="0" algn="bl" rotWithShape="0" blurRad="101600" dist="25400" dir="5400000">
+            <a:outerShdw blurRad="101600" dist="25400" dir="5400000" algn="bl" rotWithShape="0">
               <a:srgbClr val="0F1B33">
                 <a:alpha val="12000"/>
               </a:srgbClr>
@@ -13866,7 +13040,7 @@
           <a:bodyPr wrap="square" lIns="0" tIns="0" rIns="0" bIns="0" rtlCol="0" anchor="ctr"/>
           <a:lstStyle/>
           <a:p>
-            <a:pPr indent="0" marL="0">
+            <a:pPr marL="0" indent="0">
               <a:buNone/>
             </a:pPr>
             <a:r>
@@ -13875,10 +13049,10 @@
                   <a:schemeClr val="bg1"/>
                 </a:solidFill>
               </a:rPr>
-              <a:t xml:space="preserve">Collapse is a model failing to find any </a:t>
-            </a:r>
-            <a:r>
-              <a:rPr i="1" lang="en-US" sz="1400" dirty="0">
+              <a:t>Collapse is a model failing to find any </a:t>
+            </a:r>
+            <a:r>
+              <a:rPr lang="en-US" sz="1400" i="1" dirty="0">
                 <a:solidFill>
                   <a:schemeClr val="bg1"/>
                 </a:solidFill>
@@ -13886,7 +13060,7 @@
               <a:t>φ</a:t>
             </a:r>
             <a:r>
-              <a:rPr baseline="-25000" lang="en-US" sz="1400" dirty="0">
+              <a:rPr lang="en-US" sz="1400" baseline="-25000" dirty="0">
                 <a:solidFill>
                   <a:schemeClr val="bg1"/>
                 </a:solidFill>
@@ -13902,7 +13076,7 @@
               <a:t>/</a:t>
             </a:r>
             <a:r>
-              <a:rPr i="1" lang="en-US" sz="1400" dirty="0">
+              <a:rPr lang="en-US" sz="1400" i="1" dirty="0">
                 <a:solidFill>
                   <a:schemeClr val="bg1"/>
                 </a:solidFill>
@@ -13915,45 +13089,9 @@
                   <a:schemeClr val="bg1"/>
                 </a:solidFill>
               </a:rPr>
-              <a:t xml:space="preserve"> signal, not a plotting artifact: the loss wiring and gradient chain were checked and are healthy.</a:t>
+              <a:t> signal, not a plotting artifact: the loss wiring and gradient chain were checked and are healthy.</a:t>
             </a:r>
             <a:endParaRPr lang="en-US" sz="1400" dirty="0"/>
-          </a:p>
-        </p:txBody>
-      </p:sp>
-      <p:sp>
-        <p:nvSpPr>
-          <p:cNvPr id="12" name="source"/>
-          <p:cNvSpPr txBox="1"/>
-          <p:nvPr/>
-        </p:nvSpPr>
-        <p:spPr>
-          <a:xfrm>
-            <a:off x="548640" y="6400800"/>
-            <a:ext cx="10424160" cy="274320"/>
-          </a:xfrm>
-          <a:prstGeom prst="rect">
-            <a:avLst/>
-          </a:prstGeom>
-          <a:noFill/>
-          <a:ln/>
-        </p:spPr>
-        <p:txBody>
-          <a:bodyPr wrap="square" lIns="0" tIns="0" rIns="0" bIns="0" rtlCol="0" anchor="t"/>
-          <a:lstStyle/>
-          <a:p>
-            <a:pPr indent="0" marL="0">
-              <a:buNone/>
-            </a:pPr>
-            <a:r>
-              <a:rPr lang="en-US" sz="1000" dirty="0">
-                <a:solidFill>
-                  <a:schemeClr val="accent5"/>
-                </a:solidFill>
-              </a:rPr>
-              <a:t>Source: analysis_output/histogram_polarization_angle_20261019_125442.png; closing_summary.md</a:t>
-            </a:r>
-            <a:endParaRPr lang="en-US" sz="1000" dirty="0"/>
           </a:p>
         </p:txBody>
       </p:sp>
@@ -13977,7 +13115,7 @@
           </a:prstGeom>
           <a:extLst>
             <a:ext uri="{C572A759-6A51-4108-AA02-DFA0A04FC94B}">
-              <ma14:wrappingTextBoxFlag xmlns:ma14="http://schemas.microsoft.com/office/mac/drawingml/2011/main" val="0"/>
+              <ma14:wrappingTextBoxFlag xmlns:ma14="http://schemas.microsoft.com/office/mac/drawingml/2011/main" xmlns="" val="0"/>
             </a:ext>
           </a:extLst>
         </p:spPr>
@@ -13995,7 +13133,7 @@
           <a:p>
             <a:pPr algn="r"/>
             <a:fld id="{F7021451-1387-4CA6-816F-3879F97B5CBC}" type="slidenum">
-              <a:rPr b="0" lang="en-US"/>
+              <a:rPr lang="en-US" b="0"/>
               <a:t>8</a:t>
             </a:fld>
             <a:endParaRPr lang="en-US"/>
@@ -14030,9 +13168,11 @@
       <p:sp>
         <p:nvSpPr>
           <p:cNvPr id="3" name="Text 0"/>
-          <p:cNvSpPr/>
+          <p:cNvSpPr>
+            <a:spLocks noGrp="1"/>
+          </p:cNvSpPr>
           <p:nvPr>
-            <p:ph idx="100" type="title" hasCustomPrompt="1"/>
+            <p:ph type="title" idx="100" hasCustomPrompt="1"/>
           </p:nvPr>
         </p:nvSpPr>
         <p:spPr>
@@ -14050,7 +13190,7 @@
           <a:bodyPr wrap="square" lIns="0" tIns="0" rIns="0" bIns="0" rtlCol="0" anchor="t"/>
           <a:lstStyle/>
           <a:p>
-            <a:pPr algn="l" indent="0" marL="0">
+            <a:pPr marL="0" indent="0" algn="l">
               <a:buNone/>
             </a:pPr>
             <a:r>
@@ -14067,14 +13207,14 @@
       </p:sp>
       <p:pic>
         <p:nvPicPr>
-          <p:cNvPr id="4" name="Image 0" descr="Train and validation circular loss over 80 epochs; three models flat at 1.0, cnn_attention training loss falls to about 0.55 while validation stays at 1.0">    </p:cNvPr>
+          <p:cNvPr id="4" name="Image 0" descr="Train and validation circular loss over 80 epochs; three models flat at 1.0, cnn_attention training loss falls to about 0.55 while validation stays at 1.0"/>
           <p:cNvPicPr>
             <a:picLocks noChangeAspect="1"/>
           </p:cNvPicPr>
           <p:nvPr/>
         </p:nvPicPr>
         <p:blipFill>
-          <a:blip r:embed="rId1"/>
+          <a:blip r:embed="rId3"/>
           <a:stretch>
             <a:fillRect/>
           </a:stretch>
@@ -14110,7 +13250,7 @@
           <a:bodyPr wrap="square" lIns="0" tIns="0" rIns="0" bIns="0" rtlCol="0" anchor="t"/>
           <a:lstStyle/>
           <a:p>
-            <a:pPr indent="0" marL="0">
+            <a:pPr marL="0" indent="0">
               <a:buNone/>
             </a:pPr>
             <a:r>
@@ -14130,7 +13270,7 @@
               <a:t>CNN</a:t>
             </a:r>
             <a:r>
-              <a:rPr baseline="-25000" lang="en-US" sz="1600" b="1" dirty="0">
+              <a:rPr lang="en-US" sz="1600" b="1" baseline="-25000" dirty="0">
                 <a:solidFill>
                   <a:schemeClr val="tx1"/>
                 </a:solidFill>
@@ -14143,7 +13283,7 @@
                   <a:schemeClr val="tx1"/>
                 </a:solidFill>
               </a:rPr>
-              <a:t xml:space="preserve"> memorizes: </a:t>
+              <a:t> memorizes: </a:t>
             </a:r>
             <a:r>
               <a:rPr lang="en-US" sz="1600" dirty="0">
@@ -14154,42 +13294,6 @@
               <a:t>training loss falls to about 0.55 while validation stays at 1.0.</a:t>
             </a:r>
             <a:endParaRPr lang="en-US" sz="1600" dirty="0"/>
-          </a:p>
-        </p:txBody>
-      </p:sp>
-      <p:sp>
-        <p:nvSpPr>
-          <p:cNvPr id="6" name="source"/>
-          <p:cNvSpPr txBox="1"/>
-          <p:nvPr/>
-        </p:nvSpPr>
-        <p:spPr>
-          <a:xfrm>
-            <a:off x="548640" y="6400800"/>
-            <a:ext cx="10424160" cy="274320"/>
-          </a:xfrm>
-          <a:prstGeom prst="rect">
-            <a:avLst/>
-          </a:prstGeom>
-          <a:noFill/>
-          <a:ln/>
-        </p:spPr>
-        <p:txBody>
-          <a:bodyPr wrap="square" lIns="0" tIns="0" rIns="0" bIns="0" rtlCol="0" anchor="t"/>
-          <a:lstStyle/>
-          <a:p>
-            <a:pPr indent="0" marL="0">
-              <a:buNone/>
-            </a:pPr>
-            <a:r>
-              <a:rPr lang="en-US" sz="1000" dirty="0">
-                <a:solidFill>
-                  <a:schemeClr val="accent5"/>
-                </a:solidFill>
-              </a:rPr>
-              <a:t>Source: diagnostic_output/redo_models_train_val_loss.png</a:t>
-            </a:r>
-            <a:endParaRPr lang="en-US" sz="1000" dirty="0"/>
           </a:p>
         </p:txBody>
       </p:sp>
@@ -14213,7 +13317,7 @@
           </a:prstGeom>
           <a:extLst>
             <a:ext uri="{C572A759-6A51-4108-AA02-DFA0A04FC94B}">
-              <ma14:wrappingTextBoxFlag xmlns:ma14="http://schemas.microsoft.com/office/mac/drawingml/2011/main" val="0"/>
+              <ma14:wrappingTextBoxFlag xmlns:ma14="http://schemas.microsoft.com/office/mac/drawingml/2011/main" xmlns="" val="0"/>
             </a:ext>
           </a:extLst>
         </p:spPr>
@@ -14231,7 +13335,7 @@
           <a:p>
             <a:pPr algn="r"/>
             <a:fld id="{F7021451-1387-4CA6-816F-3879F97B5CBC}" type="slidenum">
-              <a:rPr b="0" lang="en-US"/>
+              <a:rPr lang="en-US" b="0"/>
               <a:t>9</a:t>
             </a:fld>
             <a:endParaRPr lang="en-US"/>
@@ -14539,4 +13643,299 @@
     </a:ext>
   </a:extLst>
 </a:theme>
+</file>
+
+<file path=ppt/theme/theme2.xml><?xml version="1.0" encoding="utf-8"?>
+<a:theme xmlns:a="http://schemas.openxmlformats.org/drawingml/2006/main" name="Office Theme">
+  <a:themeElements>
+    <a:clrScheme name="Office">
+      <a:dk1>
+        <a:sysClr val="windowText" lastClr="000000"/>
+      </a:dk1>
+      <a:lt1>
+        <a:sysClr val="window" lastClr="FFFFFF"/>
+      </a:lt1>
+      <a:dk2>
+        <a:srgbClr val="44546A"/>
+      </a:dk2>
+      <a:lt2>
+        <a:srgbClr val="E7E6E6"/>
+      </a:lt2>
+      <a:accent1>
+        <a:srgbClr val="4472C4"/>
+      </a:accent1>
+      <a:accent2>
+        <a:srgbClr val="ED7D31"/>
+      </a:accent2>
+      <a:accent3>
+        <a:srgbClr val="A5A5A5"/>
+      </a:accent3>
+      <a:accent4>
+        <a:srgbClr val="FFC000"/>
+      </a:accent4>
+      <a:accent5>
+        <a:srgbClr val="5B9BD5"/>
+      </a:accent5>
+      <a:accent6>
+        <a:srgbClr val="70AD47"/>
+      </a:accent6>
+      <a:hlink>
+        <a:srgbClr val="0563C1"/>
+      </a:hlink>
+      <a:folHlink>
+        <a:srgbClr val="954F72"/>
+      </a:folHlink>
+    </a:clrScheme>
+    <a:fontScheme name="Office">
+      <a:majorFont>
+        <a:latin typeface="Calibri Light" panose="020F0302020204030204"/>
+        <a:ea typeface=""/>
+        <a:cs typeface=""/>
+        <a:font script="Jpan" typeface="游ゴシック Light"/>
+        <a:font script="Hang" typeface="맑은 고딕"/>
+        <a:font script="Hans" typeface="等线 Light"/>
+        <a:font script="Hant" typeface="新細明體"/>
+        <a:font script="Arab" typeface="Times New Roman"/>
+        <a:font script="Hebr" typeface="Times New Roman"/>
+        <a:font script="Thai" typeface="Angsana New"/>
+        <a:font script="Ethi" typeface="Nyala"/>
+        <a:font script="Beng" typeface="Vrinda"/>
+        <a:font script="Gujr" typeface="Shruti"/>
+        <a:font script="Khmr" typeface="MoolBoran"/>
+        <a:font script="Knda" typeface="Tunga"/>
+        <a:font script="Guru" typeface="Raavi"/>
+        <a:font script="Cans" typeface="Euphemia"/>
+        <a:font script="Cher" typeface="Plantagenet Cherokee"/>
+        <a:font script="Yiii" typeface="Microsoft Yi Baiti"/>
+        <a:font script="Tibt" typeface="Microsoft Himalaya"/>
+        <a:font script="Thaa" typeface="MV Boli"/>
+        <a:font script="Deva" typeface="Mangal"/>
+        <a:font script="Telu" typeface="Gautami"/>
+        <a:font script="Taml" typeface="Latha"/>
+        <a:font script="Syrc" typeface="Estrangelo Edessa"/>
+        <a:font script="Orya" typeface="Kalinga"/>
+        <a:font script="Mlym" typeface="Kartika"/>
+        <a:font script="Laoo" typeface="DokChampa"/>
+        <a:font script="Sinh" typeface="Iskoola Pota"/>
+        <a:font script="Mong" typeface="Mongolian Baiti"/>
+        <a:font script="Viet" typeface="Times New Roman"/>
+        <a:font script="Uigh" typeface="Microsoft Uighur"/>
+        <a:font script="Geor" typeface="Sylfaen"/>
+        <a:font script="Armn" typeface="Arial"/>
+        <a:font script="Bugi" typeface="Leelawadee UI"/>
+        <a:font script="Bopo" typeface="Microsoft JhengHei"/>
+        <a:font script="Java" typeface="Javanese Text"/>
+        <a:font script="Lisu" typeface="Segoe UI"/>
+        <a:font script="Mymr" typeface="Myanmar Text"/>
+        <a:font script="Nkoo" typeface="Ebrima"/>
+        <a:font script="Olck" typeface="Nirmala UI"/>
+        <a:font script="Osma" typeface="Ebrima"/>
+        <a:font script="Phag" typeface="Phagspa"/>
+        <a:font script="Syrn" typeface="Estrangelo Edessa"/>
+        <a:font script="Syrj" typeface="Estrangelo Edessa"/>
+        <a:font script="Syre" typeface="Estrangelo Edessa"/>
+        <a:font script="Sora" typeface="Nirmala UI"/>
+        <a:font script="Tale" typeface="Microsoft Tai Le"/>
+        <a:font script="Talu" typeface="Microsoft New Tai Lue"/>
+        <a:font script="Tfng" typeface="Ebrima"/>
+      </a:majorFont>
+      <a:minorFont>
+        <a:latin typeface="Calibri" panose="020F0502020204030204"/>
+        <a:ea typeface=""/>
+        <a:cs typeface=""/>
+        <a:font script="Jpan" typeface="游ゴシック"/>
+        <a:font script="Hang" typeface="맑은 고딕"/>
+        <a:font script="Hans" typeface="等线"/>
+        <a:font script="Hant" typeface="新細明體"/>
+        <a:font script="Arab" typeface="Arial"/>
+        <a:font script="Hebr" typeface="Arial"/>
+        <a:font script="Thai" typeface="Cordia New"/>
+        <a:font script="Ethi" typeface="Nyala"/>
+        <a:font script="Beng" typeface="Vrinda"/>
+        <a:font script="Gujr" typeface="Shruti"/>
+        <a:font script="Khmr" typeface="DaunPenh"/>
+        <a:font script="Knda" typeface="Tunga"/>
+        <a:font script="Guru" typeface="Raavi"/>
+        <a:font script="Cans" typeface="Euphemia"/>
+        <a:font script="Cher" typeface="Plantagenet Cherokee"/>
+        <a:font script="Yiii" typeface="Microsoft Yi Baiti"/>
+        <a:font script="Tibt" typeface="Microsoft Himalaya"/>
+        <a:font script="Thaa" typeface="MV Boli"/>
+        <a:font script="Deva" typeface="Mangal"/>
+        <a:font script="Telu" typeface="Gautami"/>
+        <a:font script="Taml" typeface="Latha"/>
+        <a:font script="Syrc" typeface="Estrangelo Edessa"/>
+        <a:font script="Orya" typeface="Kalinga"/>
+        <a:font script="Mlym" typeface="Kartika"/>
+        <a:font script="Laoo" typeface="DokChampa"/>
+        <a:font script="Sinh" typeface="Iskoola Pota"/>
+        <a:font script="Mong" typeface="Mongolian Baiti"/>
+        <a:font script="Viet" typeface="Arial"/>
+        <a:font script="Uigh" typeface="Microsoft Uighur"/>
+        <a:font script="Geor" typeface="Sylfaen"/>
+        <a:font script="Armn" typeface="Arial"/>
+        <a:font script="Bugi" typeface="Leelawadee UI"/>
+        <a:font script="Bopo" typeface="Microsoft JhengHei"/>
+        <a:font script="Java" typeface="Javanese Text"/>
+        <a:font script="Lisu" typeface="Segoe UI"/>
+        <a:font script="Mymr" typeface="Myanmar Text"/>
+        <a:font script="Nkoo" typeface="Ebrima"/>
+        <a:font script="Olck" typeface="Nirmala UI"/>
+        <a:font script="Osma" typeface="Ebrima"/>
+        <a:font script="Phag" typeface="Phagspa"/>
+        <a:font script="Syrn" typeface="Estrangelo Edessa"/>
+        <a:font script="Syrj" typeface="Estrangelo Edessa"/>
+        <a:font script="Syre" typeface="Estrangelo Edessa"/>
+        <a:font script="Sora" typeface="Nirmala UI"/>
+        <a:font script="Tale" typeface="Microsoft Tai Le"/>
+        <a:font script="Talu" typeface="Microsoft New Tai Lue"/>
+        <a:font script="Tfng" typeface="Ebrima"/>
+      </a:minorFont>
+    </a:fontScheme>
+    <a:fmtScheme name="Office">
+      <a:fillStyleLst>
+        <a:solidFill>
+          <a:schemeClr val="phClr"/>
+        </a:solidFill>
+        <a:gradFill rotWithShape="1">
+          <a:gsLst>
+            <a:gs pos="0">
+              <a:schemeClr val="phClr">
+                <a:lumMod val="110000"/>
+                <a:satMod val="105000"/>
+                <a:tint val="67000"/>
+              </a:schemeClr>
+            </a:gs>
+            <a:gs pos="50000">
+              <a:schemeClr val="phClr">
+                <a:lumMod val="105000"/>
+                <a:satMod val="103000"/>
+                <a:tint val="73000"/>
+              </a:schemeClr>
+            </a:gs>
+            <a:gs pos="100000">
+              <a:schemeClr val="phClr">
+                <a:lumMod val="105000"/>
+                <a:satMod val="109000"/>
+                <a:tint val="81000"/>
+              </a:schemeClr>
+            </a:gs>
+          </a:gsLst>
+          <a:lin ang="5400000" scaled="0"/>
+        </a:gradFill>
+        <a:gradFill rotWithShape="1">
+          <a:gsLst>
+            <a:gs pos="0">
+              <a:schemeClr val="phClr">
+                <a:satMod val="103000"/>
+                <a:lumMod val="102000"/>
+                <a:tint val="94000"/>
+              </a:schemeClr>
+            </a:gs>
+            <a:gs pos="50000">
+              <a:schemeClr val="phClr">
+                <a:satMod val="110000"/>
+                <a:lumMod val="100000"/>
+                <a:shade val="100000"/>
+              </a:schemeClr>
+            </a:gs>
+            <a:gs pos="100000">
+              <a:schemeClr val="phClr">
+                <a:lumMod val="99000"/>
+                <a:satMod val="120000"/>
+                <a:shade val="78000"/>
+              </a:schemeClr>
+            </a:gs>
+          </a:gsLst>
+          <a:lin ang="5400000" scaled="0"/>
+        </a:gradFill>
+      </a:fillStyleLst>
+      <a:lnStyleLst>
+        <a:ln w="6350" cap="flat" cmpd="sng" algn="ctr">
+          <a:solidFill>
+            <a:schemeClr val="phClr"/>
+          </a:solidFill>
+          <a:prstDash val="solid"/>
+          <a:miter lim="800000"/>
+        </a:ln>
+        <a:ln w="12700" cap="flat" cmpd="sng" algn="ctr">
+          <a:solidFill>
+            <a:schemeClr val="phClr"/>
+          </a:solidFill>
+          <a:prstDash val="solid"/>
+          <a:miter lim="800000"/>
+        </a:ln>
+        <a:ln w="19050" cap="flat" cmpd="sng" algn="ctr">
+          <a:solidFill>
+            <a:schemeClr val="phClr"/>
+          </a:solidFill>
+          <a:prstDash val="solid"/>
+          <a:miter lim="800000"/>
+        </a:ln>
+      </a:lnStyleLst>
+      <a:effectStyleLst>
+        <a:effectStyle>
+          <a:effectLst/>
+        </a:effectStyle>
+        <a:effectStyle>
+          <a:effectLst/>
+        </a:effectStyle>
+        <a:effectStyle>
+          <a:effectLst>
+            <a:outerShdw blurRad="57150" dist="19050" dir="5400000" algn="ctr" rotWithShape="0">
+              <a:srgbClr val="000000">
+                <a:alpha val="63000"/>
+              </a:srgbClr>
+            </a:outerShdw>
+          </a:effectLst>
+        </a:effectStyle>
+      </a:effectStyleLst>
+      <a:bgFillStyleLst>
+        <a:solidFill>
+          <a:schemeClr val="phClr"/>
+        </a:solidFill>
+        <a:solidFill>
+          <a:schemeClr val="phClr">
+            <a:tint val="95000"/>
+            <a:satMod val="170000"/>
+          </a:schemeClr>
+        </a:solidFill>
+        <a:gradFill rotWithShape="1">
+          <a:gsLst>
+            <a:gs pos="0">
+              <a:schemeClr val="phClr">
+                <a:tint val="93000"/>
+                <a:satMod val="150000"/>
+                <a:shade val="98000"/>
+                <a:lumMod val="102000"/>
+              </a:schemeClr>
+            </a:gs>
+            <a:gs pos="50000">
+              <a:schemeClr val="phClr">
+                <a:tint val="98000"/>
+                <a:satMod val="130000"/>
+                <a:shade val="90000"/>
+                <a:lumMod val="103000"/>
+              </a:schemeClr>
+            </a:gs>
+            <a:gs pos="100000">
+              <a:schemeClr val="phClr">
+                <a:shade val="63000"/>
+                <a:satMod val="120000"/>
+              </a:schemeClr>
+            </a:gs>
+          </a:gsLst>
+          <a:lin ang="5400000" scaled="0"/>
+        </a:gradFill>
+      </a:bgFillStyleLst>
+    </a:fmtScheme>
+  </a:themeElements>
+  <a:objectDefaults/>
+  <a:extraClrSchemeLst/>
+  <a:extLst>
+    <a:ext uri="{05A4C25C-085E-4340-85A3-A5531E510DB2}">
+      <thm15:themeFamily xmlns:thm15="http://schemas.microsoft.com/office/thememl/2012/main" name="Office Theme" id="{62F939B6-93AF-4DB8-9C6B-D6C7DFDC589F}" vid="{4A3C46E8-61CC-4603-A589-7422A47A8E4A}"/>
+    </a:ext>
+  </a:extLst>
+</a:theme>
 </file>